--- a/dist/weeks-포트폴리오제작/포트폴리오제작_14주차_리허설.pptx
+++ b/dist/weeks-포트폴리오제작/포트폴리오제작_14주차_리허설.pptx
@@ -1569,7 +1569,7 @@
     <p:bg>
       <p:bgPr>
         <a:solidFill>
-          <a:srgbClr val="14161B"/>
+          <a:srgbClr val="FFFFFF"/>
         </a:solidFill>
       </p:bgPr>
     </p:bg>
@@ -1595,8 +1595,86 @@
         </p:nvSpPr>
         <p:spPr>
           <a:xfrm>
-            <a:off x="7223760" y="502920"/>
-            <a:ext cx="4572000" cy="5852160"/>
+            <a:off x="640080" y="274320"/>
+            <a:ext cx="3657600" cy="219456"/>
+          </a:xfrm>
+          <a:prstGeom prst="rect">
+            <a:avLst/>
+          </a:prstGeom>
+          <a:noFill/>
+          <a:ln/>
+        </p:spPr>
+        <p:txBody>
+          <a:bodyPr wrap="square" lIns="0" tIns="0" rIns="0" bIns="0" rtlCol="0" anchor="ctr"/>
+          <a:lstStyle/>
+          <a:p>
+            <a:pPr indent="0" marL="0">
+              <a:buNone/>
+            </a:pPr>
+            <a:r>
+              <a:rPr lang="en-US" sz="900" spc="120" kern="0" dirty="0">
+                <a:solidFill>
+                  <a:srgbClr val="8A8A8A"/>
+                </a:solidFill>
+                <a:latin typeface="Pretendard" pitchFamily="34" charset="0"/>
+                <a:ea typeface="Pretendard" pitchFamily="34" charset="-122"/>
+                <a:cs typeface="Pretendard" pitchFamily="34" charset="-120"/>
+              </a:rPr>
+              <a:t>포트폴리오제작</a:t>
+            </a:r>
+            <a:endParaRPr lang="en-US" sz="900" dirty="0"/>
+          </a:p>
+        </p:txBody>
+      </p:sp>
+      <p:sp>
+        <p:nvSpPr>
+          <p:cNvPr id="3" name="Text 1"/>
+          <p:cNvSpPr/>
+          <p:nvPr/>
+        </p:nvSpPr>
+        <p:spPr>
+          <a:xfrm>
+            <a:off x="4480560" y="274320"/>
+            <a:ext cx="4572000" cy="219456"/>
+          </a:xfrm>
+          <a:prstGeom prst="rect">
+            <a:avLst/>
+          </a:prstGeom>
+          <a:noFill/>
+          <a:ln/>
+        </p:spPr>
+        <p:txBody>
+          <a:bodyPr wrap="square" lIns="0" tIns="0" rIns="0" bIns="0" rtlCol="0" anchor="ctr"/>
+          <a:lstStyle/>
+          <a:p>
+            <a:pPr algn="ctr" indent="0" marL="0">
+              <a:buNone/>
+            </a:pPr>
+            <a:r>
+              <a:rPr lang="en-US" sz="900" spc="120" kern="0" dirty="0">
+                <a:solidFill>
+                  <a:srgbClr val="8A8A8A"/>
+                </a:solidFill>
+                <a:latin typeface="Pretendard" pitchFamily="34" charset="0"/>
+                <a:ea typeface="Pretendard" pitchFamily="34" charset="-122"/>
+                <a:cs typeface="Pretendard" pitchFamily="34" charset="-120"/>
+              </a:rPr>
+              <a:t>PHASE 3 완성과 발표</a:t>
+            </a:r>
+            <a:endParaRPr lang="en-US" sz="900" dirty="0"/>
+          </a:p>
+        </p:txBody>
+      </p:sp>
+      <p:sp>
+        <p:nvSpPr>
+          <p:cNvPr id="4" name="Text 2"/>
+          <p:cNvSpPr/>
+          <p:nvPr/>
+        </p:nvSpPr>
+        <p:spPr>
+          <a:xfrm>
+            <a:off x="8808415" y="274320"/>
+            <a:ext cx="2743200" cy="219456"/>
           </a:xfrm>
           <a:prstGeom prst="rect">
             <a:avLst/>
@@ -1612,30 +1690,163 @@
               <a:buNone/>
             </a:pPr>
             <a:r>
-              <a:rPr lang="en-US" sz="25500" dirty="0">
-                <a:solidFill>
-                  <a:srgbClr val="262A33"/>
-                </a:solidFill>
-                <a:latin typeface="Pretendard Thin" pitchFamily="34" charset="0"/>
-                <a:ea typeface="Pretendard Thin" pitchFamily="34" charset="-122"/>
-                <a:cs typeface="Pretendard Thin" pitchFamily="34" charset="-120"/>
+              <a:rPr lang="en-US" sz="900" spc="200" kern="0" dirty="0">
+                <a:solidFill>
+                  <a:srgbClr val="8A8A8A"/>
+                </a:solidFill>
+                <a:latin typeface="Pretendard" pitchFamily="34" charset="0"/>
+                <a:ea typeface="Pretendard" pitchFamily="34" charset="-122"/>
+                <a:cs typeface="Pretendard" pitchFamily="34" charset="-120"/>
+              </a:rPr>
+              <a:t>WEEK 14</a:t>
+            </a:r>
+            <a:endParaRPr lang="en-US" sz="900" dirty="0"/>
+          </a:p>
+        </p:txBody>
+      </p:sp>
+      <p:sp>
+        <p:nvSpPr>
+          <p:cNvPr id="5" name="Shape 3"/>
+          <p:cNvSpPr/>
+          <p:nvPr/>
+        </p:nvSpPr>
+        <p:spPr>
+          <a:xfrm>
+            <a:off x="640080" y="548640"/>
+            <a:ext cx="10911535" cy="7315"/>
+          </a:xfrm>
+          <a:prstGeom prst="rect">
+            <a:avLst/>
+          </a:prstGeom>
+          <a:solidFill>
+            <a:srgbClr val="DCDCDC"/>
+          </a:solidFill>
+          <a:ln w="12700">
+            <a:solidFill>
+              <a:srgbClr val="DCDCDC"/>
+            </a:solidFill>
+            <a:prstDash val="solid"/>
+          </a:ln>
+        </p:spPr>
+      </p:sp>
+      <p:sp>
+        <p:nvSpPr>
+          <p:cNvPr id="6" name="Text 4"/>
+          <p:cNvSpPr/>
+          <p:nvPr/>
+        </p:nvSpPr>
+        <p:spPr>
+          <a:xfrm>
+            <a:off x="7894015" y="713232"/>
+            <a:ext cx="3657600" cy="1517904"/>
+          </a:xfrm>
+          <a:prstGeom prst="rect">
+            <a:avLst/>
+          </a:prstGeom>
+          <a:noFill/>
+          <a:ln/>
+        </p:spPr>
+        <p:txBody>
+          <a:bodyPr wrap="square" lIns="0" tIns="0" rIns="0" bIns="0" rtlCol="0" anchor="ctr"/>
+          <a:lstStyle/>
+          <a:p>
+            <a:pPr algn="r" indent="0" marL="0">
+              <a:buNone/>
+            </a:pPr>
+            <a:r>
+              <a:rPr lang="en-US" sz="13200" dirty="0">
+                <a:solidFill>
+                  <a:srgbClr val="111111"/>
+                </a:solidFill>
+                <a:latin typeface="Pretendard Black" pitchFamily="34" charset="0"/>
+                <a:ea typeface="Pretendard Black" pitchFamily="34" charset="-122"/>
+                <a:cs typeface="Pretendard Black" pitchFamily="34" charset="-120"/>
               </a:rPr>
               <a:t>14</a:t>
             </a:r>
-            <a:endParaRPr lang="en-US" sz="25500" dirty="0"/>
-          </a:p>
-        </p:txBody>
-      </p:sp>
-      <p:sp>
-        <p:nvSpPr>
-          <p:cNvPr id="3" name="Text 1"/>
-          <p:cNvSpPr/>
-          <p:nvPr/>
-        </p:nvSpPr>
-        <p:spPr>
-          <a:xfrm>
-            <a:off x="640080" y="1481328"/>
-            <a:ext cx="6949440" cy="274320"/>
+            <a:endParaRPr lang="en-US" sz="13200" dirty="0"/>
+          </a:p>
+        </p:txBody>
+      </p:sp>
+      <p:sp>
+        <p:nvSpPr>
+          <p:cNvPr id="7" name="Shape 5"/>
+          <p:cNvSpPr/>
+          <p:nvPr/>
+        </p:nvSpPr>
+        <p:spPr>
+          <a:xfrm>
+            <a:off x="941832" y="877824"/>
+            <a:ext cx="0" cy="603504"/>
+          </a:xfrm>
+          <a:prstGeom prst="line">
+            <a:avLst/>
+          </a:prstGeom>
+          <a:noFill/>
+          <a:ln w="15875">
+            <a:solidFill>
+              <a:srgbClr val="111111"/>
+            </a:solidFill>
+            <a:prstDash val="solid"/>
+          </a:ln>
+        </p:spPr>
+      </p:sp>
+      <p:sp>
+        <p:nvSpPr>
+          <p:cNvPr id="8" name="Shape 6"/>
+          <p:cNvSpPr/>
+          <p:nvPr/>
+        </p:nvSpPr>
+        <p:spPr>
+          <a:xfrm>
+            <a:off x="640080" y="1239926"/>
+            <a:ext cx="301752" cy="241402"/>
+          </a:xfrm>
+          <a:prstGeom prst="line">
+            <a:avLst/>
+          </a:prstGeom>
+          <a:noFill/>
+          <a:ln w="15875">
+            <a:solidFill>
+              <a:srgbClr val="111111"/>
+            </a:solidFill>
+            <a:prstDash val="solid"/>
+          </a:ln>
+        </p:spPr>
+      </p:sp>
+      <p:sp>
+        <p:nvSpPr>
+          <p:cNvPr id="9" name="Shape 7"/>
+          <p:cNvSpPr/>
+          <p:nvPr/>
+        </p:nvSpPr>
+        <p:spPr>
+          <a:xfrm flipV="1">
+            <a:off x="941832" y="1239926"/>
+            <a:ext cx="301752" cy="241402"/>
+          </a:xfrm>
+          <a:prstGeom prst="line">
+            <a:avLst/>
+          </a:prstGeom>
+          <a:noFill/>
+          <a:ln w="15875">
+            <a:solidFill>
+              <a:srgbClr val="111111"/>
+            </a:solidFill>
+            <a:prstDash val="solid"/>
+          </a:ln>
+        </p:spPr>
+      </p:sp>
+      <p:sp>
+        <p:nvSpPr>
+          <p:cNvPr id="10" name="Text 8"/>
+          <p:cNvSpPr/>
+          <p:nvPr/>
+        </p:nvSpPr>
+        <p:spPr>
+          <a:xfrm>
+            <a:off x="640080" y="1901952"/>
+            <a:ext cx="7498080" cy="237744"/>
           </a:xfrm>
           <a:prstGeom prst="rect">
             <a:avLst/>
@@ -1651,9 +1862,9 @@
               <a:buNone/>
             </a:pPr>
             <a:r>
-              <a:rPr lang="en-US" sz="1200" b="1" spc="160" kern="0" dirty="0">
-                <a:solidFill>
-                  <a:srgbClr val="FF4A1C"/>
+              <a:rPr lang="en-US" sz="950" spc="260" kern="0" dirty="0">
+                <a:solidFill>
+                  <a:srgbClr val="8A8A8A"/>
                 </a:solidFill>
                 <a:latin typeface="Pretendard" pitchFamily="34" charset="0"/>
                 <a:ea typeface="Pretendard" pitchFamily="34" charset="-122"/>
@@ -1661,62 +1872,62 @@
               </a:rPr>
               <a:t>WEEK 14  ·  PHASE 3 완성과 발표</a:t>
             </a:r>
-            <a:endParaRPr lang="en-US" sz="1200" dirty="0"/>
-          </a:p>
-        </p:txBody>
-      </p:sp>
-      <p:sp>
-        <p:nvSpPr>
-          <p:cNvPr id="4" name="Text 2"/>
-          <p:cNvSpPr/>
-          <p:nvPr/>
-        </p:nvSpPr>
-        <p:spPr>
-          <a:xfrm>
-            <a:off x="640080" y="1737360"/>
-            <a:ext cx="7315200" cy="1225296"/>
-          </a:xfrm>
-          <a:prstGeom prst="rect">
-            <a:avLst/>
-          </a:prstGeom>
-          <a:noFill/>
-          <a:ln/>
-        </p:spPr>
-        <p:txBody>
-          <a:bodyPr wrap="square" lIns="0" tIns="0" rIns="0" bIns="0" rtlCol="0" anchor="ctr"/>
+            <a:endParaRPr lang="en-US" sz="950" dirty="0"/>
+          </a:p>
+        </p:txBody>
+      </p:sp>
+      <p:sp>
+        <p:nvSpPr>
+          <p:cNvPr id="11" name="Text 9"/>
+          <p:cNvSpPr/>
+          <p:nvPr/>
+        </p:nvSpPr>
+        <p:spPr>
+          <a:xfrm>
+            <a:off x="640080" y="2194560"/>
+            <a:ext cx="8595360" cy="1225296"/>
+          </a:xfrm>
+          <a:prstGeom prst="rect">
+            <a:avLst/>
+          </a:prstGeom>
+          <a:noFill/>
+          <a:ln/>
+        </p:spPr>
+        <p:txBody>
+          <a:bodyPr wrap="square" lIns="0" tIns="0" rIns="0" bIns="0" rtlCol="0" anchor="t"/>
           <a:lstStyle/>
           <a:p>
             <a:pPr indent="0" marL="0">
               <a:lnSpc>
-                <a:spcPct val="116000"/>
+                <a:spcPct val="112000"/>
               </a:lnSpc>
               <a:buNone/>
             </a:pPr>
             <a:r>
-              <a:rPr lang="en-US" sz="3400" b="1" dirty="0">
-                <a:solidFill>
-                  <a:srgbClr val="FFFFFF"/>
-                </a:solidFill>
-                <a:latin typeface="Pretendard" pitchFamily="34" charset="0"/>
-                <a:ea typeface="Pretendard" pitchFamily="34" charset="-122"/>
-                <a:cs typeface="Pretendard" pitchFamily="34" charset="-120"/>
+              <a:rPr lang="en-US" sz="4000" dirty="0">
+                <a:solidFill>
+                  <a:srgbClr val="111111"/>
+                </a:solidFill>
+                <a:latin typeface="Pretendard Black" pitchFamily="34" charset="0"/>
+                <a:ea typeface="Pretendard Black" pitchFamily="34" charset="-122"/>
+                <a:cs typeface="Pretendard Black" pitchFamily="34" charset="-120"/>
               </a:rPr>
               <a:t>최종 리허설 및 동료 피드백</a:t>
             </a:r>
-            <a:endParaRPr lang="en-US" sz="3400" dirty="0"/>
-          </a:p>
-        </p:txBody>
-      </p:sp>
-      <p:sp>
-        <p:nvSpPr>
-          <p:cNvPr id="5" name="Text 3"/>
-          <p:cNvSpPr/>
-          <p:nvPr/>
-        </p:nvSpPr>
-        <p:spPr>
-          <a:xfrm>
-            <a:off x="640080" y="3035808"/>
-            <a:ext cx="7132320" cy="640080"/>
+            <a:endParaRPr lang="en-US" sz="4000" dirty="0"/>
+          </a:p>
+        </p:txBody>
+      </p:sp>
+      <p:sp>
+        <p:nvSpPr>
+          <p:cNvPr id="12" name="Text 10"/>
+          <p:cNvSpPr/>
+          <p:nvPr/>
+        </p:nvSpPr>
+        <p:spPr>
+          <a:xfrm>
+            <a:off x="640080" y="3547872"/>
+            <a:ext cx="7863840" cy="694944"/>
           </a:xfrm>
           <a:prstGeom prst="rect">
             <a:avLst/>
@@ -1730,14 +1941,14 @@
           <a:p>
             <a:pPr indent="0" marL="0">
               <a:lnSpc>
-                <a:spcPct val="124000"/>
+                <a:spcPct val="130000"/>
               </a:lnSpc>
               <a:buNone/>
             </a:pPr>
             <a:r>
-              <a:rPr lang="en-US" sz="1700" dirty="0">
-                <a:solidFill>
-                  <a:srgbClr val="C9CDD6"/>
+              <a:rPr lang="en-US" sz="1600" dirty="0">
+                <a:solidFill>
+                  <a:srgbClr val="6E6E6E"/>
                 </a:solidFill>
                 <a:latin typeface="Pretendard Light" pitchFamily="34" charset="0"/>
                 <a:ea typeface="Pretendard Light" pitchFamily="34" charset="-122"/>
@@ -1745,19 +1956,19 @@
               </a:rPr>
               <a:t>발표 리허설로 완성도를 점검하고,</a:t>
             </a:r>
-            <a:endParaRPr lang="en-US" sz="1700" dirty="0"/>
+            <a:endParaRPr lang="en-US" sz="1600" dirty="0"/>
           </a:p>
           <a:p>
             <a:pPr indent="0" marL="0">
               <a:lnSpc>
-                <a:spcPct val="124000"/>
+                <a:spcPct val="130000"/>
               </a:lnSpc>
               <a:buNone/>
             </a:pPr>
             <a:r>
-              <a:rPr lang="en-US" sz="1700" dirty="0">
-                <a:solidFill>
-                  <a:srgbClr val="C9CDD6"/>
+              <a:rPr lang="en-US" sz="1600" dirty="0">
+                <a:solidFill>
+                  <a:srgbClr val="6E6E6E"/>
                 </a:solidFill>
                 <a:latin typeface="Pretendard Light" pitchFamily="34" charset="0"/>
                 <a:ea typeface="Pretendard Light" pitchFamily="34" charset="-122"/>
@@ -1765,30 +1976,30 @@
               </a:rPr>
               <a:t>마지막 보완 우선순위를 정합니다.</a:t>
             </a:r>
-            <a:endParaRPr lang="en-US" sz="1700" dirty="0"/>
-          </a:p>
-        </p:txBody>
-      </p:sp>
-      <p:sp>
-        <p:nvSpPr>
-          <p:cNvPr id="6" name="Shape 4"/>
-          <p:cNvSpPr/>
-          <p:nvPr/>
-        </p:nvSpPr>
-        <p:spPr>
-          <a:xfrm>
-            <a:off x="640080" y="3840480"/>
-            <a:ext cx="2926080" cy="9144"/>
+            <a:endParaRPr lang="en-US" sz="1600" dirty="0"/>
+          </a:p>
+        </p:txBody>
+      </p:sp>
+      <p:sp>
+        <p:nvSpPr>
+          <p:cNvPr id="13" name="Shape 11"/>
+          <p:cNvSpPr/>
+          <p:nvPr/>
+        </p:nvSpPr>
+        <p:spPr>
+          <a:xfrm>
+            <a:off x="640080" y="4443984"/>
+            <a:ext cx="2743200" cy="7315"/>
           </a:xfrm>
           <a:prstGeom prst="rect">
             <a:avLst/>
           </a:prstGeom>
           <a:solidFill>
-            <a:srgbClr val="3A3F4B"/>
+            <a:srgbClr val="111111"/>
           </a:solidFill>
           <a:ln w="12700">
             <a:solidFill>
-              <a:srgbClr val="3A3F4B"/>
+              <a:srgbClr val="111111"/>
             </a:solidFill>
             <a:prstDash val="solid"/>
           </a:ln>
@@ -1796,14 +2007,14 @@
       </p:sp>
       <p:sp>
         <p:nvSpPr>
-          <p:cNvPr id="7" name="Text 5"/>
-          <p:cNvSpPr/>
-          <p:nvPr/>
-        </p:nvSpPr>
-        <p:spPr>
-          <a:xfrm>
-            <a:off x="640080" y="4059936"/>
-            <a:ext cx="914400" cy="310896"/>
+          <p:cNvPr id="14" name="Text 12"/>
+          <p:cNvSpPr/>
+          <p:nvPr/>
+        </p:nvSpPr>
+        <p:spPr>
+          <a:xfrm>
+            <a:off x="640080" y="4645152"/>
+            <a:ext cx="914400" cy="292608"/>
           </a:xfrm>
           <a:prstGeom prst="rect">
             <a:avLst/>
@@ -1819,9 +2030,9 @@
               <a:buNone/>
             </a:pPr>
             <a:r>
-              <a:rPr lang="en-US" sz="1100" b="1" dirty="0">
-                <a:solidFill>
-                  <a:srgbClr val="9AA0AA"/>
+              <a:rPr lang="en-US" sz="950" spc="140" kern="0" dirty="0">
+                <a:solidFill>
+                  <a:srgbClr val="9B9B9B"/>
                 </a:solidFill>
                 <a:latin typeface="Pretendard" pitchFamily="34" charset="0"/>
                 <a:ea typeface="Pretendard" pitchFamily="34" charset="-122"/>
@@ -1829,20 +2040,20 @@
               </a:rPr>
               <a:t>과목</a:t>
             </a:r>
-            <a:endParaRPr lang="en-US" sz="1100" dirty="0"/>
-          </a:p>
-        </p:txBody>
-      </p:sp>
-      <p:sp>
-        <p:nvSpPr>
-          <p:cNvPr id="8" name="Text 6"/>
-          <p:cNvSpPr/>
-          <p:nvPr/>
-        </p:nvSpPr>
-        <p:spPr>
-          <a:xfrm>
-            <a:off x="1645920" y="4059936"/>
-            <a:ext cx="6400800" cy="310896"/>
+            <a:endParaRPr lang="en-US" sz="950" dirty="0"/>
+          </a:p>
+        </p:txBody>
+      </p:sp>
+      <p:sp>
+        <p:nvSpPr>
+          <p:cNvPr id="15" name="Text 13"/>
+          <p:cNvSpPr/>
+          <p:nvPr/>
+        </p:nvSpPr>
+        <p:spPr>
+          <a:xfrm>
+            <a:off x="1645920" y="4645152"/>
+            <a:ext cx="7680960" cy="292608"/>
           </a:xfrm>
           <a:prstGeom prst="rect">
             <a:avLst/>
@@ -1858,9 +2069,9 @@
               <a:buNone/>
             </a:pPr>
             <a:r>
-              <a:rPr lang="en-US" sz="1250" dirty="0">
-                <a:solidFill>
-                  <a:srgbClr val="DDE0E6"/>
+              <a:rPr lang="en-US" sz="1200" dirty="0">
+                <a:solidFill>
+                  <a:srgbClr val="1F1F1F"/>
                 </a:solidFill>
                 <a:latin typeface="Pretendard" pitchFamily="34" charset="0"/>
                 <a:ea typeface="Pretendard" pitchFamily="34" charset="-122"/>
@@ -1868,20 +2079,20 @@
               </a:rPr>
               <a:t>포트폴리오제작 · 실내·산업디자인학과 3학년</a:t>
             </a:r>
-            <a:endParaRPr lang="en-US" sz="1250" dirty="0"/>
-          </a:p>
-        </p:txBody>
-      </p:sp>
-      <p:sp>
-        <p:nvSpPr>
-          <p:cNvPr id="9" name="Text 7"/>
-          <p:cNvSpPr/>
-          <p:nvPr/>
-        </p:nvSpPr>
-        <p:spPr>
-          <a:xfrm>
-            <a:off x="640080" y="4443984"/>
-            <a:ext cx="914400" cy="310896"/>
+            <a:endParaRPr lang="en-US" sz="1200" dirty="0"/>
+          </a:p>
+        </p:txBody>
+      </p:sp>
+      <p:sp>
+        <p:nvSpPr>
+          <p:cNvPr id="16" name="Text 14"/>
+          <p:cNvSpPr/>
+          <p:nvPr/>
+        </p:nvSpPr>
+        <p:spPr>
+          <a:xfrm>
+            <a:off x="640080" y="5029200"/>
+            <a:ext cx="914400" cy="292608"/>
           </a:xfrm>
           <a:prstGeom prst="rect">
             <a:avLst/>
@@ -1897,9 +2108,9 @@
               <a:buNone/>
             </a:pPr>
             <a:r>
-              <a:rPr lang="en-US" sz="1100" b="1" dirty="0">
-                <a:solidFill>
-                  <a:srgbClr val="9AA0AA"/>
+              <a:rPr lang="en-US" sz="950" spc="140" kern="0" dirty="0">
+                <a:solidFill>
+                  <a:srgbClr val="9B9B9B"/>
                 </a:solidFill>
                 <a:latin typeface="Pretendard" pitchFamily="34" charset="0"/>
                 <a:ea typeface="Pretendard" pitchFamily="34" charset="-122"/>
@@ -1907,20 +2118,20 @@
               </a:rPr>
               <a:t>오늘</a:t>
             </a:r>
-            <a:endParaRPr lang="en-US" sz="1100" dirty="0"/>
-          </a:p>
-        </p:txBody>
-      </p:sp>
-      <p:sp>
-        <p:nvSpPr>
-          <p:cNvPr id="10" name="Text 8"/>
-          <p:cNvSpPr/>
-          <p:nvPr/>
-        </p:nvSpPr>
-        <p:spPr>
-          <a:xfrm>
-            <a:off x="1645920" y="4443984"/>
-            <a:ext cx="6400800" cy="310896"/>
+            <a:endParaRPr lang="en-US" sz="950" dirty="0"/>
+          </a:p>
+        </p:txBody>
+      </p:sp>
+      <p:sp>
+        <p:nvSpPr>
+          <p:cNvPr id="17" name="Text 15"/>
+          <p:cNvSpPr/>
+          <p:nvPr/>
+        </p:nvSpPr>
+        <p:spPr>
+          <a:xfrm>
+            <a:off x="1645920" y="5029200"/>
+            <a:ext cx="7680960" cy="292608"/>
           </a:xfrm>
           <a:prstGeom prst="rect">
             <a:avLst/>
@@ -1936,9 +2147,9 @@
               <a:buNone/>
             </a:pPr>
             <a:r>
-              <a:rPr lang="en-US" sz="1250" dirty="0">
-                <a:solidFill>
-                  <a:srgbClr val="DDE0E6"/>
+              <a:rPr lang="en-US" sz="1200" dirty="0">
+                <a:solidFill>
+                  <a:srgbClr val="1F1F1F"/>
                 </a:solidFill>
                 <a:latin typeface="Pretendard" pitchFamily="34" charset="0"/>
                 <a:ea typeface="Pretendard" pitchFamily="34" charset="-122"/>
@@ -1946,20 +2157,20 @@
               </a:rPr>
               <a:t>90분 — 조별 리허설 40분 · 동료 평가 30분 · 보완 계획 10분</a:t>
             </a:r>
-            <a:endParaRPr lang="en-US" sz="1250" dirty="0"/>
-          </a:p>
-        </p:txBody>
-      </p:sp>
-      <p:sp>
-        <p:nvSpPr>
-          <p:cNvPr id="11" name="Text 9"/>
-          <p:cNvSpPr/>
-          <p:nvPr/>
-        </p:nvSpPr>
-        <p:spPr>
-          <a:xfrm>
-            <a:off x="640080" y="4828032"/>
-            <a:ext cx="914400" cy="310896"/>
+            <a:endParaRPr lang="en-US" sz="1200" dirty="0"/>
+          </a:p>
+        </p:txBody>
+      </p:sp>
+      <p:sp>
+        <p:nvSpPr>
+          <p:cNvPr id="18" name="Text 16"/>
+          <p:cNvSpPr/>
+          <p:nvPr/>
+        </p:nvSpPr>
+        <p:spPr>
+          <a:xfrm>
+            <a:off x="640080" y="5413248"/>
+            <a:ext cx="914400" cy="292608"/>
           </a:xfrm>
           <a:prstGeom prst="rect">
             <a:avLst/>
@@ -1975,9 +2186,9 @@
               <a:buNone/>
             </a:pPr>
             <a:r>
-              <a:rPr lang="en-US" sz="1100" b="1" dirty="0">
-                <a:solidFill>
-                  <a:srgbClr val="9AA0AA"/>
+              <a:rPr lang="en-US" sz="950" spc="140" kern="0" dirty="0">
+                <a:solidFill>
+                  <a:srgbClr val="9B9B9B"/>
                 </a:solidFill>
                 <a:latin typeface="Pretendard" pitchFamily="34" charset="0"/>
                 <a:ea typeface="Pretendard" pitchFamily="34" charset="-122"/>
@@ -1985,20 +2196,20 @@
               </a:rPr>
               <a:t>제출물</a:t>
             </a:r>
-            <a:endParaRPr lang="en-US" sz="1100" dirty="0"/>
-          </a:p>
-        </p:txBody>
-      </p:sp>
-      <p:sp>
-        <p:nvSpPr>
-          <p:cNvPr id="12" name="Text 10"/>
-          <p:cNvSpPr/>
-          <p:nvPr/>
-        </p:nvSpPr>
-        <p:spPr>
-          <a:xfrm>
-            <a:off x="1645920" y="4828032"/>
-            <a:ext cx="6400800" cy="310896"/>
+            <a:endParaRPr lang="en-US" sz="950" dirty="0"/>
+          </a:p>
+        </p:txBody>
+      </p:sp>
+      <p:sp>
+        <p:nvSpPr>
+          <p:cNvPr id="19" name="Text 17"/>
+          <p:cNvSpPr/>
+          <p:nvPr/>
+        </p:nvSpPr>
+        <p:spPr>
+          <a:xfrm>
+            <a:off x="1645920" y="5413248"/>
+            <a:ext cx="7680960" cy="292608"/>
           </a:xfrm>
           <a:prstGeom prst="rect">
             <a:avLst/>
@@ -2014,9 +2225,9 @@
               <a:buNone/>
             </a:pPr>
             <a:r>
-              <a:rPr lang="en-US" sz="1250" dirty="0">
-                <a:solidFill>
-                  <a:srgbClr val="DDE0E6"/>
+              <a:rPr lang="en-US" sz="1200" dirty="0">
+                <a:solidFill>
+                  <a:srgbClr val="1F1F1F"/>
                 </a:solidFill>
                 <a:latin typeface="Pretendard" pitchFamily="34" charset="0"/>
                 <a:ea typeface="Pretendard" pitchFamily="34" charset="-122"/>
@@ -2024,9 +2235,73 @@
               </a:rPr>
               <a:t>리허설 보완본 + 보완 계획표</a:t>
             </a:r>
-            <a:endParaRPr lang="en-US" sz="1250" dirty="0"/>
-          </a:p>
-        </p:txBody>
+            <a:endParaRPr lang="en-US" sz="1200" dirty="0"/>
+          </a:p>
+        </p:txBody>
+      </p:sp>
+      <p:sp>
+        <p:nvSpPr>
+          <p:cNvPr id="20" name="Text 18"/>
+          <p:cNvSpPr/>
+          <p:nvPr/>
+        </p:nvSpPr>
+        <p:spPr>
+          <a:xfrm rot="16200000">
+            <a:off x="10436047" y="3291840"/>
+            <a:ext cx="2743200" cy="274320"/>
+          </a:xfrm>
+          <a:prstGeom prst="rect">
+            <a:avLst/>
+          </a:prstGeom>
+          <a:noFill/>
+          <a:ln/>
+        </p:spPr>
+        <p:txBody>
+          <a:bodyPr wrap="square" lIns="0" tIns="0" rIns="0" bIns="0" rtlCol="0" anchor="ctr"/>
+          <a:lstStyle/>
+          <a:p>
+            <a:pPr algn="ctr" indent="0" marL="0">
+              <a:buNone/>
+            </a:pPr>
+            <a:r>
+              <a:rPr lang="en-US" sz="850" spc="260" kern="0" dirty="0">
+                <a:solidFill>
+                  <a:srgbClr val="9B9B9B"/>
+                </a:solidFill>
+                <a:latin typeface="Pretendard" pitchFamily="34" charset="0"/>
+                <a:ea typeface="Pretendard" pitchFamily="34" charset="-122"/>
+                <a:cs typeface="Pretendard" pitchFamily="34" charset="-120"/>
+              </a:rPr>
+              <a:t>WONKWANG UNIV · 2026-2</a:t>
+            </a:r>
+            <a:endParaRPr lang="en-US" sz="850" dirty="0"/>
+          </a:p>
+        </p:txBody>
+      </p:sp>
+      <p:sp>
+        <p:nvSpPr>
+          <p:cNvPr id="21" name="Shape 19"/>
+          <p:cNvSpPr/>
+          <p:nvPr/>
+        </p:nvSpPr>
+        <p:spPr>
+          <a:xfrm>
+            <a:off x="640080" y="6291072"/>
+            <a:ext cx="10911535" cy="7315"/>
+          </a:xfrm>
+          <a:prstGeom prst="rect">
+            <a:avLst/>
+          </a:prstGeom>
+          <a:solidFill>
+            <a:srgbClr val="DCDCDC"/>
+          </a:solidFill>
+          <a:ln w="12700">
+            <a:solidFill>
+              <a:srgbClr val="DCDCDC"/>
+            </a:solidFill>
+            <a:prstDash val="solid"/>
+          </a:ln>
+        </p:spPr>
       </p:sp>
     </p:spTree>
   </p:cSld>
@@ -2068,8 +2343,8 @@
         </p:nvSpPr>
         <p:spPr>
           <a:xfrm>
-            <a:off x="640080" y="566928"/>
-            <a:ext cx="10911535" cy="237744"/>
+            <a:off x="640080" y="274320"/>
+            <a:ext cx="3657600" cy="219456"/>
           </a:xfrm>
           <a:prstGeom prst="rect">
             <a:avLst/>
@@ -2085,17 +2360,17 @@
               <a:buNone/>
             </a:pPr>
             <a:r>
-              <a:rPr lang="en-US" sz="1100" b="1" spc="140" kern="0" dirty="0">
-                <a:solidFill>
-                  <a:srgbClr val="FF4A1C"/>
-                </a:solidFill>
-                <a:latin typeface="Pretendard" pitchFamily="34" charset="0"/>
-                <a:ea typeface="Pretendard" pitchFamily="34" charset="-122"/>
-                <a:cs typeface="Pretendard" pitchFamily="34" charset="-120"/>
-              </a:rPr>
-              <a:t>TODAY</a:t>
-            </a:r>
-            <a:endParaRPr lang="en-US" sz="1100" dirty="0"/>
+              <a:rPr lang="en-US" sz="900" spc="120" kern="0" dirty="0">
+                <a:solidFill>
+                  <a:srgbClr val="8A8A8A"/>
+                </a:solidFill>
+                <a:latin typeface="Pretendard" pitchFamily="34" charset="0"/>
+                <a:ea typeface="Pretendard" pitchFamily="34" charset="-122"/>
+                <a:cs typeface="Pretendard" pitchFamily="34" charset="-120"/>
+              </a:rPr>
+              <a:t>포트폴리오제작</a:t>
+            </a:r>
+            <a:endParaRPr lang="en-US" sz="900" dirty="0"/>
           </a:p>
         </p:txBody>
       </p:sp>
@@ -2107,34 +2382,34 @@
         </p:nvSpPr>
         <p:spPr>
           <a:xfrm>
-            <a:off x="640080" y="859536"/>
-            <a:ext cx="10911535" cy="512064"/>
-          </a:xfrm>
-          <a:prstGeom prst="rect">
-            <a:avLst/>
-          </a:prstGeom>
-          <a:noFill/>
-          <a:ln/>
-        </p:spPr>
-        <p:txBody>
-          <a:bodyPr wrap="square" lIns="0" tIns="0" rIns="0" bIns="0" rtlCol="0" anchor="ctr"/>
-          <a:lstStyle/>
-          <a:p>
-            <a:pPr indent="0" marL="0">
-              <a:buNone/>
-            </a:pPr>
-            <a:r>
-              <a:rPr lang="en-US" sz="2800" b="1" dirty="0">
-                <a:solidFill>
-                  <a:srgbClr val="14161B"/>
-                </a:solidFill>
-                <a:latin typeface="Pretendard" pitchFamily="34" charset="0"/>
-                <a:ea typeface="Pretendard" pitchFamily="34" charset="-122"/>
-                <a:cs typeface="Pretendard" pitchFamily="34" charset="-120"/>
-              </a:rPr>
-              <a:t>오늘의 90분</a:t>
-            </a:r>
-            <a:endParaRPr lang="en-US" sz="2800" dirty="0"/>
+            <a:off x="4480560" y="274320"/>
+            <a:ext cx="4572000" cy="219456"/>
+          </a:xfrm>
+          <a:prstGeom prst="rect">
+            <a:avLst/>
+          </a:prstGeom>
+          <a:noFill/>
+          <a:ln/>
+        </p:spPr>
+        <p:txBody>
+          <a:bodyPr wrap="square" lIns="0" tIns="0" rIns="0" bIns="0" rtlCol="0" anchor="ctr"/>
+          <a:lstStyle/>
+          <a:p>
+            <a:pPr algn="ctr" indent="0" marL="0">
+              <a:buNone/>
+            </a:pPr>
+            <a:r>
+              <a:rPr lang="en-US" sz="900" spc="120" kern="0" dirty="0">
+                <a:solidFill>
+                  <a:srgbClr val="8A8A8A"/>
+                </a:solidFill>
+                <a:latin typeface="Pretendard" pitchFamily="34" charset="0"/>
+                <a:ea typeface="Pretendard" pitchFamily="34" charset="-122"/>
+                <a:cs typeface="Pretendard" pitchFamily="34" charset="-120"/>
+              </a:rPr>
+              <a:t>PHASE 3 완성과 발표</a:t>
+            </a:r>
+            <a:endParaRPr lang="en-US" sz="900" dirty="0"/>
           </a:p>
         </p:txBody>
       </p:sp>
@@ -2146,125 +2421,8 @@
         </p:nvSpPr>
         <p:spPr>
           <a:xfrm>
-            <a:off x="640080" y="1371600"/>
-            <a:ext cx="10911535" cy="237744"/>
-          </a:xfrm>
-          <a:prstGeom prst="rect">
-            <a:avLst/>
-          </a:prstGeom>
-          <a:noFill/>
-          <a:ln/>
-        </p:spPr>
-        <p:txBody>
-          <a:bodyPr wrap="square" lIns="0" tIns="0" rIns="0" bIns="0" rtlCol="0" anchor="ctr"/>
-          <a:lstStyle/>
-          <a:p>
-            <a:pPr indent="0" marL="0">
-              <a:buNone/>
-            </a:pPr>
-            <a:r>
-              <a:rPr lang="en-US" sz="1200" dirty="0">
-                <a:solidFill>
-                  <a:srgbClr val="6B7280"/>
-                </a:solidFill>
-                <a:latin typeface="Pretendard" pitchFamily="34" charset="0"/>
-                <a:ea typeface="Pretendard" pitchFamily="34" charset="-122"/>
-                <a:cs typeface="Pretendard" pitchFamily="34" charset="-120"/>
-              </a:rPr>
-              <a:t>조별 리허설 40분 · 동료 평가 30분 · 보완 계획 10분</a:t>
-            </a:r>
-            <a:endParaRPr lang="en-US" sz="1200" dirty="0"/>
-          </a:p>
-        </p:txBody>
-      </p:sp>
-      <p:sp>
-        <p:nvSpPr>
-          <p:cNvPr id="5" name="Text 3"/>
-          <p:cNvSpPr/>
-          <p:nvPr/>
-        </p:nvSpPr>
-        <p:spPr>
-          <a:xfrm>
-            <a:off x="640080" y="1719072"/>
-            <a:ext cx="1600200" cy="932688"/>
-          </a:xfrm>
-          <a:prstGeom prst="rect">
-            <a:avLst/>
-          </a:prstGeom>
-          <a:noFill/>
-          <a:ln/>
-        </p:spPr>
-        <p:txBody>
-          <a:bodyPr wrap="square" lIns="0" tIns="0" rIns="0" bIns="0" rtlCol="0" anchor="ctr"/>
-          <a:lstStyle/>
-          <a:p>
-            <a:pPr indent="0" marL="0">
-              <a:buNone/>
-            </a:pPr>
-            <a:r>
-              <a:rPr lang="en-US" sz="1100" b="1" dirty="0">
-                <a:solidFill>
-                  <a:srgbClr val="FF4A1C"/>
-                </a:solidFill>
-                <a:latin typeface="Pretendard" pitchFamily="34" charset="0"/>
-                <a:ea typeface="Pretendard" pitchFamily="34" charset="-122"/>
-                <a:cs typeface="Pretendard" pitchFamily="34" charset="-120"/>
-              </a:rPr>
-              <a:t>00:00–00:40</a:t>
-            </a:r>
-            <a:endParaRPr lang="en-US" sz="1100" dirty="0"/>
-          </a:p>
-        </p:txBody>
-      </p:sp>
-      <p:sp>
-        <p:nvSpPr>
-          <p:cNvPr id="6" name="Text 4"/>
-          <p:cNvSpPr/>
-          <p:nvPr/>
-        </p:nvSpPr>
-        <p:spPr>
-          <a:xfrm>
-            <a:off x="2377440" y="1719072"/>
-            <a:ext cx="6888175" cy="932688"/>
-          </a:xfrm>
-          <a:prstGeom prst="rect">
-            <a:avLst/>
-          </a:prstGeom>
-          <a:noFill/>
-          <a:ln/>
-        </p:spPr>
-        <p:txBody>
-          <a:bodyPr wrap="square" lIns="0" tIns="0" rIns="0" bIns="0" rtlCol="0" anchor="ctr"/>
-          <a:lstStyle/>
-          <a:p>
-            <a:pPr indent="0" marL="0">
-              <a:buNone/>
-            </a:pPr>
-            <a:r>
-              <a:rPr lang="en-US" sz="1300" b="1" dirty="0">
-                <a:solidFill>
-                  <a:srgbClr val="14161B"/>
-                </a:solidFill>
-                <a:latin typeface="Pretendard" pitchFamily="34" charset="0"/>
-                <a:ea typeface="Pretendard" pitchFamily="34" charset="-122"/>
-                <a:cs typeface="Pretendard" pitchFamily="34" charset="-120"/>
-              </a:rPr>
-              <a:t>조별 리허설</a:t>
-            </a:r>
-            <a:endParaRPr lang="en-US" sz="1300" dirty="0"/>
-          </a:p>
-        </p:txBody>
-      </p:sp>
-      <p:sp>
-        <p:nvSpPr>
-          <p:cNvPr id="7" name="Text 5"/>
-          <p:cNvSpPr/>
-          <p:nvPr/>
-        </p:nvSpPr>
-        <p:spPr>
-          <a:xfrm>
-            <a:off x="9265615" y="1719072"/>
-            <a:ext cx="2286000" cy="932688"/>
+            <a:off x="8808415" y="274320"/>
+            <a:ext cx="2743200" cy="219456"/>
           </a:xfrm>
           <a:prstGeom prst="rect">
             <a:avLst/>
@@ -2280,40 +2438,40 @@
               <a:buNone/>
             </a:pPr>
             <a:r>
-              <a:rPr lang="en-US" sz="1100" dirty="0">
-                <a:solidFill>
-                  <a:srgbClr val="6B7280"/>
-                </a:solidFill>
-                <a:latin typeface="Pretendard" pitchFamily="34" charset="0"/>
-                <a:ea typeface="Pretendard" pitchFamily="34" charset="-122"/>
-                <a:cs typeface="Pretendard" pitchFamily="34" charset="-120"/>
-              </a:rPr>
-              <a:t>4~5인 조별</a:t>
-            </a:r>
-            <a:endParaRPr lang="en-US" sz="1100" dirty="0"/>
-          </a:p>
-        </p:txBody>
-      </p:sp>
-      <p:sp>
-        <p:nvSpPr>
-          <p:cNvPr id="8" name="Shape 6"/>
-          <p:cNvSpPr/>
-          <p:nvPr/>
-        </p:nvSpPr>
-        <p:spPr>
-          <a:xfrm>
-            <a:off x="640080" y="2633472"/>
-            <a:ext cx="10911535" cy="9144"/>
+              <a:rPr lang="en-US" sz="900" spc="200" kern="0" dirty="0">
+                <a:solidFill>
+                  <a:srgbClr val="8A8A8A"/>
+                </a:solidFill>
+                <a:latin typeface="Pretendard" pitchFamily="34" charset="0"/>
+                <a:ea typeface="Pretendard" pitchFamily="34" charset="-122"/>
+                <a:cs typeface="Pretendard" pitchFamily="34" charset="-120"/>
+              </a:rPr>
+              <a:t>WEEK 14</a:t>
+            </a:r>
+            <a:endParaRPr lang="en-US" sz="900" dirty="0"/>
+          </a:p>
+        </p:txBody>
+      </p:sp>
+      <p:sp>
+        <p:nvSpPr>
+          <p:cNvPr id="5" name="Shape 3"/>
+          <p:cNvSpPr/>
+          <p:nvPr/>
+        </p:nvSpPr>
+        <p:spPr>
+          <a:xfrm>
+            <a:off x="640080" y="548640"/>
+            <a:ext cx="10911535" cy="7315"/>
           </a:xfrm>
           <a:prstGeom prst="rect">
             <a:avLst/>
           </a:prstGeom>
           <a:solidFill>
-            <a:srgbClr val="E4E6EB"/>
+            <a:srgbClr val="DCDCDC"/>
           </a:solidFill>
           <a:ln w="12700">
             <a:solidFill>
-              <a:srgbClr val="E4E6EB"/>
+              <a:srgbClr val="DCDCDC"/>
             </a:solidFill>
             <a:prstDash val="solid"/>
           </a:ln>
@@ -2321,14 +2479,14 @@
       </p:sp>
       <p:sp>
         <p:nvSpPr>
-          <p:cNvPr id="9" name="Text 7"/>
-          <p:cNvSpPr/>
-          <p:nvPr/>
-        </p:nvSpPr>
-        <p:spPr>
-          <a:xfrm>
-            <a:off x="640080" y="2651760"/>
-            <a:ext cx="1600200" cy="932688"/>
+          <p:cNvPr id="6" name="Text 4"/>
+          <p:cNvSpPr/>
+          <p:nvPr/>
+        </p:nvSpPr>
+        <p:spPr>
+          <a:xfrm>
+            <a:off x="640080" y="640080"/>
+            <a:ext cx="10911535" cy="219456"/>
           </a:xfrm>
           <a:prstGeom prst="rect">
             <a:avLst/>
@@ -2344,30 +2502,30 @@
               <a:buNone/>
             </a:pPr>
             <a:r>
-              <a:rPr lang="en-US" sz="1100" b="1" dirty="0">
-                <a:solidFill>
-                  <a:srgbClr val="FF4A1C"/>
-                </a:solidFill>
-                <a:latin typeface="Pretendard" pitchFamily="34" charset="0"/>
-                <a:ea typeface="Pretendard" pitchFamily="34" charset="-122"/>
-                <a:cs typeface="Pretendard" pitchFamily="34" charset="-120"/>
-              </a:rPr>
-              <a:t>00:40–01:10</a:t>
-            </a:r>
-            <a:endParaRPr lang="en-US" sz="1100" dirty="0"/>
-          </a:p>
-        </p:txBody>
-      </p:sp>
-      <p:sp>
-        <p:nvSpPr>
-          <p:cNvPr id="10" name="Text 8"/>
-          <p:cNvSpPr/>
-          <p:nvPr/>
-        </p:nvSpPr>
-        <p:spPr>
-          <a:xfrm>
-            <a:off x="2377440" y="2651760"/>
-            <a:ext cx="6888175" cy="932688"/>
+              <a:rPr lang="en-US" sz="950" spc="260" kern="0" dirty="0">
+                <a:solidFill>
+                  <a:srgbClr val="8A8A8A"/>
+                </a:solidFill>
+                <a:latin typeface="Pretendard" pitchFamily="34" charset="0"/>
+                <a:ea typeface="Pretendard" pitchFamily="34" charset="-122"/>
+                <a:cs typeface="Pretendard" pitchFamily="34" charset="-120"/>
+              </a:rPr>
+              <a:t>TODAY</a:t>
+            </a:r>
+            <a:endParaRPr lang="en-US" sz="950" dirty="0"/>
+          </a:p>
+        </p:txBody>
+      </p:sp>
+      <p:sp>
+        <p:nvSpPr>
+          <p:cNvPr id="7" name="Text 5"/>
+          <p:cNvSpPr/>
+          <p:nvPr/>
+        </p:nvSpPr>
+        <p:spPr>
+          <a:xfrm>
+            <a:off x="640080" y="859536"/>
+            <a:ext cx="10911535" cy="475488"/>
           </a:xfrm>
           <a:prstGeom prst="rect">
             <a:avLst/>
@@ -2383,79 +2541,79 @@
               <a:buNone/>
             </a:pPr>
             <a:r>
-              <a:rPr lang="en-US" sz="1300" b="1" dirty="0">
-                <a:solidFill>
-                  <a:srgbClr val="14161B"/>
-                </a:solidFill>
-                <a:latin typeface="Pretendard" pitchFamily="34" charset="0"/>
-                <a:ea typeface="Pretendard" pitchFamily="34" charset="-122"/>
-                <a:cs typeface="Pretendard" pitchFamily="34" charset="-120"/>
-              </a:rPr>
-              <a:t>동료 평가 및 피드백</a:t>
-            </a:r>
-            <a:endParaRPr lang="en-US" sz="1300" dirty="0"/>
-          </a:p>
-        </p:txBody>
-      </p:sp>
-      <p:sp>
-        <p:nvSpPr>
-          <p:cNvPr id="11" name="Text 9"/>
-          <p:cNvSpPr/>
-          <p:nvPr/>
-        </p:nvSpPr>
-        <p:spPr>
-          <a:xfrm>
-            <a:off x="9265615" y="2651760"/>
-            <a:ext cx="2286000" cy="932688"/>
-          </a:xfrm>
-          <a:prstGeom prst="rect">
-            <a:avLst/>
-          </a:prstGeom>
-          <a:noFill/>
-          <a:ln/>
-        </p:spPr>
-        <p:txBody>
-          <a:bodyPr wrap="square" lIns="0" tIns="0" rIns="0" bIns="0" rtlCol="0" anchor="ctr"/>
-          <a:lstStyle/>
-          <a:p>
-            <a:pPr algn="r" indent="0" marL="0">
-              <a:buNone/>
-            </a:pPr>
-            <a:r>
-              <a:rPr lang="en-US" sz="1100" dirty="0">
-                <a:solidFill>
-                  <a:srgbClr val="6B7280"/>
-                </a:solidFill>
-                <a:latin typeface="Pretendard" pitchFamily="34" charset="0"/>
-                <a:ea typeface="Pretendard" pitchFamily="34" charset="-122"/>
-                <a:cs typeface="Pretendard" pitchFamily="34" charset="-120"/>
-              </a:rPr>
-              <a:t>조별</a:t>
-            </a:r>
-            <a:endParaRPr lang="en-US" sz="1100" dirty="0"/>
-          </a:p>
-        </p:txBody>
-      </p:sp>
-      <p:sp>
-        <p:nvSpPr>
-          <p:cNvPr id="12" name="Shape 10"/>
-          <p:cNvSpPr/>
-          <p:nvPr/>
-        </p:nvSpPr>
-        <p:spPr>
-          <a:xfrm>
-            <a:off x="640080" y="3566160"/>
-            <a:ext cx="10911535" cy="9144"/>
+              <a:rPr lang="en-US" sz="3000" dirty="0">
+                <a:solidFill>
+                  <a:srgbClr val="111111"/>
+                </a:solidFill>
+                <a:latin typeface="Pretendard Black" pitchFamily="34" charset="0"/>
+                <a:ea typeface="Pretendard Black" pitchFamily="34" charset="-122"/>
+                <a:cs typeface="Pretendard Black" pitchFamily="34" charset="-120"/>
+              </a:rPr>
+              <a:t>오늘의 90분</a:t>
+            </a:r>
+            <a:endParaRPr lang="en-US" sz="3000" dirty="0"/>
+          </a:p>
+        </p:txBody>
+      </p:sp>
+      <p:sp>
+        <p:nvSpPr>
+          <p:cNvPr id="8" name="Text 6"/>
+          <p:cNvSpPr/>
+          <p:nvPr/>
+        </p:nvSpPr>
+        <p:spPr>
+          <a:xfrm>
+            <a:off x="640080" y="1371600"/>
+            <a:ext cx="10911535" cy="219456"/>
+          </a:xfrm>
+          <a:prstGeom prst="rect">
+            <a:avLst/>
+          </a:prstGeom>
+          <a:noFill/>
+          <a:ln/>
+        </p:spPr>
+        <p:txBody>
+          <a:bodyPr wrap="square" lIns="0" tIns="0" rIns="0" bIns="0" rtlCol="0" anchor="ctr"/>
+          <a:lstStyle/>
+          <a:p>
+            <a:pPr indent="0" marL="0">
+              <a:buNone/>
+            </a:pPr>
+            <a:r>
+              <a:rPr lang="en-US" sz="1150" dirty="0">
+                <a:solidFill>
+                  <a:srgbClr val="6E6E6E"/>
+                </a:solidFill>
+                <a:latin typeface="Pretendard" pitchFamily="34" charset="0"/>
+                <a:ea typeface="Pretendard" pitchFamily="34" charset="-122"/>
+                <a:cs typeface="Pretendard" pitchFamily="34" charset="-120"/>
+              </a:rPr>
+              <a:t>조별 리허설 40분 · 동료 평가 30분 · 보완 계획 10분</a:t>
+            </a:r>
+            <a:endParaRPr lang="en-US" sz="1150" dirty="0"/>
+          </a:p>
+        </p:txBody>
+      </p:sp>
+      <p:sp>
+        <p:nvSpPr>
+          <p:cNvPr id="9" name="Shape 7"/>
+          <p:cNvSpPr/>
+          <p:nvPr/>
+        </p:nvSpPr>
+        <p:spPr>
+          <a:xfrm>
+            <a:off x="640080" y="1682496"/>
+            <a:ext cx="10911535" cy="7315"/>
           </a:xfrm>
           <a:prstGeom prst="rect">
             <a:avLst/>
           </a:prstGeom>
           <a:solidFill>
-            <a:srgbClr val="E4E6EB"/>
+            <a:srgbClr val="111111"/>
           </a:solidFill>
           <a:ln w="12700">
             <a:solidFill>
-              <a:srgbClr val="E4E6EB"/>
+              <a:srgbClr val="111111"/>
             </a:solidFill>
             <a:prstDash val="solid"/>
           </a:ln>
@@ -2463,13 +2621,13 @@
       </p:sp>
       <p:sp>
         <p:nvSpPr>
-          <p:cNvPr id="13" name="Text 11"/>
-          <p:cNvSpPr/>
-          <p:nvPr/>
-        </p:nvSpPr>
-        <p:spPr>
-          <a:xfrm>
-            <a:off x="640080" y="3584448"/>
+          <p:cNvPr id="10" name="Text 8"/>
+          <p:cNvSpPr/>
+          <p:nvPr/>
+        </p:nvSpPr>
+        <p:spPr>
+          <a:xfrm>
+            <a:off x="640080" y="1719072"/>
             <a:ext cx="1600200" cy="932688"/>
           </a:xfrm>
           <a:prstGeom prst="rect">
@@ -2486,29 +2644,29 @@
               <a:buNone/>
             </a:pPr>
             <a:r>
-              <a:rPr lang="en-US" sz="1100" b="1" dirty="0">
-                <a:solidFill>
-                  <a:srgbClr val="FF4A1C"/>
-                </a:solidFill>
-                <a:latin typeface="Pretendard" pitchFamily="34" charset="0"/>
-                <a:ea typeface="Pretendard" pitchFamily="34" charset="-122"/>
-                <a:cs typeface="Pretendard" pitchFamily="34" charset="-120"/>
-              </a:rPr>
-              <a:t>01:10–01:20</a:t>
-            </a:r>
-            <a:endParaRPr lang="en-US" sz="1100" dirty="0"/>
-          </a:p>
-        </p:txBody>
-      </p:sp>
-      <p:sp>
-        <p:nvSpPr>
-          <p:cNvPr id="14" name="Text 12"/>
-          <p:cNvSpPr/>
-          <p:nvPr/>
-        </p:nvSpPr>
-        <p:spPr>
-          <a:xfrm>
-            <a:off x="2377440" y="3584448"/>
+              <a:rPr lang="en-US" sz="1050" b="1" spc="60" kern="0" dirty="0">
+                <a:solidFill>
+                  <a:srgbClr val="111111"/>
+                </a:solidFill>
+                <a:latin typeface="Pretendard" pitchFamily="34" charset="0"/>
+                <a:ea typeface="Pretendard" pitchFamily="34" charset="-122"/>
+                <a:cs typeface="Pretendard" pitchFamily="34" charset="-120"/>
+              </a:rPr>
+              <a:t>00:00–00:40</a:t>
+            </a:r>
+            <a:endParaRPr lang="en-US" sz="1050" dirty="0"/>
+          </a:p>
+        </p:txBody>
+      </p:sp>
+      <p:sp>
+        <p:nvSpPr>
+          <p:cNvPr id="11" name="Text 9"/>
+          <p:cNvSpPr/>
+          <p:nvPr/>
+        </p:nvSpPr>
+        <p:spPr>
+          <a:xfrm>
+            <a:off x="2377440" y="1719072"/>
             <a:ext cx="6888175" cy="932688"/>
           </a:xfrm>
           <a:prstGeom prst="rect">
@@ -2527,13 +2685,13 @@
             <a:r>
               <a:rPr lang="en-US" sz="1300" b="1" dirty="0">
                 <a:solidFill>
-                  <a:srgbClr val="14161B"/>
-                </a:solidFill>
-                <a:latin typeface="Pretendard" pitchFamily="34" charset="0"/>
-                <a:ea typeface="Pretendard" pitchFamily="34" charset="-122"/>
-                <a:cs typeface="Pretendard" pitchFamily="34" charset="-120"/>
-              </a:rPr>
-              <a:t>최종 보완 계획 수립</a:t>
+                  <a:srgbClr val="111111"/>
+                </a:solidFill>
+                <a:latin typeface="Pretendard" pitchFamily="34" charset="0"/>
+                <a:ea typeface="Pretendard" pitchFamily="34" charset="-122"/>
+                <a:cs typeface="Pretendard" pitchFamily="34" charset="-120"/>
+              </a:rPr>
+              <a:t>조별 리허설</a:t>
             </a:r>
             <a:endParaRPr lang="en-US" sz="1300" dirty="0"/>
           </a:p>
@@ -2541,13 +2699,13 @@
       </p:sp>
       <p:sp>
         <p:nvSpPr>
-          <p:cNvPr id="15" name="Text 13"/>
-          <p:cNvSpPr/>
-          <p:nvPr/>
-        </p:nvSpPr>
-        <p:spPr>
-          <a:xfrm>
-            <a:off x="9265615" y="3584448"/>
+          <p:cNvPr id="12" name="Text 10"/>
+          <p:cNvSpPr/>
+          <p:nvPr/>
+        </p:nvSpPr>
+        <p:spPr>
+          <a:xfrm>
+            <a:off x="9265615" y="1719072"/>
             <a:ext cx="2286000" cy="932688"/>
           </a:xfrm>
           <a:prstGeom prst="rect">
@@ -2564,40 +2722,40 @@
               <a:buNone/>
             </a:pPr>
             <a:r>
-              <a:rPr lang="en-US" sz="1100" dirty="0">
-                <a:solidFill>
-                  <a:srgbClr val="6B7280"/>
-                </a:solidFill>
-                <a:latin typeface="Pretendard" pitchFamily="34" charset="0"/>
-                <a:ea typeface="Pretendard" pitchFamily="34" charset="-122"/>
-                <a:cs typeface="Pretendard" pitchFamily="34" charset="-120"/>
-              </a:rPr>
-              <a:t>개인 워크</a:t>
-            </a:r>
-            <a:endParaRPr lang="en-US" sz="1100" dirty="0"/>
-          </a:p>
-        </p:txBody>
-      </p:sp>
-      <p:sp>
-        <p:nvSpPr>
-          <p:cNvPr id="16" name="Shape 14"/>
-          <p:cNvSpPr/>
-          <p:nvPr/>
-        </p:nvSpPr>
-        <p:spPr>
-          <a:xfrm>
-            <a:off x="640080" y="4498848"/>
-            <a:ext cx="10911535" cy="9144"/>
+              <a:rPr lang="en-US" sz="1050" dirty="0">
+                <a:solidFill>
+                  <a:srgbClr val="6E6E6E"/>
+                </a:solidFill>
+                <a:latin typeface="Pretendard" pitchFamily="34" charset="0"/>
+                <a:ea typeface="Pretendard" pitchFamily="34" charset="-122"/>
+                <a:cs typeface="Pretendard" pitchFamily="34" charset="-120"/>
+              </a:rPr>
+              <a:t>4~5인 조별</a:t>
+            </a:r>
+            <a:endParaRPr lang="en-US" sz="1050" dirty="0"/>
+          </a:p>
+        </p:txBody>
+      </p:sp>
+      <p:sp>
+        <p:nvSpPr>
+          <p:cNvPr id="13" name="Shape 11"/>
+          <p:cNvSpPr/>
+          <p:nvPr/>
+        </p:nvSpPr>
+        <p:spPr>
+          <a:xfrm>
+            <a:off x="640080" y="2633472"/>
+            <a:ext cx="10911535" cy="7315"/>
           </a:xfrm>
           <a:prstGeom prst="rect">
             <a:avLst/>
           </a:prstGeom>
           <a:solidFill>
-            <a:srgbClr val="E4E6EB"/>
+            <a:srgbClr val="DCDCDC"/>
           </a:solidFill>
           <a:ln w="12700">
             <a:solidFill>
-              <a:srgbClr val="E4E6EB"/>
+              <a:srgbClr val="DCDCDC"/>
             </a:solidFill>
             <a:prstDash val="solid"/>
           </a:ln>
@@ -2605,7 +2763,291 @@
       </p:sp>
       <p:sp>
         <p:nvSpPr>
-          <p:cNvPr id="17" name="Text 15"/>
+          <p:cNvPr id="14" name="Text 12"/>
+          <p:cNvSpPr/>
+          <p:nvPr/>
+        </p:nvSpPr>
+        <p:spPr>
+          <a:xfrm>
+            <a:off x="640080" y="2651760"/>
+            <a:ext cx="1600200" cy="932688"/>
+          </a:xfrm>
+          <a:prstGeom prst="rect">
+            <a:avLst/>
+          </a:prstGeom>
+          <a:noFill/>
+          <a:ln/>
+        </p:spPr>
+        <p:txBody>
+          <a:bodyPr wrap="square" lIns="0" tIns="0" rIns="0" bIns="0" rtlCol="0" anchor="ctr"/>
+          <a:lstStyle/>
+          <a:p>
+            <a:pPr indent="0" marL="0">
+              <a:buNone/>
+            </a:pPr>
+            <a:r>
+              <a:rPr lang="en-US" sz="1050" b="1" spc="60" kern="0" dirty="0">
+                <a:solidFill>
+                  <a:srgbClr val="111111"/>
+                </a:solidFill>
+                <a:latin typeface="Pretendard" pitchFamily="34" charset="0"/>
+                <a:ea typeface="Pretendard" pitchFamily="34" charset="-122"/>
+                <a:cs typeface="Pretendard" pitchFamily="34" charset="-120"/>
+              </a:rPr>
+              <a:t>00:40–01:10</a:t>
+            </a:r>
+            <a:endParaRPr lang="en-US" sz="1050" dirty="0"/>
+          </a:p>
+        </p:txBody>
+      </p:sp>
+      <p:sp>
+        <p:nvSpPr>
+          <p:cNvPr id="15" name="Text 13"/>
+          <p:cNvSpPr/>
+          <p:nvPr/>
+        </p:nvSpPr>
+        <p:spPr>
+          <a:xfrm>
+            <a:off x="2377440" y="2651760"/>
+            <a:ext cx="6888175" cy="932688"/>
+          </a:xfrm>
+          <a:prstGeom prst="rect">
+            <a:avLst/>
+          </a:prstGeom>
+          <a:noFill/>
+          <a:ln/>
+        </p:spPr>
+        <p:txBody>
+          <a:bodyPr wrap="square" lIns="0" tIns="0" rIns="0" bIns="0" rtlCol="0" anchor="ctr"/>
+          <a:lstStyle/>
+          <a:p>
+            <a:pPr indent="0" marL="0">
+              <a:buNone/>
+            </a:pPr>
+            <a:r>
+              <a:rPr lang="en-US" sz="1300" b="1" dirty="0">
+                <a:solidFill>
+                  <a:srgbClr val="111111"/>
+                </a:solidFill>
+                <a:latin typeface="Pretendard" pitchFamily="34" charset="0"/>
+                <a:ea typeface="Pretendard" pitchFamily="34" charset="-122"/>
+                <a:cs typeface="Pretendard" pitchFamily="34" charset="-120"/>
+              </a:rPr>
+              <a:t>동료 평가 및 피드백</a:t>
+            </a:r>
+            <a:endParaRPr lang="en-US" sz="1300" dirty="0"/>
+          </a:p>
+        </p:txBody>
+      </p:sp>
+      <p:sp>
+        <p:nvSpPr>
+          <p:cNvPr id="16" name="Text 14"/>
+          <p:cNvSpPr/>
+          <p:nvPr/>
+        </p:nvSpPr>
+        <p:spPr>
+          <a:xfrm>
+            <a:off x="9265615" y="2651760"/>
+            <a:ext cx="2286000" cy="932688"/>
+          </a:xfrm>
+          <a:prstGeom prst="rect">
+            <a:avLst/>
+          </a:prstGeom>
+          <a:noFill/>
+          <a:ln/>
+        </p:spPr>
+        <p:txBody>
+          <a:bodyPr wrap="square" lIns="0" tIns="0" rIns="0" bIns="0" rtlCol="0" anchor="ctr"/>
+          <a:lstStyle/>
+          <a:p>
+            <a:pPr algn="r" indent="0" marL="0">
+              <a:buNone/>
+            </a:pPr>
+            <a:r>
+              <a:rPr lang="en-US" sz="1050" dirty="0">
+                <a:solidFill>
+                  <a:srgbClr val="6E6E6E"/>
+                </a:solidFill>
+                <a:latin typeface="Pretendard" pitchFamily="34" charset="0"/>
+                <a:ea typeface="Pretendard" pitchFamily="34" charset="-122"/>
+                <a:cs typeface="Pretendard" pitchFamily="34" charset="-120"/>
+              </a:rPr>
+              <a:t>조별</a:t>
+            </a:r>
+            <a:endParaRPr lang="en-US" sz="1050" dirty="0"/>
+          </a:p>
+        </p:txBody>
+      </p:sp>
+      <p:sp>
+        <p:nvSpPr>
+          <p:cNvPr id="17" name="Shape 15"/>
+          <p:cNvSpPr/>
+          <p:nvPr/>
+        </p:nvSpPr>
+        <p:spPr>
+          <a:xfrm>
+            <a:off x="640080" y="3566160"/>
+            <a:ext cx="10911535" cy="7315"/>
+          </a:xfrm>
+          <a:prstGeom prst="rect">
+            <a:avLst/>
+          </a:prstGeom>
+          <a:solidFill>
+            <a:srgbClr val="DCDCDC"/>
+          </a:solidFill>
+          <a:ln w="12700">
+            <a:solidFill>
+              <a:srgbClr val="DCDCDC"/>
+            </a:solidFill>
+            <a:prstDash val="solid"/>
+          </a:ln>
+        </p:spPr>
+      </p:sp>
+      <p:sp>
+        <p:nvSpPr>
+          <p:cNvPr id="18" name="Text 16"/>
+          <p:cNvSpPr/>
+          <p:nvPr/>
+        </p:nvSpPr>
+        <p:spPr>
+          <a:xfrm>
+            <a:off x="640080" y="3584448"/>
+            <a:ext cx="1600200" cy="932688"/>
+          </a:xfrm>
+          <a:prstGeom prst="rect">
+            <a:avLst/>
+          </a:prstGeom>
+          <a:noFill/>
+          <a:ln/>
+        </p:spPr>
+        <p:txBody>
+          <a:bodyPr wrap="square" lIns="0" tIns="0" rIns="0" bIns="0" rtlCol="0" anchor="ctr"/>
+          <a:lstStyle/>
+          <a:p>
+            <a:pPr indent="0" marL="0">
+              <a:buNone/>
+            </a:pPr>
+            <a:r>
+              <a:rPr lang="en-US" sz="1050" b="1" spc="60" kern="0" dirty="0">
+                <a:solidFill>
+                  <a:srgbClr val="111111"/>
+                </a:solidFill>
+                <a:latin typeface="Pretendard" pitchFamily="34" charset="0"/>
+                <a:ea typeface="Pretendard" pitchFamily="34" charset="-122"/>
+                <a:cs typeface="Pretendard" pitchFamily="34" charset="-120"/>
+              </a:rPr>
+              <a:t>01:10–01:20</a:t>
+            </a:r>
+            <a:endParaRPr lang="en-US" sz="1050" dirty="0"/>
+          </a:p>
+        </p:txBody>
+      </p:sp>
+      <p:sp>
+        <p:nvSpPr>
+          <p:cNvPr id="19" name="Text 17"/>
+          <p:cNvSpPr/>
+          <p:nvPr/>
+        </p:nvSpPr>
+        <p:spPr>
+          <a:xfrm>
+            <a:off x="2377440" y="3584448"/>
+            <a:ext cx="6888175" cy="932688"/>
+          </a:xfrm>
+          <a:prstGeom prst="rect">
+            <a:avLst/>
+          </a:prstGeom>
+          <a:noFill/>
+          <a:ln/>
+        </p:spPr>
+        <p:txBody>
+          <a:bodyPr wrap="square" lIns="0" tIns="0" rIns="0" bIns="0" rtlCol="0" anchor="ctr"/>
+          <a:lstStyle/>
+          <a:p>
+            <a:pPr indent="0" marL="0">
+              <a:buNone/>
+            </a:pPr>
+            <a:r>
+              <a:rPr lang="en-US" sz="1300" b="1" dirty="0">
+                <a:solidFill>
+                  <a:srgbClr val="111111"/>
+                </a:solidFill>
+                <a:latin typeface="Pretendard" pitchFamily="34" charset="0"/>
+                <a:ea typeface="Pretendard" pitchFamily="34" charset="-122"/>
+                <a:cs typeface="Pretendard" pitchFamily="34" charset="-120"/>
+              </a:rPr>
+              <a:t>최종 보완 계획 수립</a:t>
+            </a:r>
+            <a:endParaRPr lang="en-US" sz="1300" dirty="0"/>
+          </a:p>
+        </p:txBody>
+      </p:sp>
+      <p:sp>
+        <p:nvSpPr>
+          <p:cNvPr id="20" name="Text 18"/>
+          <p:cNvSpPr/>
+          <p:nvPr/>
+        </p:nvSpPr>
+        <p:spPr>
+          <a:xfrm>
+            <a:off x="9265615" y="3584448"/>
+            <a:ext cx="2286000" cy="932688"/>
+          </a:xfrm>
+          <a:prstGeom prst="rect">
+            <a:avLst/>
+          </a:prstGeom>
+          <a:noFill/>
+          <a:ln/>
+        </p:spPr>
+        <p:txBody>
+          <a:bodyPr wrap="square" lIns="0" tIns="0" rIns="0" bIns="0" rtlCol="0" anchor="ctr"/>
+          <a:lstStyle/>
+          <a:p>
+            <a:pPr algn="r" indent="0" marL="0">
+              <a:buNone/>
+            </a:pPr>
+            <a:r>
+              <a:rPr lang="en-US" sz="1050" dirty="0">
+                <a:solidFill>
+                  <a:srgbClr val="6E6E6E"/>
+                </a:solidFill>
+                <a:latin typeface="Pretendard" pitchFamily="34" charset="0"/>
+                <a:ea typeface="Pretendard" pitchFamily="34" charset="-122"/>
+                <a:cs typeface="Pretendard" pitchFamily="34" charset="-120"/>
+              </a:rPr>
+              <a:t>개인 워크</a:t>
+            </a:r>
+            <a:endParaRPr lang="en-US" sz="1050" dirty="0"/>
+          </a:p>
+        </p:txBody>
+      </p:sp>
+      <p:sp>
+        <p:nvSpPr>
+          <p:cNvPr id="21" name="Shape 19"/>
+          <p:cNvSpPr/>
+          <p:nvPr/>
+        </p:nvSpPr>
+        <p:spPr>
+          <a:xfrm>
+            <a:off x="640080" y="4498848"/>
+            <a:ext cx="10911535" cy="7315"/>
+          </a:xfrm>
+          <a:prstGeom prst="rect">
+            <a:avLst/>
+          </a:prstGeom>
+          <a:solidFill>
+            <a:srgbClr val="DCDCDC"/>
+          </a:solidFill>
+          <a:ln w="12700">
+            <a:solidFill>
+              <a:srgbClr val="DCDCDC"/>
+            </a:solidFill>
+            <a:prstDash val="solid"/>
+          </a:ln>
+        </p:spPr>
+      </p:sp>
+      <p:sp>
+        <p:nvSpPr>
+          <p:cNvPr id="22" name="Text 20"/>
           <p:cNvSpPr/>
           <p:nvPr/>
         </p:nvSpPr>
@@ -2628,9 +3070,9 @@
               <a:buNone/>
             </a:pPr>
             <a:r>
-              <a:rPr lang="en-US" sz="1100" b="1" dirty="0">
-                <a:solidFill>
-                  <a:srgbClr val="FF4A1C"/>
+              <a:rPr lang="en-US" sz="1050" b="1" spc="60" kern="0" dirty="0">
+                <a:solidFill>
+                  <a:srgbClr val="111111"/>
                 </a:solidFill>
                 <a:latin typeface="Pretendard" pitchFamily="34" charset="0"/>
                 <a:ea typeface="Pretendard" pitchFamily="34" charset="-122"/>
@@ -2638,13 +3080,13 @@
               </a:rPr>
               <a:t>01:20–01:30</a:t>
             </a:r>
-            <a:endParaRPr lang="en-US" sz="1100" dirty="0"/>
-          </a:p>
-        </p:txBody>
-      </p:sp>
-      <p:sp>
-        <p:nvSpPr>
-          <p:cNvPr id="18" name="Text 16"/>
+            <a:endParaRPr lang="en-US" sz="1050" dirty="0"/>
+          </a:p>
+        </p:txBody>
+      </p:sp>
+      <p:sp>
+        <p:nvSpPr>
+          <p:cNvPr id="23" name="Text 21"/>
           <p:cNvSpPr/>
           <p:nvPr/>
         </p:nvSpPr>
@@ -2669,7 +3111,7 @@
             <a:r>
               <a:rPr lang="en-US" sz="1300" b="1" dirty="0">
                 <a:solidFill>
-                  <a:srgbClr val="14161B"/>
+                  <a:srgbClr val="111111"/>
                 </a:solidFill>
                 <a:latin typeface="Pretendard" pitchFamily="34" charset="0"/>
                 <a:ea typeface="Pretendard" pitchFamily="34" charset="-122"/>
@@ -2683,7 +3125,7 @@
       </p:sp>
       <p:sp>
         <p:nvSpPr>
-          <p:cNvPr id="19" name="Text 17"/>
+          <p:cNvPr id="24" name="Text 22"/>
           <p:cNvSpPr/>
           <p:nvPr/>
         </p:nvSpPr>
@@ -2706,9 +3148,9 @@
               <a:buNone/>
             </a:pPr>
             <a:r>
-              <a:rPr lang="en-US" sz="1100" dirty="0">
-                <a:solidFill>
-                  <a:srgbClr val="6B7280"/>
+              <a:rPr lang="en-US" sz="1050" dirty="0">
+                <a:solidFill>
+                  <a:srgbClr val="6E6E6E"/>
                 </a:solidFill>
                 <a:latin typeface="Pretendard" pitchFamily="34" charset="0"/>
                 <a:ea typeface="Pretendard" pitchFamily="34" charset="-122"/>
@@ -2716,20 +3158,70 @@
               </a:rPr>
               <a:t>안내</a:t>
             </a:r>
-            <a:endParaRPr lang="en-US" sz="1100" dirty="0"/>
-          </a:p>
-        </p:txBody>
-      </p:sp>
-      <p:sp>
-        <p:nvSpPr>
-          <p:cNvPr id="20" name="Text 18"/>
-          <p:cNvSpPr/>
-          <p:nvPr/>
-        </p:nvSpPr>
-        <p:spPr>
-          <a:xfrm>
-            <a:off x="640080" y="6345936"/>
-            <a:ext cx="7772400" cy="256032"/>
+            <a:endParaRPr lang="en-US" sz="1050" dirty="0"/>
+          </a:p>
+        </p:txBody>
+      </p:sp>
+      <p:sp>
+        <p:nvSpPr>
+          <p:cNvPr id="25" name="Shape 23"/>
+          <p:cNvSpPr/>
+          <p:nvPr/>
+        </p:nvSpPr>
+        <p:spPr>
+          <a:xfrm>
+            <a:off x="640080" y="5431536"/>
+            <a:ext cx="10911535" cy="7315"/>
+          </a:xfrm>
+          <a:prstGeom prst="rect">
+            <a:avLst/>
+          </a:prstGeom>
+          <a:solidFill>
+            <a:srgbClr val="111111"/>
+          </a:solidFill>
+          <a:ln w="12700">
+            <a:solidFill>
+              <a:srgbClr val="111111"/>
+            </a:solidFill>
+            <a:prstDash val="solid"/>
+          </a:ln>
+        </p:spPr>
+      </p:sp>
+      <p:sp>
+        <p:nvSpPr>
+          <p:cNvPr id="26" name="Shape 24"/>
+          <p:cNvSpPr/>
+          <p:nvPr/>
+        </p:nvSpPr>
+        <p:spPr>
+          <a:xfrm>
+            <a:off x="640080" y="6291072"/>
+            <a:ext cx="10911535" cy="7315"/>
+          </a:xfrm>
+          <a:prstGeom prst="rect">
+            <a:avLst/>
+          </a:prstGeom>
+          <a:solidFill>
+            <a:srgbClr val="DCDCDC"/>
+          </a:solidFill>
+          <a:ln w="12700">
+            <a:solidFill>
+              <a:srgbClr val="DCDCDC"/>
+            </a:solidFill>
+            <a:prstDash val="solid"/>
+          </a:ln>
+        </p:spPr>
+      </p:sp>
+      <p:sp>
+        <p:nvSpPr>
+          <p:cNvPr id="27" name="Text 25"/>
+          <p:cNvSpPr/>
+          <p:nvPr/>
+        </p:nvSpPr>
+        <p:spPr>
+          <a:xfrm>
+            <a:off x="640080" y="6382512"/>
+            <a:ext cx="7772400" cy="237744"/>
           </a:xfrm>
           <a:prstGeom prst="rect">
             <a:avLst/>
@@ -2745,9 +3237,9 @@
               <a:buNone/>
             </a:pPr>
             <a:r>
-              <a:rPr lang="en-US" sz="900" dirty="0">
-                <a:solidFill>
-                  <a:srgbClr val="9AA0AA"/>
+              <a:rPr lang="en-US" sz="850" spc="40" kern="0" dirty="0">
+                <a:solidFill>
+                  <a:srgbClr val="9B9B9B"/>
                 </a:solidFill>
                 <a:latin typeface="Pretendard" pitchFamily="34" charset="0"/>
                 <a:ea typeface="Pretendard" pitchFamily="34" charset="-122"/>
@@ -2755,20 +3247,20 @@
               </a:rPr>
               <a:t>포트폴리오제작 · 14주차 최종 리허설 및 동료 피드백</a:t>
             </a:r>
-            <a:endParaRPr lang="en-US" sz="900" dirty="0"/>
-          </a:p>
-        </p:txBody>
-      </p:sp>
-      <p:sp>
-        <p:nvSpPr>
-          <p:cNvPr id="21" name="Text 19"/>
-          <p:cNvSpPr/>
-          <p:nvPr/>
-        </p:nvSpPr>
-        <p:spPr>
-          <a:xfrm>
-            <a:off x="10454335" y="6345936"/>
-            <a:ext cx="1097280" cy="256032"/>
+            <a:endParaRPr lang="en-US" sz="850" dirty="0"/>
+          </a:p>
+        </p:txBody>
+      </p:sp>
+      <p:sp>
+        <p:nvSpPr>
+          <p:cNvPr id="28" name="Text 26"/>
+          <p:cNvSpPr/>
+          <p:nvPr/>
+        </p:nvSpPr>
+        <p:spPr>
+          <a:xfrm>
+            <a:off x="10271455" y="6382512"/>
+            <a:ext cx="1280160" cy="237744"/>
           </a:xfrm>
           <a:prstGeom prst="rect">
             <a:avLst/>
@@ -2784,17 +3276,17 @@
               <a:buNone/>
             </a:pPr>
             <a:r>
-              <a:rPr lang="en-US" sz="900" dirty="0">
-                <a:solidFill>
-                  <a:srgbClr val="9AA0AA"/>
-                </a:solidFill>
-                <a:latin typeface="Pretendard" pitchFamily="34" charset="0"/>
-                <a:ea typeface="Pretendard" pitchFamily="34" charset="-122"/>
-                <a:cs typeface="Pretendard" pitchFamily="34" charset="-120"/>
-              </a:rPr>
-              <a:t>01</a:t>
-            </a:r>
-            <a:endParaRPr lang="en-US" sz="900" dirty="0"/>
+              <a:rPr lang="en-US" sz="850" spc="140" kern="0" dirty="0">
+                <a:solidFill>
+                  <a:srgbClr val="9B9B9B"/>
+                </a:solidFill>
+                <a:latin typeface="Pretendard" pitchFamily="34" charset="0"/>
+                <a:ea typeface="Pretendard" pitchFamily="34" charset="-122"/>
+                <a:cs typeface="Pretendard" pitchFamily="34" charset="-120"/>
+              </a:rPr>
+              <a:t>P.01</a:t>
+            </a:r>
+            <a:endParaRPr lang="en-US" sz="850" dirty="0"/>
           </a:p>
         </p:txBody>
       </p:sp>
@@ -2838,8 +3330,8 @@
         </p:nvSpPr>
         <p:spPr>
           <a:xfrm>
-            <a:off x="640080" y="566928"/>
-            <a:ext cx="10911535" cy="237744"/>
+            <a:off x="640080" y="274320"/>
+            <a:ext cx="3657600" cy="219456"/>
           </a:xfrm>
           <a:prstGeom prst="rect">
             <a:avLst/>
@@ -2855,17 +3347,17 @@
               <a:buNone/>
             </a:pPr>
             <a:r>
-              <a:rPr lang="en-US" sz="1100" b="1" spc="140" kern="0" dirty="0">
-                <a:solidFill>
-                  <a:srgbClr val="FF4A1C"/>
-                </a:solidFill>
-                <a:latin typeface="Pretendard" pitchFamily="34" charset="0"/>
-                <a:ea typeface="Pretendard" pitchFamily="34" charset="-122"/>
-                <a:cs typeface="Pretendard" pitchFamily="34" charset="-120"/>
-              </a:rPr>
-              <a:t>OBJECTIVES</a:t>
-            </a:r>
-            <a:endParaRPr lang="en-US" sz="1100" dirty="0"/>
+              <a:rPr lang="en-US" sz="900" spc="120" kern="0" dirty="0">
+                <a:solidFill>
+                  <a:srgbClr val="8A8A8A"/>
+                </a:solidFill>
+                <a:latin typeface="Pretendard" pitchFamily="34" charset="0"/>
+                <a:ea typeface="Pretendard" pitchFamily="34" charset="-122"/>
+                <a:cs typeface="Pretendard" pitchFamily="34" charset="-120"/>
+              </a:rPr>
+              <a:t>포트폴리오제작</a:t>
+            </a:r>
+            <a:endParaRPr lang="en-US" sz="900" dirty="0"/>
           </a:p>
         </p:txBody>
       </p:sp>
@@ -2877,59 +3369,96 @@
         </p:nvSpPr>
         <p:spPr>
           <a:xfrm>
-            <a:off x="640080" y="859536"/>
-            <a:ext cx="10911535" cy="512064"/>
-          </a:xfrm>
-          <a:prstGeom prst="rect">
-            <a:avLst/>
-          </a:prstGeom>
-          <a:noFill/>
-          <a:ln/>
-        </p:spPr>
-        <p:txBody>
-          <a:bodyPr wrap="square" lIns="0" tIns="0" rIns="0" bIns="0" rtlCol="0" anchor="ctr"/>
-          <a:lstStyle/>
-          <a:p>
-            <a:pPr indent="0" marL="0">
-              <a:buNone/>
-            </a:pPr>
-            <a:r>
-              <a:rPr lang="en-US" sz="2800" b="1" dirty="0">
-                <a:solidFill>
-                  <a:srgbClr val="14161B"/>
-                </a:solidFill>
-                <a:latin typeface="Pretendard" pitchFamily="34" charset="0"/>
-                <a:ea typeface="Pretendard" pitchFamily="34" charset="-122"/>
-                <a:cs typeface="Pretendard" pitchFamily="34" charset="-120"/>
-              </a:rPr>
-              <a:t>오늘 끝나면 여러분은</a:t>
-            </a:r>
-            <a:endParaRPr lang="en-US" sz="2800" dirty="0"/>
-          </a:p>
-        </p:txBody>
-      </p:sp>
-      <p:sp>
-        <p:nvSpPr>
-          <p:cNvPr id="4" name="Shape 2"/>
-          <p:cNvSpPr/>
-          <p:nvPr/>
-        </p:nvSpPr>
-        <p:spPr>
-          <a:xfrm>
-            <a:off x="640080" y="1810512"/>
-            <a:ext cx="310896" cy="310896"/>
-          </a:xfrm>
-          <a:prstGeom prst="roundRect">
-            <a:avLst>
-              <a:gd name="adj" fmla="val 17647"/>
-            </a:avLst>
+            <a:off x="4480560" y="274320"/>
+            <a:ext cx="4572000" cy="219456"/>
+          </a:xfrm>
+          <a:prstGeom prst="rect">
+            <a:avLst/>
+          </a:prstGeom>
+          <a:noFill/>
+          <a:ln/>
+        </p:spPr>
+        <p:txBody>
+          <a:bodyPr wrap="square" lIns="0" tIns="0" rIns="0" bIns="0" rtlCol="0" anchor="ctr"/>
+          <a:lstStyle/>
+          <a:p>
+            <a:pPr algn="ctr" indent="0" marL="0">
+              <a:buNone/>
+            </a:pPr>
+            <a:r>
+              <a:rPr lang="en-US" sz="900" spc="120" kern="0" dirty="0">
+                <a:solidFill>
+                  <a:srgbClr val="8A8A8A"/>
+                </a:solidFill>
+                <a:latin typeface="Pretendard" pitchFamily="34" charset="0"/>
+                <a:ea typeface="Pretendard" pitchFamily="34" charset="-122"/>
+                <a:cs typeface="Pretendard" pitchFamily="34" charset="-120"/>
+              </a:rPr>
+              <a:t>PHASE 3 완성과 발표</a:t>
+            </a:r>
+            <a:endParaRPr lang="en-US" sz="900" dirty="0"/>
+          </a:p>
+        </p:txBody>
+      </p:sp>
+      <p:sp>
+        <p:nvSpPr>
+          <p:cNvPr id="4" name="Text 2"/>
+          <p:cNvSpPr/>
+          <p:nvPr/>
+        </p:nvSpPr>
+        <p:spPr>
+          <a:xfrm>
+            <a:off x="8808415" y="274320"/>
+            <a:ext cx="2743200" cy="219456"/>
+          </a:xfrm>
+          <a:prstGeom prst="rect">
+            <a:avLst/>
+          </a:prstGeom>
+          <a:noFill/>
+          <a:ln/>
+        </p:spPr>
+        <p:txBody>
+          <a:bodyPr wrap="square" lIns="0" tIns="0" rIns="0" bIns="0" rtlCol="0" anchor="ctr"/>
+          <a:lstStyle/>
+          <a:p>
+            <a:pPr algn="r" indent="0" marL="0">
+              <a:buNone/>
+            </a:pPr>
+            <a:r>
+              <a:rPr lang="en-US" sz="900" spc="200" kern="0" dirty="0">
+                <a:solidFill>
+                  <a:srgbClr val="8A8A8A"/>
+                </a:solidFill>
+                <a:latin typeface="Pretendard" pitchFamily="34" charset="0"/>
+                <a:ea typeface="Pretendard" pitchFamily="34" charset="-122"/>
+                <a:cs typeface="Pretendard" pitchFamily="34" charset="-120"/>
+              </a:rPr>
+              <a:t>WEEK 14</a:t>
+            </a:r>
+            <a:endParaRPr lang="en-US" sz="900" dirty="0"/>
+          </a:p>
+        </p:txBody>
+      </p:sp>
+      <p:sp>
+        <p:nvSpPr>
+          <p:cNvPr id="5" name="Shape 3"/>
+          <p:cNvSpPr/>
+          <p:nvPr/>
+        </p:nvSpPr>
+        <p:spPr>
+          <a:xfrm>
+            <a:off x="640080" y="548640"/>
+            <a:ext cx="10911535" cy="7315"/>
+          </a:xfrm>
+          <a:prstGeom prst="rect">
+            <a:avLst/>
           </a:prstGeom>
           <a:solidFill>
-            <a:srgbClr val="14161B"/>
+            <a:srgbClr val="DCDCDC"/>
           </a:solidFill>
-          <a:ln w="6350">
+          <a:ln w="12700">
             <a:solidFill>
-              <a:srgbClr val="14161B"/>
+              <a:srgbClr val="DCDCDC"/>
             </a:solidFill>
             <a:prstDash val="solid"/>
           </a:ln>
@@ -2937,53 +3466,14 @@
       </p:sp>
       <p:sp>
         <p:nvSpPr>
-          <p:cNvPr id="5" name="Text 3"/>
-          <p:cNvSpPr/>
-          <p:nvPr/>
-        </p:nvSpPr>
-        <p:spPr>
-          <a:xfrm>
-            <a:off x="640080" y="1810512"/>
-            <a:ext cx="310896" cy="310896"/>
-          </a:xfrm>
-          <a:prstGeom prst="rect">
-            <a:avLst/>
-          </a:prstGeom>
-          <a:noFill/>
-          <a:ln/>
-        </p:spPr>
-        <p:txBody>
-          <a:bodyPr wrap="square" lIns="0" tIns="0" rIns="0" bIns="0" rtlCol="0" anchor="ctr"/>
-          <a:lstStyle/>
-          <a:p>
-            <a:pPr algn="ctr" indent="0" marL="0">
-              <a:buNone/>
-            </a:pPr>
-            <a:r>
-              <a:rPr lang="en-US" sz="1050" b="1" dirty="0">
-                <a:solidFill>
-                  <a:srgbClr val="FFFFFF"/>
-                </a:solidFill>
-                <a:latin typeface="Pretendard" pitchFamily="34" charset="0"/>
-                <a:ea typeface="Pretendard" pitchFamily="34" charset="-122"/>
-                <a:cs typeface="Pretendard" pitchFamily="34" charset="-120"/>
-              </a:rPr>
-              <a:t>1</a:t>
-            </a:r>
-            <a:endParaRPr lang="en-US" sz="1050" dirty="0"/>
-          </a:p>
-        </p:txBody>
-      </p:sp>
-      <p:sp>
-        <p:nvSpPr>
           <p:cNvPr id="6" name="Text 4"/>
           <p:cNvSpPr/>
           <p:nvPr/>
         </p:nvSpPr>
         <p:spPr>
           <a:xfrm>
-            <a:off x="1188720" y="1719072"/>
-            <a:ext cx="9875520" cy="310896"/>
+            <a:off x="640080" y="640080"/>
+            <a:ext cx="10911535" cy="219456"/>
           </a:xfrm>
           <a:prstGeom prst="rect">
             <a:avLst/>
@@ -2999,17 +3489,17 @@
               <a:buNone/>
             </a:pPr>
             <a:r>
-              <a:rPr lang="en-US" sz="1450" b="1" dirty="0">
-                <a:solidFill>
-                  <a:srgbClr val="14161B"/>
-                </a:solidFill>
-                <a:latin typeface="Pretendard" pitchFamily="34" charset="0"/>
-                <a:ea typeface="Pretendard" pitchFamily="34" charset="-122"/>
-                <a:cs typeface="Pretendard" pitchFamily="34" charset="-120"/>
-              </a:rPr>
-              <a:t>발표를 시간 안에 끝낼 수 있다</a:t>
-            </a:r>
-            <a:endParaRPr lang="en-US" sz="1450" dirty="0"/>
+              <a:rPr lang="en-US" sz="950" spc="260" kern="0" dirty="0">
+                <a:solidFill>
+                  <a:srgbClr val="8A8A8A"/>
+                </a:solidFill>
+                <a:latin typeface="Pretendard" pitchFamily="34" charset="0"/>
+                <a:ea typeface="Pretendard" pitchFamily="34" charset="-122"/>
+                <a:cs typeface="Pretendard" pitchFamily="34" charset="-120"/>
+              </a:rPr>
+              <a:t>OBJECTIVES</a:t>
+            </a:r>
+            <a:endParaRPr lang="en-US" sz="950" dirty="0"/>
           </a:p>
         </p:txBody>
       </p:sp>
@@ -3021,8 +3511,8 @@
         </p:nvSpPr>
         <p:spPr>
           <a:xfrm>
-            <a:off x="1188720" y="2029968"/>
-            <a:ext cx="9875520" cy="292608"/>
+            <a:off x="640080" y="859536"/>
+            <a:ext cx="10911535" cy="475488"/>
           </a:xfrm>
           <a:prstGeom prst="rect">
             <a:avLst/>
@@ -3038,17 +3528,17 @@
               <a:buNone/>
             </a:pPr>
             <a:r>
-              <a:rPr lang="en-US" sz="1100" dirty="0">
-                <a:solidFill>
-                  <a:srgbClr val="6B7280"/>
-                </a:solidFill>
-                <a:latin typeface="Pretendard" pitchFamily="34" charset="0"/>
-                <a:ea typeface="Pretendard" pitchFamily="34" charset="-122"/>
-                <a:cs typeface="Pretendard" pitchFamily="34" charset="-120"/>
-              </a:rPr>
-              <a:t>실제로 재보지 않으면 반드시 넘깁니다</a:t>
-            </a:r>
-            <a:endParaRPr lang="en-US" sz="1100" dirty="0"/>
+              <a:rPr lang="en-US" sz="3000" dirty="0">
+                <a:solidFill>
+                  <a:srgbClr val="111111"/>
+                </a:solidFill>
+                <a:latin typeface="Pretendard Black" pitchFamily="34" charset="0"/>
+                <a:ea typeface="Pretendard Black" pitchFamily="34" charset="-122"/>
+                <a:cs typeface="Pretendard Black" pitchFamily="34" charset="-120"/>
+              </a:rPr>
+              <a:t>오늘 끝나면 여러분은</a:t>
+            </a:r>
+            <a:endParaRPr lang="en-US" sz="3000" dirty="0"/>
           </a:p>
         </p:txBody>
       </p:sp>
@@ -3060,18 +3550,18 @@
         </p:nvSpPr>
         <p:spPr>
           <a:xfrm>
-            <a:off x="640080" y="2505456"/>
-            <a:ext cx="10911535" cy="9144"/>
+            <a:off x="640080" y="1664208"/>
+            <a:ext cx="10911535" cy="7315"/>
           </a:xfrm>
           <a:prstGeom prst="rect">
             <a:avLst/>
           </a:prstGeom>
           <a:solidFill>
-            <a:srgbClr val="E4E6EB"/>
+            <a:srgbClr val="111111"/>
           </a:solidFill>
           <a:ln w="12700">
             <a:solidFill>
-              <a:srgbClr val="E4E6EB"/>
+              <a:srgbClr val="111111"/>
             </a:solidFill>
             <a:prstDash val="solid"/>
           </a:ln>
@@ -3085,20 +3575,18 @@
         </p:nvSpPr>
         <p:spPr>
           <a:xfrm>
-            <a:off x="640080" y="2670048"/>
+            <a:off x="640080" y="1810512"/>
             <a:ext cx="310896" cy="310896"/>
           </a:xfrm>
-          <a:prstGeom prst="roundRect">
-            <a:avLst>
-              <a:gd name="adj" fmla="val 17647"/>
-            </a:avLst>
+          <a:prstGeom prst="ellipse">
+            <a:avLst/>
           </a:prstGeom>
           <a:solidFill>
-            <a:srgbClr val="14161B"/>
+            <a:srgbClr val="FFFFFF"/>
           </a:solidFill>
-          <a:ln w="6350">
+          <a:ln w="12700">
             <a:solidFill>
-              <a:srgbClr val="14161B"/>
+              <a:srgbClr val="111111"/>
             </a:solidFill>
             <a:prstDash val="solid"/>
           </a:ln>
@@ -3112,135 +3600,135 @@
         </p:nvSpPr>
         <p:spPr>
           <a:xfrm>
+            <a:off x="640080" y="1810512"/>
+            <a:ext cx="310896" cy="310896"/>
+          </a:xfrm>
+          <a:prstGeom prst="rect">
+            <a:avLst/>
+          </a:prstGeom>
+          <a:noFill/>
+          <a:ln/>
+        </p:spPr>
+        <p:txBody>
+          <a:bodyPr wrap="square" lIns="0" tIns="0" rIns="0" bIns="0" rtlCol="0" anchor="ctr"/>
+          <a:lstStyle/>
+          <a:p>
+            <a:pPr algn="ctr" indent="0" marL="0">
+              <a:buNone/>
+            </a:pPr>
+            <a:r>
+              <a:rPr lang="en-US" sz="1000" b="1" dirty="0">
+                <a:solidFill>
+                  <a:srgbClr val="111111"/>
+                </a:solidFill>
+                <a:latin typeface="Pretendard" pitchFamily="34" charset="0"/>
+                <a:ea typeface="Pretendard" pitchFamily="34" charset="-122"/>
+                <a:cs typeface="Pretendard" pitchFamily="34" charset="-120"/>
+              </a:rPr>
+              <a:t>1</a:t>
+            </a:r>
+            <a:endParaRPr lang="en-US" sz="1000" dirty="0"/>
+          </a:p>
+        </p:txBody>
+      </p:sp>
+      <p:sp>
+        <p:nvSpPr>
+          <p:cNvPr id="11" name="Text 9"/>
+          <p:cNvSpPr/>
+          <p:nvPr/>
+        </p:nvSpPr>
+        <p:spPr>
+          <a:xfrm>
+            <a:off x="1188720" y="1719072"/>
+            <a:ext cx="9875520" cy="310896"/>
+          </a:xfrm>
+          <a:prstGeom prst="rect">
+            <a:avLst/>
+          </a:prstGeom>
+          <a:noFill/>
+          <a:ln/>
+        </p:spPr>
+        <p:txBody>
+          <a:bodyPr wrap="square" lIns="0" tIns="0" rIns="0" bIns="0" rtlCol="0" anchor="ctr"/>
+          <a:lstStyle/>
+          <a:p>
+            <a:pPr indent="0" marL="0">
+              <a:buNone/>
+            </a:pPr>
+            <a:r>
+              <a:rPr lang="en-US" sz="1450" dirty="0">
+                <a:solidFill>
+                  <a:srgbClr val="111111"/>
+                </a:solidFill>
+                <a:latin typeface="Pretendard Black" pitchFamily="34" charset="0"/>
+                <a:ea typeface="Pretendard Black" pitchFamily="34" charset="-122"/>
+                <a:cs typeface="Pretendard Black" pitchFamily="34" charset="-120"/>
+              </a:rPr>
+              <a:t>발표를 시간 안에 끝낼 수 있다</a:t>
+            </a:r>
+            <a:endParaRPr lang="en-US" sz="1450" dirty="0"/>
+          </a:p>
+        </p:txBody>
+      </p:sp>
+      <p:sp>
+        <p:nvSpPr>
+          <p:cNvPr id="12" name="Text 10"/>
+          <p:cNvSpPr/>
+          <p:nvPr/>
+        </p:nvSpPr>
+        <p:spPr>
+          <a:xfrm>
+            <a:off x="1188720" y="2029968"/>
+            <a:ext cx="9875520" cy="292608"/>
+          </a:xfrm>
+          <a:prstGeom prst="rect">
+            <a:avLst/>
+          </a:prstGeom>
+          <a:noFill/>
+          <a:ln/>
+        </p:spPr>
+        <p:txBody>
+          <a:bodyPr wrap="square" lIns="0" tIns="0" rIns="0" bIns="0" rtlCol="0" anchor="ctr"/>
+          <a:lstStyle/>
+          <a:p>
+            <a:pPr indent="0" marL="0">
+              <a:buNone/>
+            </a:pPr>
+            <a:r>
+              <a:rPr lang="en-US" sz="1100" dirty="0">
+                <a:solidFill>
+                  <a:srgbClr val="6E6E6E"/>
+                </a:solidFill>
+                <a:latin typeface="Pretendard" pitchFamily="34" charset="0"/>
+                <a:ea typeface="Pretendard" pitchFamily="34" charset="-122"/>
+                <a:cs typeface="Pretendard" pitchFamily="34" charset="-120"/>
+              </a:rPr>
+              <a:t>실제로 재보지 않으면 반드시 넘깁니다</a:t>
+            </a:r>
+            <a:endParaRPr lang="en-US" sz="1100" dirty="0"/>
+          </a:p>
+        </p:txBody>
+      </p:sp>
+      <p:sp>
+        <p:nvSpPr>
+          <p:cNvPr id="13" name="Shape 11"/>
+          <p:cNvSpPr/>
+          <p:nvPr/>
+        </p:nvSpPr>
+        <p:spPr>
+          <a:xfrm>
             <a:off x="640080" y="2670048"/>
-            <a:ext cx="310896" cy="310896"/>
-          </a:xfrm>
-          <a:prstGeom prst="rect">
-            <a:avLst/>
-          </a:prstGeom>
-          <a:noFill/>
-          <a:ln/>
-        </p:spPr>
-        <p:txBody>
-          <a:bodyPr wrap="square" lIns="0" tIns="0" rIns="0" bIns="0" rtlCol="0" anchor="ctr"/>
-          <a:lstStyle/>
-          <a:p>
-            <a:pPr algn="ctr" indent="0" marL="0">
-              <a:buNone/>
-            </a:pPr>
-            <a:r>
-              <a:rPr lang="en-US" sz="1050" b="1" dirty="0">
-                <a:solidFill>
-                  <a:srgbClr val="FFFFFF"/>
-                </a:solidFill>
-                <a:latin typeface="Pretendard" pitchFamily="34" charset="0"/>
-                <a:ea typeface="Pretendard" pitchFamily="34" charset="-122"/>
-                <a:cs typeface="Pretendard" pitchFamily="34" charset="-120"/>
-              </a:rPr>
-              <a:t>2</a:t>
-            </a:r>
-            <a:endParaRPr lang="en-US" sz="1050" dirty="0"/>
-          </a:p>
-        </p:txBody>
-      </p:sp>
-      <p:sp>
-        <p:nvSpPr>
-          <p:cNvPr id="11" name="Text 9"/>
-          <p:cNvSpPr/>
-          <p:nvPr/>
-        </p:nvSpPr>
-        <p:spPr>
-          <a:xfrm>
-            <a:off x="1188720" y="2578608"/>
-            <a:ext cx="9875520" cy="310896"/>
-          </a:xfrm>
-          <a:prstGeom prst="rect">
-            <a:avLst/>
-          </a:prstGeom>
-          <a:noFill/>
-          <a:ln/>
-        </p:spPr>
-        <p:txBody>
-          <a:bodyPr wrap="square" lIns="0" tIns="0" rIns="0" bIns="0" rtlCol="0" anchor="ctr"/>
-          <a:lstStyle/>
-          <a:p>
-            <a:pPr indent="0" marL="0">
-              <a:buNone/>
-            </a:pPr>
-            <a:r>
-              <a:rPr lang="en-US" sz="1450" b="1" dirty="0">
-                <a:solidFill>
-                  <a:srgbClr val="14161B"/>
-                </a:solidFill>
-                <a:latin typeface="Pretendard" pitchFamily="34" charset="0"/>
-                <a:ea typeface="Pretendard" pitchFamily="34" charset="-122"/>
-                <a:cs typeface="Pretendard" pitchFamily="34" charset="-120"/>
-              </a:rPr>
-              <a:t>남의 눈으로 내 약점을 확인한다</a:t>
-            </a:r>
-            <a:endParaRPr lang="en-US" sz="1450" dirty="0"/>
-          </a:p>
-        </p:txBody>
-      </p:sp>
-      <p:sp>
-        <p:nvSpPr>
-          <p:cNvPr id="12" name="Text 10"/>
-          <p:cNvSpPr/>
-          <p:nvPr/>
-        </p:nvSpPr>
-        <p:spPr>
-          <a:xfrm>
-            <a:off x="1188720" y="2889504"/>
-            <a:ext cx="9875520" cy="292608"/>
-          </a:xfrm>
-          <a:prstGeom prst="rect">
-            <a:avLst/>
-          </a:prstGeom>
-          <a:noFill/>
-          <a:ln/>
-        </p:spPr>
-        <p:txBody>
-          <a:bodyPr wrap="square" lIns="0" tIns="0" rIns="0" bIns="0" rtlCol="0" anchor="ctr"/>
-          <a:lstStyle/>
-          <a:p>
-            <a:pPr indent="0" marL="0">
-              <a:buNone/>
-            </a:pPr>
-            <a:r>
-              <a:rPr lang="en-US" sz="1100" dirty="0">
-                <a:solidFill>
-                  <a:srgbClr val="6B7280"/>
-                </a:solidFill>
-                <a:latin typeface="Pretendard" pitchFamily="34" charset="0"/>
-                <a:ea typeface="Pretendard" pitchFamily="34" charset="-122"/>
-                <a:cs typeface="Pretendard" pitchFamily="34" charset="-120"/>
-              </a:rPr>
-              <a:t>본인에게는 안 보이는 것이 있습니다</a:t>
-            </a:r>
-            <a:endParaRPr lang="en-US" sz="1100" dirty="0"/>
-          </a:p>
-        </p:txBody>
-      </p:sp>
-      <p:sp>
-        <p:nvSpPr>
-          <p:cNvPr id="13" name="Shape 11"/>
-          <p:cNvSpPr/>
-          <p:nvPr/>
-        </p:nvSpPr>
-        <p:spPr>
-          <a:xfrm>
-            <a:off x="640080" y="3364992"/>
-            <a:ext cx="10911535" cy="9144"/>
+            <a:ext cx="10911535" cy="7315"/>
           </a:xfrm>
           <a:prstGeom prst="rect">
             <a:avLst/>
           </a:prstGeom>
           <a:solidFill>
-            <a:srgbClr val="E4E6EB"/>
+            <a:srgbClr val="DCDCDC"/>
           </a:solidFill>
           <a:ln w="12700">
             <a:solidFill>
-              <a:srgbClr val="E4E6EB"/>
+              <a:srgbClr val="DCDCDC"/>
             </a:solidFill>
             <a:prstDash val="solid"/>
           </a:ln>
@@ -3254,20 +3742,18 @@
         </p:nvSpPr>
         <p:spPr>
           <a:xfrm>
-            <a:off x="640080" y="3529584"/>
+            <a:off x="640080" y="2834640"/>
             <a:ext cx="310896" cy="310896"/>
           </a:xfrm>
-          <a:prstGeom prst="roundRect">
-            <a:avLst>
-              <a:gd name="adj" fmla="val 17647"/>
-            </a:avLst>
+          <a:prstGeom prst="ellipse">
+            <a:avLst/>
           </a:prstGeom>
           <a:solidFill>
-            <a:srgbClr val="14161B"/>
+            <a:srgbClr val="FFFFFF"/>
           </a:solidFill>
-          <a:ln w="6350">
+          <a:ln w="12700">
             <a:solidFill>
-              <a:srgbClr val="14161B"/>
+              <a:srgbClr val="111111"/>
             </a:solidFill>
             <a:prstDash val="solid"/>
           </a:ln>
@@ -3281,7 +3767,7 @@
         </p:nvSpPr>
         <p:spPr>
           <a:xfrm>
-            <a:off x="640080" y="3529584"/>
+            <a:off x="640080" y="2834640"/>
             <a:ext cx="310896" cy="310896"/>
           </a:xfrm>
           <a:prstGeom prst="rect">
@@ -3298,9 +3784,176 @@
               <a:buNone/>
             </a:pPr>
             <a:r>
-              <a:rPr lang="en-US" sz="1050" b="1" dirty="0">
-                <a:solidFill>
-                  <a:srgbClr val="FFFFFF"/>
+              <a:rPr lang="en-US" sz="1000" b="1" dirty="0">
+                <a:solidFill>
+                  <a:srgbClr val="111111"/>
+                </a:solidFill>
+                <a:latin typeface="Pretendard" pitchFamily="34" charset="0"/>
+                <a:ea typeface="Pretendard" pitchFamily="34" charset="-122"/>
+                <a:cs typeface="Pretendard" pitchFamily="34" charset="-120"/>
+              </a:rPr>
+              <a:t>2</a:t>
+            </a:r>
+            <a:endParaRPr lang="en-US" sz="1000" dirty="0"/>
+          </a:p>
+        </p:txBody>
+      </p:sp>
+      <p:sp>
+        <p:nvSpPr>
+          <p:cNvPr id="16" name="Text 14"/>
+          <p:cNvSpPr/>
+          <p:nvPr/>
+        </p:nvSpPr>
+        <p:spPr>
+          <a:xfrm>
+            <a:off x="1188720" y="2743200"/>
+            <a:ext cx="9875520" cy="310896"/>
+          </a:xfrm>
+          <a:prstGeom prst="rect">
+            <a:avLst/>
+          </a:prstGeom>
+          <a:noFill/>
+          <a:ln/>
+        </p:spPr>
+        <p:txBody>
+          <a:bodyPr wrap="square" lIns="0" tIns="0" rIns="0" bIns="0" rtlCol="0" anchor="ctr"/>
+          <a:lstStyle/>
+          <a:p>
+            <a:pPr indent="0" marL="0">
+              <a:buNone/>
+            </a:pPr>
+            <a:r>
+              <a:rPr lang="en-US" sz="1450" dirty="0">
+                <a:solidFill>
+                  <a:srgbClr val="111111"/>
+                </a:solidFill>
+                <a:latin typeface="Pretendard Black" pitchFamily="34" charset="0"/>
+                <a:ea typeface="Pretendard Black" pitchFamily="34" charset="-122"/>
+                <a:cs typeface="Pretendard Black" pitchFamily="34" charset="-120"/>
+              </a:rPr>
+              <a:t>남의 눈으로 내 약점을 확인한다</a:t>
+            </a:r>
+            <a:endParaRPr lang="en-US" sz="1450" dirty="0"/>
+          </a:p>
+        </p:txBody>
+      </p:sp>
+      <p:sp>
+        <p:nvSpPr>
+          <p:cNvPr id="17" name="Text 15"/>
+          <p:cNvSpPr/>
+          <p:nvPr/>
+        </p:nvSpPr>
+        <p:spPr>
+          <a:xfrm>
+            <a:off x="1188720" y="3054096"/>
+            <a:ext cx="9875520" cy="292608"/>
+          </a:xfrm>
+          <a:prstGeom prst="rect">
+            <a:avLst/>
+          </a:prstGeom>
+          <a:noFill/>
+          <a:ln/>
+        </p:spPr>
+        <p:txBody>
+          <a:bodyPr wrap="square" lIns="0" tIns="0" rIns="0" bIns="0" rtlCol="0" anchor="ctr"/>
+          <a:lstStyle/>
+          <a:p>
+            <a:pPr indent="0" marL="0">
+              <a:buNone/>
+            </a:pPr>
+            <a:r>
+              <a:rPr lang="en-US" sz="1100" dirty="0">
+                <a:solidFill>
+                  <a:srgbClr val="6E6E6E"/>
+                </a:solidFill>
+                <a:latin typeface="Pretendard" pitchFamily="34" charset="0"/>
+                <a:ea typeface="Pretendard" pitchFamily="34" charset="-122"/>
+                <a:cs typeface="Pretendard" pitchFamily="34" charset="-120"/>
+              </a:rPr>
+              <a:t>본인에게는 안 보이는 것이 있습니다</a:t>
+            </a:r>
+            <a:endParaRPr lang="en-US" sz="1100" dirty="0"/>
+          </a:p>
+        </p:txBody>
+      </p:sp>
+      <p:sp>
+        <p:nvSpPr>
+          <p:cNvPr id="18" name="Shape 16"/>
+          <p:cNvSpPr/>
+          <p:nvPr/>
+        </p:nvSpPr>
+        <p:spPr>
+          <a:xfrm>
+            <a:off x="640080" y="3694176"/>
+            <a:ext cx="10911535" cy="7315"/>
+          </a:xfrm>
+          <a:prstGeom prst="rect">
+            <a:avLst/>
+          </a:prstGeom>
+          <a:solidFill>
+            <a:srgbClr val="DCDCDC"/>
+          </a:solidFill>
+          <a:ln w="12700">
+            <a:solidFill>
+              <a:srgbClr val="DCDCDC"/>
+            </a:solidFill>
+            <a:prstDash val="solid"/>
+          </a:ln>
+        </p:spPr>
+      </p:sp>
+      <p:sp>
+        <p:nvSpPr>
+          <p:cNvPr id="19" name="Shape 17"/>
+          <p:cNvSpPr/>
+          <p:nvPr/>
+        </p:nvSpPr>
+        <p:spPr>
+          <a:xfrm>
+            <a:off x="640080" y="3858768"/>
+            <a:ext cx="310896" cy="310896"/>
+          </a:xfrm>
+          <a:prstGeom prst="ellipse">
+            <a:avLst/>
+          </a:prstGeom>
+          <a:solidFill>
+            <a:srgbClr val="FFFFFF"/>
+          </a:solidFill>
+          <a:ln w="12700">
+            <a:solidFill>
+              <a:srgbClr val="111111"/>
+            </a:solidFill>
+            <a:prstDash val="solid"/>
+          </a:ln>
+        </p:spPr>
+      </p:sp>
+      <p:sp>
+        <p:nvSpPr>
+          <p:cNvPr id="20" name="Text 18"/>
+          <p:cNvSpPr/>
+          <p:nvPr/>
+        </p:nvSpPr>
+        <p:spPr>
+          <a:xfrm>
+            <a:off x="640080" y="3858768"/>
+            <a:ext cx="310896" cy="310896"/>
+          </a:xfrm>
+          <a:prstGeom prst="rect">
+            <a:avLst/>
+          </a:prstGeom>
+          <a:noFill/>
+          <a:ln/>
+        </p:spPr>
+        <p:txBody>
+          <a:bodyPr wrap="square" lIns="0" tIns="0" rIns="0" bIns="0" rtlCol="0" anchor="ctr"/>
+          <a:lstStyle/>
+          <a:p>
+            <a:pPr algn="ctr" indent="0" marL="0">
+              <a:buNone/>
+            </a:pPr>
+            <a:r>
+              <a:rPr lang="en-US" sz="1000" b="1" dirty="0">
+                <a:solidFill>
+                  <a:srgbClr val="111111"/>
                 </a:solidFill>
                 <a:latin typeface="Pretendard" pitchFamily="34" charset="0"/>
                 <a:ea typeface="Pretendard" pitchFamily="34" charset="-122"/>
@@ -3308,19 +3961,19 @@
               </a:rPr>
               <a:t>3</a:t>
             </a:r>
-            <a:endParaRPr lang="en-US" sz="1050" dirty="0"/>
-          </a:p>
-        </p:txBody>
-      </p:sp>
-      <p:sp>
-        <p:nvSpPr>
-          <p:cNvPr id="16" name="Text 14"/>
-          <p:cNvSpPr/>
-          <p:nvPr/>
-        </p:nvSpPr>
-        <p:spPr>
-          <a:xfrm>
-            <a:off x="1188720" y="3438144"/>
+            <a:endParaRPr lang="en-US" sz="1000" dirty="0"/>
+          </a:p>
+        </p:txBody>
+      </p:sp>
+      <p:sp>
+        <p:nvSpPr>
+          <p:cNvPr id="21" name="Text 19"/>
+          <p:cNvSpPr/>
+          <p:nvPr/>
+        </p:nvSpPr>
+        <p:spPr>
+          <a:xfrm>
+            <a:off x="1188720" y="3767328"/>
             <a:ext cx="9875520" cy="310896"/>
           </a:xfrm>
           <a:prstGeom prst="rect">
@@ -3337,13 +3990,13 @@
               <a:buNone/>
             </a:pPr>
             <a:r>
-              <a:rPr lang="en-US" sz="1450" b="1" dirty="0">
-                <a:solidFill>
-                  <a:srgbClr val="14161B"/>
-                </a:solidFill>
-                <a:latin typeface="Pretendard" pitchFamily="34" charset="0"/>
-                <a:ea typeface="Pretendard" pitchFamily="34" charset="-122"/>
-                <a:cs typeface="Pretendard" pitchFamily="34" charset="-120"/>
+              <a:rPr lang="en-US" sz="1450" dirty="0">
+                <a:solidFill>
+                  <a:srgbClr val="111111"/>
+                </a:solidFill>
+                <a:latin typeface="Pretendard Black" pitchFamily="34" charset="0"/>
+                <a:ea typeface="Pretendard Black" pitchFamily="34" charset="-122"/>
+                <a:cs typeface="Pretendard Black" pitchFamily="34" charset="-120"/>
               </a:rPr>
               <a:t>일주일에 고칠 세 가지를 정한다</a:t>
             </a:r>
@@ -3353,13 +4006,13 @@
       </p:sp>
       <p:sp>
         <p:nvSpPr>
-          <p:cNvPr id="17" name="Text 15"/>
-          <p:cNvSpPr/>
-          <p:nvPr/>
-        </p:nvSpPr>
-        <p:spPr>
-          <a:xfrm>
-            <a:off x="1188720" y="3749040"/>
+          <p:cNvPr id="22" name="Text 20"/>
+          <p:cNvSpPr/>
+          <p:nvPr/>
+        </p:nvSpPr>
+        <p:spPr>
+          <a:xfrm>
+            <a:off x="1188720" y="4078224"/>
             <a:ext cx="9875520" cy="292608"/>
           </a:xfrm>
           <a:prstGeom prst="rect">
@@ -3378,7 +4031,7 @@
             <a:r>
               <a:rPr lang="en-US" sz="1100" dirty="0">
                 <a:solidFill>
-                  <a:srgbClr val="6B7280"/>
+                  <a:srgbClr val="6E6E6E"/>
                 </a:solidFill>
                 <a:latin typeface="Pretendard" pitchFamily="34" charset="0"/>
                 <a:ea typeface="Pretendard" pitchFamily="34" charset="-122"/>
@@ -3392,13 +4045,38 @@
       </p:sp>
       <p:sp>
         <p:nvSpPr>
-          <p:cNvPr id="18" name="Text 16"/>
-          <p:cNvSpPr/>
-          <p:nvPr/>
-        </p:nvSpPr>
-        <p:spPr>
-          <a:xfrm>
-            <a:off x="640080" y="4407408"/>
+          <p:cNvPr id="23" name="Shape 21"/>
+          <p:cNvSpPr/>
+          <p:nvPr/>
+        </p:nvSpPr>
+        <p:spPr>
+          <a:xfrm>
+            <a:off x="640080" y="4791456"/>
+            <a:ext cx="10911535" cy="7315"/>
+          </a:xfrm>
+          <a:prstGeom prst="rect">
+            <a:avLst/>
+          </a:prstGeom>
+          <a:solidFill>
+            <a:srgbClr val="111111"/>
+          </a:solidFill>
+          <a:ln w="12700">
+            <a:solidFill>
+              <a:srgbClr val="111111"/>
+            </a:solidFill>
+            <a:prstDash val="solid"/>
+          </a:ln>
+        </p:spPr>
+      </p:sp>
+      <p:sp>
+        <p:nvSpPr>
+          <p:cNvPr id="24" name="Text 22"/>
+          <p:cNvSpPr/>
+          <p:nvPr/>
+        </p:nvSpPr>
+        <p:spPr>
+          <a:xfrm>
+            <a:off x="640080" y="4901184"/>
             <a:ext cx="10911535" cy="402336"/>
           </a:xfrm>
           <a:prstGeom prst="rect">
@@ -3420,7 +4098,7 @@
             <a:r>
               <a:rPr lang="en-US" sz="1250" b="1" dirty="0">
                 <a:solidFill>
-                  <a:srgbClr val="14161B"/>
+                  <a:srgbClr val="111111"/>
                 </a:solidFill>
                 <a:latin typeface="Pretendard" pitchFamily="34" charset="0"/>
                 <a:ea typeface="Pretendard" pitchFamily="34" charset="-122"/>
@@ -3434,14 +4112,39 @@
       </p:sp>
       <p:sp>
         <p:nvSpPr>
-          <p:cNvPr id="19" name="Text 17"/>
-          <p:cNvSpPr/>
-          <p:nvPr/>
-        </p:nvSpPr>
-        <p:spPr>
-          <a:xfrm>
-            <a:off x="640080" y="6345936"/>
-            <a:ext cx="7772400" cy="256032"/>
+          <p:cNvPr id="25" name="Shape 23"/>
+          <p:cNvSpPr/>
+          <p:nvPr/>
+        </p:nvSpPr>
+        <p:spPr>
+          <a:xfrm>
+            <a:off x="640080" y="6291072"/>
+            <a:ext cx="10911535" cy="7315"/>
+          </a:xfrm>
+          <a:prstGeom prst="rect">
+            <a:avLst/>
+          </a:prstGeom>
+          <a:solidFill>
+            <a:srgbClr val="DCDCDC"/>
+          </a:solidFill>
+          <a:ln w="12700">
+            <a:solidFill>
+              <a:srgbClr val="DCDCDC"/>
+            </a:solidFill>
+            <a:prstDash val="solid"/>
+          </a:ln>
+        </p:spPr>
+      </p:sp>
+      <p:sp>
+        <p:nvSpPr>
+          <p:cNvPr id="26" name="Text 24"/>
+          <p:cNvSpPr/>
+          <p:nvPr/>
+        </p:nvSpPr>
+        <p:spPr>
+          <a:xfrm>
+            <a:off x="640080" y="6382512"/>
+            <a:ext cx="7772400" cy="237744"/>
           </a:xfrm>
           <a:prstGeom prst="rect">
             <a:avLst/>
@@ -3457,9 +4160,9 @@
               <a:buNone/>
             </a:pPr>
             <a:r>
-              <a:rPr lang="en-US" sz="900" dirty="0">
-                <a:solidFill>
-                  <a:srgbClr val="9AA0AA"/>
+              <a:rPr lang="en-US" sz="850" spc="40" kern="0" dirty="0">
+                <a:solidFill>
+                  <a:srgbClr val="9B9B9B"/>
                 </a:solidFill>
                 <a:latin typeface="Pretendard" pitchFamily="34" charset="0"/>
                 <a:ea typeface="Pretendard" pitchFamily="34" charset="-122"/>
@@ -3467,20 +4170,20 @@
               </a:rPr>
               <a:t>포트폴리오제작 · 14주차 최종 리허설 및 동료 피드백</a:t>
             </a:r>
-            <a:endParaRPr lang="en-US" sz="900" dirty="0"/>
-          </a:p>
-        </p:txBody>
-      </p:sp>
-      <p:sp>
-        <p:nvSpPr>
-          <p:cNvPr id="20" name="Text 18"/>
-          <p:cNvSpPr/>
-          <p:nvPr/>
-        </p:nvSpPr>
-        <p:spPr>
-          <a:xfrm>
-            <a:off x="10454335" y="6345936"/>
-            <a:ext cx="1097280" cy="256032"/>
+            <a:endParaRPr lang="en-US" sz="850" dirty="0"/>
+          </a:p>
+        </p:txBody>
+      </p:sp>
+      <p:sp>
+        <p:nvSpPr>
+          <p:cNvPr id="27" name="Text 25"/>
+          <p:cNvSpPr/>
+          <p:nvPr/>
+        </p:nvSpPr>
+        <p:spPr>
+          <a:xfrm>
+            <a:off x="10271455" y="6382512"/>
+            <a:ext cx="1280160" cy="237744"/>
           </a:xfrm>
           <a:prstGeom prst="rect">
             <a:avLst/>
@@ -3496,17 +4199,17 @@
               <a:buNone/>
             </a:pPr>
             <a:r>
-              <a:rPr lang="en-US" sz="900" dirty="0">
-                <a:solidFill>
-                  <a:srgbClr val="9AA0AA"/>
-                </a:solidFill>
-                <a:latin typeface="Pretendard" pitchFamily="34" charset="0"/>
-                <a:ea typeface="Pretendard" pitchFamily="34" charset="-122"/>
-                <a:cs typeface="Pretendard" pitchFamily="34" charset="-120"/>
-              </a:rPr>
-              <a:t>02</a:t>
-            </a:r>
-            <a:endParaRPr lang="en-US" sz="900" dirty="0"/>
+              <a:rPr lang="en-US" sz="850" spc="140" kern="0" dirty="0">
+                <a:solidFill>
+                  <a:srgbClr val="9B9B9B"/>
+                </a:solidFill>
+                <a:latin typeface="Pretendard" pitchFamily="34" charset="0"/>
+                <a:ea typeface="Pretendard" pitchFamily="34" charset="-122"/>
+                <a:cs typeface="Pretendard" pitchFamily="34" charset="-120"/>
+              </a:rPr>
+              <a:t>P.02</a:t>
+            </a:r>
+            <a:endParaRPr lang="en-US" sz="850" dirty="0"/>
           </a:p>
         </p:txBody>
       </p:sp>
@@ -3524,7 +4227,7 @@
     <p:bg>
       <p:bgPr>
         <a:solidFill>
-          <a:srgbClr val="14161B"/>
+          <a:srgbClr val="111111"/>
         </a:solidFill>
       </p:bgPr>
     </p:bg>
@@ -3550,8 +4253,86 @@
         </p:nvSpPr>
         <p:spPr>
           <a:xfrm>
-            <a:off x="7711135" y="914400"/>
-            <a:ext cx="3840480" cy="5029200"/>
+            <a:off x="640080" y="274320"/>
+            <a:ext cx="3657600" cy="219456"/>
+          </a:xfrm>
+          <a:prstGeom prst="rect">
+            <a:avLst/>
+          </a:prstGeom>
+          <a:noFill/>
+          <a:ln/>
+        </p:spPr>
+        <p:txBody>
+          <a:bodyPr wrap="square" lIns="0" tIns="0" rIns="0" bIns="0" rtlCol="0" anchor="ctr"/>
+          <a:lstStyle/>
+          <a:p>
+            <a:pPr indent="0" marL="0">
+              <a:buNone/>
+            </a:pPr>
+            <a:r>
+              <a:rPr lang="en-US" sz="900" spc="120" kern="0" dirty="0">
+                <a:solidFill>
+                  <a:srgbClr val="9A9A9A"/>
+                </a:solidFill>
+                <a:latin typeface="Pretendard" pitchFamily="34" charset="0"/>
+                <a:ea typeface="Pretendard" pitchFamily="34" charset="-122"/>
+                <a:cs typeface="Pretendard" pitchFamily="34" charset="-120"/>
+              </a:rPr>
+              <a:t>포트폴리오제작</a:t>
+            </a:r>
+            <a:endParaRPr lang="en-US" sz="900" dirty="0"/>
+          </a:p>
+        </p:txBody>
+      </p:sp>
+      <p:sp>
+        <p:nvSpPr>
+          <p:cNvPr id="3" name="Text 1"/>
+          <p:cNvSpPr/>
+          <p:nvPr/>
+        </p:nvSpPr>
+        <p:spPr>
+          <a:xfrm>
+            <a:off x="4480560" y="274320"/>
+            <a:ext cx="4572000" cy="219456"/>
+          </a:xfrm>
+          <a:prstGeom prst="rect">
+            <a:avLst/>
+          </a:prstGeom>
+          <a:noFill/>
+          <a:ln/>
+        </p:spPr>
+        <p:txBody>
+          <a:bodyPr wrap="square" lIns="0" tIns="0" rIns="0" bIns="0" rtlCol="0" anchor="ctr"/>
+          <a:lstStyle/>
+          <a:p>
+            <a:pPr algn="ctr" indent="0" marL="0">
+              <a:buNone/>
+            </a:pPr>
+            <a:r>
+              <a:rPr lang="en-US" sz="900" spc="120" kern="0" dirty="0">
+                <a:solidFill>
+                  <a:srgbClr val="9A9A9A"/>
+                </a:solidFill>
+                <a:latin typeface="Pretendard" pitchFamily="34" charset="0"/>
+                <a:ea typeface="Pretendard" pitchFamily="34" charset="-122"/>
+                <a:cs typeface="Pretendard" pitchFamily="34" charset="-120"/>
+              </a:rPr>
+              <a:t>PHASE 3 완성과 발표</a:t>
+            </a:r>
+            <a:endParaRPr lang="en-US" sz="900" dirty="0"/>
+          </a:p>
+        </p:txBody>
+      </p:sp>
+      <p:sp>
+        <p:nvSpPr>
+          <p:cNvPr id="4" name="Text 2"/>
+          <p:cNvSpPr/>
+          <p:nvPr/>
+        </p:nvSpPr>
+        <p:spPr>
+          <a:xfrm>
+            <a:off x="8808415" y="274320"/>
+            <a:ext cx="2743200" cy="219456"/>
           </a:xfrm>
           <a:prstGeom prst="rect">
             <a:avLst/>
@@ -3567,30 +4348,163 @@
               <a:buNone/>
             </a:pPr>
             <a:r>
-              <a:rPr lang="en-US" sz="25500" dirty="0">
-                <a:solidFill>
-                  <a:srgbClr val="262A33"/>
-                </a:solidFill>
-                <a:latin typeface="Pretendard Thin" pitchFamily="34" charset="0"/>
-                <a:ea typeface="Pretendard Thin" pitchFamily="34" charset="-122"/>
-                <a:cs typeface="Pretendard Thin" pitchFamily="34" charset="-120"/>
+              <a:rPr lang="en-US" sz="900" spc="200" kern="0" dirty="0">
+                <a:solidFill>
+                  <a:srgbClr val="9A9A9A"/>
+                </a:solidFill>
+                <a:latin typeface="Pretendard" pitchFamily="34" charset="0"/>
+                <a:ea typeface="Pretendard" pitchFamily="34" charset="-122"/>
+                <a:cs typeface="Pretendard" pitchFamily="34" charset="-120"/>
+              </a:rPr>
+              <a:t>WEEK 14</a:t>
+            </a:r>
+            <a:endParaRPr lang="en-US" sz="900" dirty="0"/>
+          </a:p>
+        </p:txBody>
+      </p:sp>
+      <p:sp>
+        <p:nvSpPr>
+          <p:cNvPr id="5" name="Shape 3"/>
+          <p:cNvSpPr/>
+          <p:nvPr/>
+        </p:nvSpPr>
+        <p:spPr>
+          <a:xfrm>
+            <a:off x="640080" y="548640"/>
+            <a:ext cx="10911535" cy="7315"/>
+          </a:xfrm>
+          <a:prstGeom prst="rect">
+            <a:avLst/>
+          </a:prstGeom>
+          <a:solidFill>
+            <a:srgbClr val="333333"/>
+          </a:solidFill>
+          <a:ln w="12700">
+            <a:solidFill>
+              <a:srgbClr val="333333"/>
+            </a:solidFill>
+            <a:prstDash val="solid"/>
+          </a:ln>
+        </p:spPr>
+      </p:sp>
+      <p:sp>
+        <p:nvSpPr>
+          <p:cNvPr id="6" name="Text 4"/>
+          <p:cNvSpPr/>
+          <p:nvPr/>
+        </p:nvSpPr>
+        <p:spPr>
+          <a:xfrm>
+            <a:off x="7345375" y="1737360"/>
+            <a:ext cx="4206240" cy="3291840"/>
+          </a:xfrm>
+          <a:prstGeom prst="rect">
+            <a:avLst/>
+          </a:prstGeom>
+          <a:noFill/>
+          <a:ln/>
+        </p:spPr>
+        <p:txBody>
+          <a:bodyPr wrap="square" lIns="0" tIns="0" rIns="0" bIns="0" rtlCol="0" anchor="ctr"/>
+          <a:lstStyle/>
+          <a:p>
+            <a:pPr algn="r" indent="0" marL="0">
+              <a:buNone/>
+            </a:pPr>
+            <a:r>
+              <a:rPr lang="en-US" sz="20000" dirty="0">
+                <a:solidFill>
+                  <a:srgbClr val="1B1B1B"/>
+                </a:solidFill>
+                <a:latin typeface="Pretendard Black" pitchFamily="34" charset="0"/>
+                <a:ea typeface="Pretendard Black" pitchFamily="34" charset="-122"/>
+                <a:cs typeface="Pretendard Black" pitchFamily="34" charset="-120"/>
               </a:rPr>
               <a:t>01</a:t>
             </a:r>
-            <a:endParaRPr lang="en-US" sz="25500" dirty="0"/>
-          </a:p>
-        </p:txBody>
-      </p:sp>
-      <p:sp>
-        <p:nvSpPr>
-          <p:cNvPr id="3" name="Text 1"/>
-          <p:cNvSpPr/>
-          <p:nvPr/>
-        </p:nvSpPr>
-        <p:spPr>
-          <a:xfrm>
-            <a:off x="640080" y="2487168"/>
-            <a:ext cx="7315200" cy="274320"/>
+            <a:endParaRPr lang="en-US" sz="20000" dirty="0"/>
+          </a:p>
+        </p:txBody>
+      </p:sp>
+      <p:sp>
+        <p:nvSpPr>
+          <p:cNvPr id="7" name="Shape 5"/>
+          <p:cNvSpPr/>
+          <p:nvPr/>
+        </p:nvSpPr>
+        <p:spPr>
+          <a:xfrm>
+            <a:off x="941832" y="1371600"/>
+            <a:ext cx="0" cy="603504"/>
+          </a:xfrm>
+          <a:prstGeom prst="line">
+            <a:avLst/>
+          </a:prstGeom>
+          <a:noFill/>
+          <a:ln w="15875">
+            <a:solidFill>
+              <a:srgbClr val="FFFFFF"/>
+            </a:solidFill>
+            <a:prstDash val="solid"/>
+          </a:ln>
+        </p:spPr>
+      </p:sp>
+      <p:sp>
+        <p:nvSpPr>
+          <p:cNvPr id="8" name="Shape 6"/>
+          <p:cNvSpPr/>
+          <p:nvPr/>
+        </p:nvSpPr>
+        <p:spPr>
+          <a:xfrm>
+            <a:off x="640080" y="1733702"/>
+            <a:ext cx="301752" cy="241402"/>
+          </a:xfrm>
+          <a:prstGeom prst="line">
+            <a:avLst/>
+          </a:prstGeom>
+          <a:noFill/>
+          <a:ln w="15875">
+            <a:solidFill>
+              <a:srgbClr val="FFFFFF"/>
+            </a:solidFill>
+            <a:prstDash val="solid"/>
+          </a:ln>
+        </p:spPr>
+      </p:sp>
+      <p:sp>
+        <p:nvSpPr>
+          <p:cNvPr id="9" name="Shape 7"/>
+          <p:cNvSpPr/>
+          <p:nvPr/>
+        </p:nvSpPr>
+        <p:spPr>
+          <a:xfrm flipV="1">
+            <a:off x="941832" y="1733702"/>
+            <a:ext cx="301752" cy="241402"/>
+          </a:xfrm>
+          <a:prstGeom prst="line">
+            <a:avLst/>
+          </a:prstGeom>
+          <a:noFill/>
+          <a:ln w="15875">
+            <a:solidFill>
+              <a:srgbClr val="FFFFFF"/>
+            </a:solidFill>
+            <a:prstDash val="solid"/>
+          </a:ln>
+        </p:spPr>
+      </p:sp>
+      <p:sp>
+        <p:nvSpPr>
+          <p:cNvPr id="10" name="Text 8"/>
+          <p:cNvSpPr/>
+          <p:nvPr/>
+        </p:nvSpPr>
+        <p:spPr>
+          <a:xfrm>
+            <a:off x="640080" y="2615184"/>
+            <a:ext cx="7863840" cy="256032"/>
           </a:xfrm>
           <a:prstGeom prst="rect">
             <a:avLst/>
@@ -3606,9 +4520,9 @@
               <a:buNone/>
             </a:pPr>
             <a:r>
-              <a:rPr lang="en-US" sz="1100" b="1" spc="200" kern="0" dirty="0">
-                <a:solidFill>
-                  <a:srgbClr val="FF4A1C"/>
+              <a:rPr lang="en-US" sz="950" spc="280" kern="0" dirty="0">
+                <a:solidFill>
+                  <a:srgbClr val="9A9A9A"/>
                 </a:solidFill>
                 <a:latin typeface="Pretendard" pitchFamily="34" charset="0"/>
                 <a:ea typeface="Pretendard" pitchFamily="34" charset="-122"/>
@@ -3616,20 +4530,20 @@
               </a:rPr>
               <a:t>PART 01</a:t>
             </a:r>
-            <a:endParaRPr lang="en-US" sz="1100" dirty="0"/>
-          </a:p>
-        </p:txBody>
-      </p:sp>
-      <p:sp>
-        <p:nvSpPr>
-          <p:cNvPr id="4" name="Text 2"/>
-          <p:cNvSpPr/>
-          <p:nvPr/>
-        </p:nvSpPr>
-        <p:spPr>
-          <a:xfrm>
-            <a:off x="640080" y="2834640"/>
-            <a:ext cx="7315200" cy="731520"/>
+            <a:endParaRPr lang="en-US" sz="950" dirty="0"/>
+          </a:p>
+        </p:txBody>
+      </p:sp>
+      <p:sp>
+        <p:nvSpPr>
+          <p:cNvPr id="11" name="Text 9"/>
+          <p:cNvSpPr/>
+          <p:nvPr/>
+        </p:nvSpPr>
+        <p:spPr>
+          <a:xfrm>
+            <a:off x="640080" y="2889504"/>
+            <a:ext cx="7863840" cy="786384"/>
           </a:xfrm>
           <a:prstGeom prst="rect">
             <a:avLst/>
@@ -3645,30 +4559,55 @@
               <a:buNone/>
             </a:pPr>
             <a:r>
-              <a:rPr lang="en-US" sz="4200" b="1" dirty="0">
+              <a:rPr lang="en-US" sz="4600" dirty="0">
                 <a:solidFill>
                   <a:srgbClr val="FFFFFF"/>
                 </a:solidFill>
-                <a:latin typeface="Pretendard" pitchFamily="34" charset="0"/>
-                <a:ea typeface="Pretendard" pitchFamily="34" charset="-122"/>
-                <a:cs typeface="Pretendard" pitchFamily="34" charset="-120"/>
+                <a:latin typeface="Pretendard Black" pitchFamily="34" charset="0"/>
+                <a:ea typeface="Pretendard Black" pitchFamily="34" charset="-122"/>
+                <a:cs typeface="Pretendard Black" pitchFamily="34" charset="-120"/>
               </a:rPr>
               <a:t>리허설</a:t>
             </a:r>
-            <a:endParaRPr lang="en-US" sz="4200" dirty="0"/>
-          </a:p>
-        </p:txBody>
-      </p:sp>
-      <p:sp>
-        <p:nvSpPr>
-          <p:cNvPr id="5" name="Text 3"/>
-          <p:cNvSpPr/>
-          <p:nvPr/>
-        </p:nvSpPr>
-        <p:spPr>
-          <a:xfrm>
-            <a:off x="640080" y="3657600"/>
-            <a:ext cx="6766560" cy="640080"/>
+            <a:endParaRPr lang="en-US" sz="4600" dirty="0"/>
+          </a:p>
+        </p:txBody>
+      </p:sp>
+      <p:sp>
+        <p:nvSpPr>
+          <p:cNvPr id="12" name="Shape 10"/>
+          <p:cNvSpPr/>
+          <p:nvPr/>
+        </p:nvSpPr>
+        <p:spPr>
+          <a:xfrm>
+            <a:off x="640080" y="3803904"/>
+            <a:ext cx="2194560" cy="7315"/>
+          </a:xfrm>
+          <a:prstGeom prst="rect">
+            <a:avLst/>
+          </a:prstGeom>
+          <a:solidFill>
+            <a:srgbClr val="FFFFFF"/>
+          </a:solidFill>
+          <a:ln w="12700">
+            <a:solidFill>
+              <a:srgbClr val="FFFFFF"/>
+            </a:solidFill>
+            <a:prstDash val="solid"/>
+          </a:ln>
+        </p:spPr>
+      </p:sp>
+      <p:sp>
+        <p:nvSpPr>
+          <p:cNvPr id="13" name="Text 11"/>
+          <p:cNvSpPr/>
+          <p:nvPr/>
+        </p:nvSpPr>
+        <p:spPr>
+          <a:xfrm>
+            <a:off x="640080" y="4005072"/>
+            <a:ext cx="6949440" cy="731520"/>
           </a:xfrm>
           <a:prstGeom prst="rect">
             <a:avLst/>
@@ -3682,22 +4621,61 @@
           <a:p>
             <a:pPr indent="0" marL="0">
               <a:lnSpc>
-                <a:spcPct val="130000"/>
+                <a:spcPct val="134000"/>
               </a:lnSpc>
               <a:buNone/>
             </a:pPr>
             <a:r>
               <a:rPr lang="en-US" sz="1350" dirty="0">
                 <a:solidFill>
-                  <a:srgbClr val="AEB4BF"/>
-                </a:solidFill>
-                <a:latin typeface="Pretendard" pitchFamily="34" charset="0"/>
-                <a:ea typeface="Pretendard" pitchFamily="34" charset="-122"/>
-                <a:cs typeface="Pretendard" pitchFamily="34" charset="-120"/>
+                  <a:srgbClr val="B8B8B8"/>
+                </a:solidFill>
+                <a:latin typeface="Pretendard Light" pitchFamily="34" charset="0"/>
+                <a:ea typeface="Pretendard Light" pitchFamily="34" charset="-122"/>
+                <a:cs typeface="Pretendard Light" pitchFamily="34" charset="-120"/>
               </a:rPr>
               <a:t>조별로 돌아가며 실제로 발표합니다. 시간을 정확히 잽니다.</a:t>
             </a:r>
             <a:endParaRPr lang="en-US" sz="1350" dirty="0"/>
+          </a:p>
+        </p:txBody>
+      </p:sp>
+      <p:sp>
+        <p:nvSpPr>
+          <p:cNvPr id="14" name="Text 12"/>
+          <p:cNvSpPr/>
+          <p:nvPr/>
+        </p:nvSpPr>
+        <p:spPr>
+          <a:xfrm rot="16200000">
+            <a:off x="10436047" y="3291840"/>
+            <a:ext cx="2743200" cy="274320"/>
+          </a:xfrm>
+          <a:prstGeom prst="rect">
+            <a:avLst/>
+          </a:prstGeom>
+          <a:noFill/>
+          <a:ln/>
+        </p:spPr>
+        <p:txBody>
+          <a:bodyPr wrap="square" lIns="0" tIns="0" rIns="0" bIns="0" rtlCol="0" anchor="ctr"/>
+          <a:lstStyle/>
+          <a:p>
+            <a:pPr algn="ctr" indent="0" marL="0">
+              <a:buNone/>
+            </a:pPr>
+            <a:r>
+              <a:rPr lang="en-US" sz="850" spc="260" kern="0" dirty="0">
+                <a:solidFill>
+                  <a:srgbClr val="7A7A7A"/>
+                </a:solidFill>
+                <a:latin typeface="Pretendard" pitchFamily="34" charset="0"/>
+                <a:ea typeface="Pretendard" pitchFamily="34" charset="-122"/>
+                <a:cs typeface="Pretendard" pitchFamily="34" charset="-120"/>
+              </a:rPr>
+              <a:t>SECTION 01</a:t>
+            </a:r>
+            <a:endParaRPr lang="en-US" sz="850" dirty="0"/>
           </a:p>
         </p:txBody>
       </p:sp>
@@ -3741,8 +4719,8 @@
         </p:nvSpPr>
         <p:spPr>
           <a:xfrm>
-            <a:off x="640080" y="566928"/>
-            <a:ext cx="10911535" cy="237744"/>
+            <a:off x="640080" y="274320"/>
+            <a:ext cx="3657600" cy="219456"/>
           </a:xfrm>
           <a:prstGeom prst="rect">
             <a:avLst/>
@@ -3758,17 +4736,17 @@
               <a:buNone/>
             </a:pPr>
             <a:r>
-              <a:rPr lang="en-US" sz="1100" b="1" spc="140" kern="0" dirty="0">
-                <a:solidFill>
-                  <a:srgbClr val="FF4A1C"/>
-                </a:solidFill>
-                <a:latin typeface="Pretendard" pitchFamily="34" charset="0"/>
-                <a:ea typeface="Pretendard" pitchFamily="34" charset="-122"/>
-                <a:cs typeface="Pretendard" pitchFamily="34" charset="-120"/>
-              </a:rPr>
-              <a:t>TIMING</a:t>
-            </a:r>
-            <a:endParaRPr lang="en-US" sz="1100" dirty="0"/>
+              <a:rPr lang="en-US" sz="900" spc="120" kern="0" dirty="0">
+                <a:solidFill>
+                  <a:srgbClr val="8A8A8A"/>
+                </a:solidFill>
+                <a:latin typeface="Pretendard" pitchFamily="34" charset="0"/>
+                <a:ea typeface="Pretendard" pitchFamily="34" charset="-122"/>
+                <a:cs typeface="Pretendard" pitchFamily="34" charset="-120"/>
+              </a:rPr>
+              <a:t>포트폴리오제작</a:t>
+            </a:r>
+            <a:endParaRPr lang="en-US" sz="900" dirty="0"/>
           </a:p>
         </p:txBody>
       </p:sp>
@@ -3780,34 +4758,34 @@
         </p:nvSpPr>
         <p:spPr>
           <a:xfrm>
-            <a:off x="640080" y="859536"/>
-            <a:ext cx="10911535" cy="512064"/>
-          </a:xfrm>
-          <a:prstGeom prst="rect">
-            <a:avLst/>
-          </a:prstGeom>
-          <a:noFill/>
-          <a:ln/>
-        </p:spPr>
-        <p:txBody>
-          <a:bodyPr wrap="square" lIns="0" tIns="0" rIns="0" bIns="0" rtlCol="0" anchor="ctr"/>
-          <a:lstStyle/>
-          <a:p>
-            <a:pPr indent="0" marL="0">
-              <a:buNone/>
-            </a:pPr>
-            <a:r>
-              <a:rPr lang="en-US" sz="2800" b="1" dirty="0">
-                <a:solidFill>
-                  <a:srgbClr val="14161B"/>
-                </a:solidFill>
-                <a:latin typeface="Pretendard" pitchFamily="34" charset="0"/>
-                <a:ea typeface="Pretendard" pitchFamily="34" charset="-122"/>
-                <a:cs typeface="Pretendard" pitchFamily="34" charset="-120"/>
-              </a:rPr>
-              <a:t>시간 관리 세 가지</a:t>
-            </a:r>
-            <a:endParaRPr lang="en-US" sz="2800" dirty="0"/>
+            <a:off x="4480560" y="274320"/>
+            <a:ext cx="4572000" cy="219456"/>
+          </a:xfrm>
+          <a:prstGeom prst="rect">
+            <a:avLst/>
+          </a:prstGeom>
+          <a:noFill/>
+          <a:ln/>
+        </p:spPr>
+        <p:txBody>
+          <a:bodyPr wrap="square" lIns="0" tIns="0" rIns="0" bIns="0" rtlCol="0" anchor="ctr"/>
+          <a:lstStyle/>
+          <a:p>
+            <a:pPr algn="ctr" indent="0" marL="0">
+              <a:buNone/>
+            </a:pPr>
+            <a:r>
+              <a:rPr lang="en-US" sz="900" spc="120" kern="0" dirty="0">
+                <a:solidFill>
+                  <a:srgbClr val="8A8A8A"/>
+                </a:solidFill>
+                <a:latin typeface="Pretendard" pitchFamily="34" charset="0"/>
+                <a:ea typeface="Pretendard" pitchFamily="34" charset="-122"/>
+                <a:cs typeface="Pretendard" pitchFamily="34" charset="-120"/>
+              </a:rPr>
+              <a:t>PHASE 3 완성과 발표</a:t>
+            </a:r>
+            <a:endParaRPr lang="en-US" sz="900" dirty="0"/>
           </a:p>
         </p:txBody>
       </p:sp>
@@ -3819,34 +4797,34 @@
         </p:nvSpPr>
         <p:spPr>
           <a:xfrm>
-            <a:off x="640080" y="1371600"/>
-            <a:ext cx="10911535" cy="237744"/>
-          </a:xfrm>
-          <a:prstGeom prst="rect">
-            <a:avLst/>
-          </a:prstGeom>
-          <a:noFill/>
-          <a:ln/>
-        </p:spPr>
-        <p:txBody>
-          <a:bodyPr wrap="square" lIns="0" tIns="0" rIns="0" bIns="0" rtlCol="0" anchor="ctr"/>
-          <a:lstStyle/>
-          <a:p>
-            <a:pPr indent="0" marL="0">
-              <a:buNone/>
-            </a:pPr>
-            <a:r>
-              <a:rPr lang="en-US" sz="1200" dirty="0">
-                <a:solidFill>
-                  <a:srgbClr val="6B7280"/>
-                </a:solidFill>
-                <a:latin typeface="Pretendard" pitchFamily="34" charset="0"/>
-                <a:ea typeface="Pretendard" pitchFamily="34" charset="-122"/>
-                <a:cs typeface="Pretendard" pitchFamily="34" charset="-120"/>
-              </a:rPr>
-              <a:t>3분은 생각보다 짧습니다.</a:t>
-            </a:r>
-            <a:endParaRPr lang="en-US" sz="1200" dirty="0"/>
+            <a:off x="8808415" y="274320"/>
+            <a:ext cx="2743200" cy="219456"/>
+          </a:xfrm>
+          <a:prstGeom prst="rect">
+            <a:avLst/>
+          </a:prstGeom>
+          <a:noFill/>
+          <a:ln/>
+        </p:spPr>
+        <p:txBody>
+          <a:bodyPr wrap="square" lIns="0" tIns="0" rIns="0" bIns="0" rtlCol="0" anchor="ctr"/>
+          <a:lstStyle/>
+          <a:p>
+            <a:pPr algn="r" indent="0" marL="0">
+              <a:buNone/>
+            </a:pPr>
+            <a:r>
+              <a:rPr lang="en-US" sz="900" spc="200" kern="0" dirty="0">
+                <a:solidFill>
+                  <a:srgbClr val="8A8A8A"/>
+                </a:solidFill>
+                <a:latin typeface="Pretendard" pitchFamily="34" charset="0"/>
+                <a:ea typeface="Pretendard" pitchFamily="34" charset="-122"/>
+                <a:cs typeface="Pretendard" pitchFamily="34" charset="-120"/>
+              </a:rPr>
+              <a:t>WEEK 14</a:t>
+            </a:r>
+            <a:endParaRPr lang="en-US" sz="900" dirty="0"/>
           </a:p>
         </p:txBody>
       </p:sp>
@@ -3858,20 +4836,18 @@
         </p:nvSpPr>
         <p:spPr>
           <a:xfrm>
-            <a:off x="640080" y="1737360"/>
-            <a:ext cx="3393338" cy="3035808"/>
-          </a:xfrm>
-          <a:prstGeom prst="roundRect">
-            <a:avLst>
-              <a:gd name="adj" fmla="val 2410"/>
-            </a:avLst>
+            <a:off x="640080" y="548640"/>
+            <a:ext cx="10911535" cy="7315"/>
+          </a:xfrm>
+          <a:prstGeom prst="rect">
+            <a:avLst/>
           </a:prstGeom>
           <a:solidFill>
-            <a:srgbClr val="F4F5F7"/>
+            <a:srgbClr val="DCDCDC"/>
           </a:solidFill>
           <a:ln w="12700">
             <a:solidFill>
-              <a:srgbClr val="E4E6EB"/>
+              <a:srgbClr val="DCDCDC"/>
             </a:solidFill>
             <a:prstDash val="solid"/>
           </a:ln>
@@ -3879,26 +4855,141 @@
       </p:sp>
       <p:sp>
         <p:nvSpPr>
-          <p:cNvPr id="6" name="Shape 4"/>
-          <p:cNvSpPr/>
-          <p:nvPr/>
-        </p:nvSpPr>
-        <p:spPr>
-          <a:xfrm>
-            <a:off x="1024128" y="2011680"/>
-            <a:ext cx="365760" cy="365760"/>
-          </a:xfrm>
-          <a:prstGeom prst="roundRect">
-            <a:avLst>
-              <a:gd name="adj" fmla="val 15000"/>
-            </a:avLst>
+          <p:cNvPr id="6" name="Text 4"/>
+          <p:cNvSpPr/>
+          <p:nvPr/>
+        </p:nvSpPr>
+        <p:spPr>
+          <a:xfrm>
+            <a:off x="640080" y="640080"/>
+            <a:ext cx="10911535" cy="219456"/>
+          </a:xfrm>
+          <a:prstGeom prst="rect">
+            <a:avLst/>
+          </a:prstGeom>
+          <a:noFill/>
+          <a:ln/>
+        </p:spPr>
+        <p:txBody>
+          <a:bodyPr wrap="square" lIns="0" tIns="0" rIns="0" bIns="0" rtlCol="0" anchor="ctr"/>
+          <a:lstStyle/>
+          <a:p>
+            <a:pPr indent="0" marL="0">
+              <a:buNone/>
+            </a:pPr>
+            <a:r>
+              <a:rPr lang="en-US" sz="950" spc="260" kern="0" dirty="0">
+                <a:solidFill>
+                  <a:srgbClr val="8A8A8A"/>
+                </a:solidFill>
+                <a:latin typeface="Pretendard" pitchFamily="34" charset="0"/>
+                <a:ea typeface="Pretendard" pitchFamily="34" charset="-122"/>
+                <a:cs typeface="Pretendard" pitchFamily="34" charset="-120"/>
+              </a:rPr>
+              <a:t>TIMING</a:t>
+            </a:r>
+            <a:endParaRPr lang="en-US" sz="950" dirty="0"/>
+          </a:p>
+        </p:txBody>
+      </p:sp>
+      <p:sp>
+        <p:nvSpPr>
+          <p:cNvPr id="7" name="Text 5"/>
+          <p:cNvSpPr/>
+          <p:nvPr/>
+        </p:nvSpPr>
+        <p:spPr>
+          <a:xfrm>
+            <a:off x="640080" y="859536"/>
+            <a:ext cx="10911535" cy="475488"/>
+          </a:xfrm>
+          <a:prstGeom prst="rect">
+            <a:avLst/>
+          </a:prstGeom>
+          <a:noFill/>
+          <a:ln/>
+        </p:spPr>
+        <p:txBody>
+          <a:bodyPr wrap="square" lIns="0" tIns="0" rIns="0" bIns="0" rtlCol="0" anchor="ctr"/>
+          <a:lstStyle/>
+          <a:p>
+            <a:pPr indent="0" marL="0">
+              <a:buNone/>
+            </a:pPr>
+            <a:r>
+              <a:rPr lang="en-US" sz="3000" dirty="0">
+                <a:solidFill>
+                  <a:srgbClr val="111111"/>
+                </a:solidFill>
+                <a:latin typeface="Pretendard Black" pitchFamily="34" charset="0"/>
+                <a:ea typeface="Pretendard Black" pitchFamily="34" charset="-122"/>
+                <a:cs typeface="Pretendard Black" pitchFamily="34" charset="-120"/>
+              </a:rPr>
+              <a:t>시간 관리 세 가지</a:t>
+            </a:r>
+            <a:endParaRPr lang="en-US" sz="3000" dirty="0"/>
+          </a:p>
+        </p:txBody>
+      </p:sp>
+      <p:sp>
+        <p:nvSpPr>
+          <p:cNvPr id="8" name="Text 6"/>
+          <p:cNvSpPr/>
+          <p:nvPr/>
+        </p:nvSpPr>
+        <p:spPr>
+          <a:xfrm>
+            <a:off x="640080" y="1371600"/>
+            <a:ext cx="10911535" cy="219456"/>
+          </a:xfrm>
+          <a:prstGeom prst="rect">
+            <a:avLst/>
+          </a:prstGeom>
+          <a:noFill/>
+          <a:ln/>
+        </p:spPr>
+        <p:txBody>
+          <a:bodyPr wrap="square" lIns="0" tIns="0" rIns="0" bIns="0" rtlCol="0" anchor="ctr"/>
+          <a:lstStyle/>
+          <a:p>
+            <a:pPr indent="0" marL="0">
+              <a:buNone/>
+            </a:pPr>
+            <a:r>
+              <a:rPr lang="en-US" sz="1150" dirty="0">
+                <a:solidFill>
+                  <a:srgbClr val="6E6E6E"/>
+                </a:solidFill>
+                <a:latin typeface="Pretendard" pitchFamily="34" charset="0"/>
+                <a:ea typeface="Pretendard" pitchFamily="34" charset="-122"/>
+                <a:cs typeface="Pretendard" pitchFamily="34" charset="-120"/>
+              </a:rPr>
+              <a:t>3분은 생각보다 짧습니다.</a:t>
+            </a:r>
+            <a:endParaRPr lang="en-US" sz="1150" dirty="0"/>
+          </a:p>
+        </p:txBody>
+      </p:sp>
+      <p:sp>
+        <p:nvSpPr>
+          <p:cNvPr id="9" name="Shape 7"/>
+          <p:cNvSpPr/>
+          <p:nvPr/>
+        </p:nvSpPr>
+        <p:spPr>
+          <a:xfrm>
+            <a:off x="640080" y="1737360"/>
+            <a:ext cx="3393338" cy="3035808"/>
+          </a:xfrm>
+          <a:prstGeom prst="rect">
+            <a:avLst/>
           </a:prstGeom>
           <a:solidFill>
-            <a:srgbClr val="14161B"/>
+            <a:srgbClr val="FFFFFF"/>
           </a:solidFill>
-          <a:ln w="6350">
+          <a:ln w="12700">
             <a:solidFill>
-              <a:srgbClr val="14161B"/>
+              <a:srgbClr val="DCDCDC"/>
             </a:solidFill>
             <a:prstDash val="solid"/>
           </a:ln>
@@ -3906,7 +4997,7 @@
       </p:sp>
       <p:sp>
         <p:nvSpPr>
-          <p:cNvPr id="7" name="Text 5"/>
+          <p:cNvPr id="10" name="Shape 8"/>
           <p:cNvSpPr/>
           <p:nvPr/>
         </p:nvSpPr>
@@ -3915,6 +5006,31 @@
             <a:off x="1024128" y="2011680"/>
             <a:ext cx="365760" cy="365760"/>
           </a:xfrm>
+          <a:prstGeom prst="ellipse">
+            <a:avLst/>
+          </a:prstGeom>
+          <a:solidFill>
+            <a:srgbClr val="FFFFFF"/>
+          </a:solidFill>
+          <a:ln w="12700">
+            <a:solidFill>
+              <a:srgbClr val="111111"/>
+            </a:solidFill>
+            <a:prstDash val="solid"/>
+          </a:ln>
+        </p:spPr>
+      </p:sp>
+      <p:sp>
+        <p:nvSpPr>
+          <p:cNvPr id="11" name="Text 9"/>
+          <p:cNvSpPr/>
+          <p:nvPr/>
+        </p:nvSpPr>
+        <p:spPr>
+          <a:xfrm>
+            <a:off x="1024128" y="2011680"/>
+            <a:ext cx="365760" cy="365760"/>
+          </a:xfrm>
           <a:prstGeom prst="rect">
             <a:avLst/>
           </a:prstGeom>
@@ -3929,9 +5045,9 @@
               <a:buNone/>
             </a:pPr>
             <a:r>
-              <a:rPr lang="en-US" sz="1200" b="1" dirty="0">
-                <a:solidFill>
-                  <a:srgbClr val="FFFFFF"/>
+              <a:rPr lang="en-US" sz="1150" b="1" dirty="0">
+                <a:solidFill>
+                  <a:srgbClr val="111111"/>
                 </a:solidFill>
                 <a:latin typeface="Pretendard" pitchFamily="34" charset="0"/>
                 <a:ea typeface="Pretendard" pitchFamily="34" charset="-122"/>
@@ -3939,13 +5055,13 @@
               </a:rPr>
               <a:t>01</a:t>
             </a:r>
-            <a:endParaRPr lang="en-US" sz="1200" dirty="0"/>
-          </a:p>
-        </p:txBody>
-      </p:sp>
-      <p:sp>
-        <p:nvSpPr>
-          <p:cNvPr id="8" name="Text 6"/>
+            <a:endParaRPr lang="en-US" sz="1150" dirty="0"/>
+          </a:p>
+        </p:txBody>
+      </p:sp>
+      <p:sp>
+        <p:nvSpPr>
+          <p:cNvPr id="12" name="Text 10"/>
           <p:cNvSpPr/>
           <p:nvPr/>
         </p:nvSpPr>
@@ -3971,13 +5087,13 @@
               <a:buNone/>
             </a:pPr>
             <a:r>
-              <a:rPr lang="en-US" sz="1700" b="1" dirty="0">
-                <a:solidFill>
-                  <a:srgbClr val="14161B"/>
-                </a:solidFill>
-                <a:latin typeface="Pretendard" pitchFamily="34" charset="0"/>
-                <a:ea typeface="Pretendard" pitchFamily="34" charset="-122"/>
-                <a:cs typeface="Pretendard" pitchFamily="34" charset="-120"/>
+              <a:rPr lang="en-US" sz="1700" dirty="0">
+                <a:solidFill>
+                  <a:srgbClr val="111111"/>
+                </a:solidFill>
+                <a:latin typeface="Pretendard Black" pitchFamily="34" charset="0"/>
+                <a:ea typeface="Pretendard Black" pitchFamily="34" charset="-122"/>
+                <a:cs typeface="Pretendard Black" pitchFamily="34" charset="-120"/>
               </a:rPr>
               <a:t>앞부분을 짧게</a:t>
             </a:r>
@@ -3987,7 +5103,7 @@
       </p:sp>
       <p:sp>
         <p:nvSpPr>
-          <p:cNvPr id="9" name="Text 7"/>
+          <p:cNvPr id="13" name="Text 11"/>
           <p:cNvSpPr/>
           <p:nvPr/>
         </p:nvSpPr>
@@ -4015,7 +5131,7 @@
             <a:r>
               <a:rPr lang="en-US" sz="1150" dirty="0">
                 <a:solidFill>
-                  <a:srgbClr val="6B7280"/>
+                  <a:srgbClr val="6E6E6E"/>
                 </a:solidFill>
                 <a:latin typeface="Pretendard" pitchFamily="34" charset="0"/>
                 <a:ea typeface="Pretendard" pitchFamily="34" charset="-122"/>
@@ -4029,7 +5145,7 @@
       </p:sp>
       <p:sp>
         <p:nvSpPr>
-          <p:cNvPr id="10" name="Shape 8"/>
+          <p:cNvPr id="14" name="Shape 12"/>
           <p:cNvSpPr/>
           <p:nvPr/>
         </p:nvSpPr>
@@ -4038,17 +5154,15 @@
             <a:off x="4399178" y="1737360"/>
             <a:ext cx="3393338" cy="3035808"/>
           </a:xfrm>
-          <a:prstGeom prst="roundRect">
-            <a:avLst>
-              <a:gd name="adj" fmla="val 2410"/>
-            </a:avLst>
+          <a:prstGeom prst="rect">
+            <a:avLst/>
           </a:prstGeom>
           <a:solidFill>
-            <a:srgbClr val="F4F5F7"/>
+            <a:srgbClr val="FFFFFF"/>
           </a:solidFill>
           <a:ln w="12700">
             <a:solidFill>
-              <a:srgbClr val="E4E6EB"/>
+              <a:srgbClr val="DCDCDC"/>
             </a:solidFill>
             <a:prstDash val="solid"/>
           </a:ln>
@@ -4056,7 +5170,7 @@
       </p:sp>
       <p:sp>
         <p:nvSpPr>
-          <p:cNvPr id="11" name="Shape 9"/>
+          <p:cNvPr id="15" name="Shape 13"/>
           <p:cNvSpPr/>
           <p:nvPr/>
         </p:nvSpPr>
@@ -4065,17 +5179,15 @@
             <a:off x="4783226" y="2011680"/>
             <a:ext cx="365760" cy="365760"/>
           </a:xfrm>
-          <a:prstGeom prst="roundRect">
-            <a:avLst>
-              <a:gd name="adj" fmla="val 15000"/>
-            </a:avLst>
+          <a:prstGeom prst="ellipse">
+            <a:avLst/>
           </a:prstGeom>
           <a:solidFill>
-            <a:srgbClr val="14161B"/>
+            <a:srgbClr val="FFFFFF"/>
           </a:solidFill>
-          <a:ln w="6350">
+          <a:ln w="12700">
             <a:solidFill>
-              <a:srgbClr val="14161B"/>
+              <a:srgbClr val="111111"/>
             </a:solidFill>
             <a:prstDash val="solid"/>
           </a:ln>
@@ -4083,7 +5195,7 @@
       </p:sp>
       <p:sp>
         <p:nvSpPr>
-          <p:cNvPr id="12" name="Text 10"/>
+          <p:cNvPr id="16" name="Text 14"/>
           <p:cNvSpPr/>
           <p:nvPr/>
         </p:nvSpPr>
@@ -4106,9 +5218,9 @@
               <a:buNone/>
             </a:pPr>
             <a:r>
-              <a:rPr lang="en-US" sz="1200" b="1" dirty="0">
-                <a:solidFill>
-                  <a:srgbClr val="FFFFFF"/>
+              <a:rPr lang="en-US" sz="1150" b="1" dirty="0">
+                <a:solidFill>
+                  <a:srgbClr val="111111"/>
                 </a:solidFill>
                 <a:latin typeface="Pretendard" pitchFamily="34" charset="0"/>
                 <a:ea typeface="Pretendard" pitchFamily="34" charset="-122"/>
@@ -4116,13 +5228,13 @@
               </a:rPr>
               <a:t>02</a:t>
             </a:r>
-            <a:endParaRPr lang="en-US" sz="1200" dirty="0"/>
-          </a:p>
-        </p:txBody>
-      </p:sp>
-      <p:sp>
-        <p:nvSpPr>
-          <p:cNvPr id="13" name="Text 11"/>
+            <a:endParaRPr lang="en-US" sz="1150" dirty="0"/>
+          </a:p>
+        </p:txBody>
+      </p:sp>
+      <p:sp>
+        <p:nvSpPr>
+          <p:cNvPr id="17" name="Text 15"/>
           <p:cNvSpPr/>
           <p:nvPr/>
         </p:nvSpPr>
@@ -4148,13 +5260,13 @@
               <a:buNone/>
             </a:pPr>
             <a:r>
-              <a:rPr lang="en-US" sz="1700" b="1" dirty="0">
-                <a:solidFill>
-                  <a:srgbClr val="14161B"/>
-                </a:solidFill>
-                <a:latin typeface="Pretendard" pitchFamily="34" charset="0"/>
-                <a:ea typeface="Pretendard" pitchFamily="34" charset="-122"/>
-                <a:cs typeface="Pretendard" pitchFamily="34" charset="-120"/>
+              <a:rPr lang="en-US" sz="1700" dirty="0">
+                <a:solidFill>
+                  <a:srgbClr val="111111"/>
+                </a:solidFill>
+                <a:latin typeface="Pretendard Black" pitchFamily="34" charset="0"/>
+                <a:ea typeface="Pretendard Black" pitchFamily="34" charset="-122"/>
+                <a:cs typeface="Pretendard Black" pitchFamily="34" charset="-120"/>
               </a:rPr>
               <a:t>화면 전환을 미리 정한다</a:t>
             </a:r>
@@ -4164,7 +5276,7 @@
       </p:sp>
       <p:sp>
         <p:nvSpPr>
-          <p:cNvPr id="14" name="Text 12"/>
+          <p:cNvPr id="18" name="Text 16"/>
           <p:cNvSpPr/>
           <p:nvPr/>
         </p:nvSpPr>
@@ -4192,7 +5304,7 @@
             <a:r>
               <a:rPr lang="en-US" sz="1150" dirty="0">
                 <a:solidFill>
-                  <a:srgbClr val="6B7280"/>
+                  <a:srgbClr val="6E6E6E"/>
                 </a:solidFill>
                 <a:latin typeface="Pretendard" pitchFamily="34" charset="0"/>
                 <a:ea typeface="Pretendard" pitchFamily="34" charset="-122"/>
@@ -4206,7 +5318,7 @@
       </p:sp>
       <p:sp>
         <p:nvSpPr>
-          <p:cNvPr id="15" name="Shape 13"/>
+          <p:cNvPr id="19" name="Shape 17"/>
           <p:cNvSpPr/>
           <p:nvPr/>
         </p:nvSpPr>
@@ -4215,17 +5327,15 @@
             <a:off x="8158277" y="1737360"/>
             <a:ext cx="3393338" cy="3035808"/>
           </a:xfrm>
-          <a:prstGeom prst="roundRect">
-            <a:avLst>
-              <a:gd name="adj" fmla="val 2410"/>
-            </a:avLst>
+          <a:prstGeom prst="rect">
+            <a:avLst/>
           </a:prstGeom>
           <a:solidFill>
-            <a:srgbClr val="F4F5F7"/>
+            <a:srgbClr val="FFFFFF"/>
           </a:solidFill>
           <a:ln w="12700">
             <a:solidFill>
-              <a:srgbClr val="E4E6EB"/>
+              <a:srgbClr val="DCDCDC"/>
             </a:solidFill>
             <a:prstDash val="solid"/>
           </a:ln>
@@ -4233,7 +5343,7 @@
       </p:sp>
       <p:sp>
         <p:nvSpPr>
-          <p:cNvPr id="16" name="Shape 14"/>
+          <p:cNvPr id="20" name="Shape 18"/>
           <p:cNvSpPr/>
           <p:nvPr/>
         </p:nvSpPr>
@@ -4242,17 +5352,15 @@
             <a:off x="8542325" y="2011680"/>
             <a:ext cx="365760" cy="365760"/>
           </a:xfrm>
-          <a:prstGeom prst="roundRect">
-            <a:avLst>
-              <a:gd name="adj" fmla="val 15000"/>
-            </a:avLst>
+          <a:prstGeom prst="ellipse">
+            <a:avLst/>
           </a:prstGeom>
           <a:solidFill>
-            <a:srgbClr val="14161B"/>
+            <a:srgbClr val="FFFFFF"/>
           </a:solidFill>
-          <a:ln w="6350">
+          <a:ln w="12700">
             <a:solidFill>
-              <a:srgbClr val="14161B"/>
+              <a:srgbClr val="111111"/>
             </a:solidFill>
             <a:prstDash val="solid"/>
           </a:ln>
@@ -4260,7 +5368,7 @@
       </p:sp>
       <p:sp>
         <p:nvSpPr>
-          <p:cNvPr id="17" name="Text 15"/>
+          <p:cNvPr id="21" name="Text 19"/>
           <p:cNvSpPr/>
           <p:nvPr/>
         </p:nvSpPr>
@@ -4283,9 +5391,9 @@
               <a:buNone/>
             </a:pPr>
             <a:r>
-              <a:rPr lang="en-US" sz="1200" b="1" dirty="0">
-                <a:solidFill>
-                  <a:srgbClr val="FFFFFF"/>
+              <a:rPr lang="en-US" sz="1150" b="1" dirty="0">
+                <a:solidFill>
+                  <a:srgbClr val="111111"/>
                 </a:solidFill>
                 <a:latin typeface="Pretendard" pitchFamily="34" charset="0"/>
                 <a:ea typeface="Pretendard" pitchFamily="34" charset="-122"/>
@@ -4293,13 +5401,13 @@
               </a:rPr>
               <a:t>03</a:t>
             </a:r>
-            <a:endParaRPr lang="en-US" sz="1200" dirty="0"/>
-          </a:p>
-        </p:txBody>
-      </p:sp>
-      <p:sp>
-        <p:nvSpPr>
-          <p:cNvPr id="18" name="Text 16"/>
+            <a:endParaRPr lang="en-US" sz="1150" dirty="0"/>
+          </a:p>
+        </p:txBody>
+      </p:sp>
+      <p:sp>
+        <p:nvSpPr>
+          <p:cNvPr id="22" name="Text 20"/>
           <p:cNvSpPr/>
           <p:nvPr/>
         </p:nvSpPr>
@@ -4325,13 +5433,13 @@
               <a:buNone/>
             </a:pPr>
             <a:r>
-              <a:rPr lang="en-US" sz="1700" b="1" dirty="0">
-                <a:solidFill>
-                  <a:srgbClr val="14161B"/>
-                </a:solidFill>
-                <a:latin typeface="Pretendard" pitchFamily="34" charset="0"/>
-                <a:ea typeface="Pretendard" pitchFamily="34" charset="-122"/>
-                <a:cs typeface="Pretendard" pitchFamily="34" charset="-120"/>
+              <a:rPr lang="en-US" sz="1700" dirty="0">
+                <a:solidFill>
+                  <a:srgbClr val="111111"/>
+                </a:solidFill>
+                <a:latin typeface="Pretendard Black" pitchFamily="34" charset="0"/>
+                <a:ea typeface="Pretendard Black" pitchFamily="34" charset="-122"/>
+                <a:cs typeface="Pretendard Black" pitchFamily="34" charset="-120"/>
               </a:rPr>
               <a:t>마지막 20초를 남긴다</a:t>
             </a:r>
@@ -4341,7 +5449,7 @@
       </p:sp>
       <p:sp>
         <p:nvSpPr>
-          <p:cNvPr id="19" name="Text 17"/>
+          <p:cNvPr id="23" name="Text 21"/>
           <p:cNvSpPr/>
           <p:nvPr/>
         </p:nvSpPr>
@@ -4369,7 +5477,7 @@
             <a:r>
               <a:rPr lang="en-US" sz="1150" dirty="0">
                 <a:solidFill>
-                  <a:srgbClr val="6B7280"/>
+                  <a:srgbClr val="6E6E6E"/>
                 </a:solidFill>
                 <a:latin typeface="Pretendard" pitchFamily="34" charset="0"/>
                 <a:ea typeface="Pretendard" pitchFamily="34" charset="-122"/>
@@ -4383,13 +5491,38 @@
       </p:sp>
       <p:sp>
         <p:nvSpPr>
-          <p:cNvPr id="20" name="Text 18"/>
-          <p:cNvSpPr/>
-          <p:nvPr/>
-        </p:nvSpPr>
-        <p:spPr>
-          <a:xfrm>
-            <a:off x="640080" y="5138928"/>
+          <p:cNvPr id="24" name="Shape 22"/>
+          <p:cNvSpPr/>
+          <p:nvPr/>
+        </p:nvSpPr>
+        <p:spPr>
+          <a:xfrm>
+            <a:off x="640080" y="5084064"/>
+            <a:ext cx="10911535" cy="7315"/>
+          </a:xfrm>
+          <a:prstGeom prst="rect">
+            <a:avLst/>
+          </a:prstGeom>
+          <a:solidFill>
+            <a:srgbClr val="111111"/>
+          </a:solidFill>
+          <a:ln w="12700">
+            <a:solidFill>
+              <a:srgbClr val="111111"/>
+            </a:solidFill>
+            <a:prstDash val="solid"/>
+          </a:ln>
+        </p:spPr>
+      </p:sp>
+      <p:sp>
+        <p:nvSpPr>
+          <p:cNvPr id="25" name="Text 23"/>
+          <p:cNvSpPr/>
+          <p:nvPr/>
+        </p:nvSpPr>
+        <p:spPr>
+          <a:xfrm>
+            <a:off x="640080" y="5193792"/>
             <a:ext cx="10911535" cy="438912"/>
           </a:xfrm>
           <a:prstGeom prst="rect">
@@ -4411,7 +5544,7 @@
             <a:r>
               <a:rPr lang="en-US" sz="1300" b="1" dirty="0">
                 <a:solidFill>
-                  <a:srgbClr val="FF4A1C"/>
+                  <a:srgbClr val="111111"/>
                 </a:solidFill>
                 <a:latin typeface="Pretendard" pitchFamily="34" charset="0"/>
                 <a:ea typeface="Pretendard" pitchFamily="34" charset="-122"/>
@@ -4425,14 +5558,39 @@
       </p:sp>
       <p:sp>
         <p:nvSpPr>
-          <p:cNvPr id="21" name="Text 19"/>
-          <p:cNvSpPr/>
-          <p:nvPr/>
-        </p:nvSpPr>
-        <p:spPr>
-          <a:xfrm>
-            <a:off x="640080" y="6345936"/>
-            <a:ext cx="7772400" cy="256032"/>
+          <p:cNvPr id="26" name="Shape 24"/>
+          <p:cNvSpPr/>
+          <p:nvPr/>
+        </p:nvSpPr>
+        <p:spPr>
+          <a:xfrm>
+            <a:off x="640080" y="6291072"/>
+            <a:ext cx="10911535" cy="7315"/>
+          </a:xfrm>
+          <a:prstGeom prst="rect">
+            <a:avLst/>
+          </a:prstGeom>
+          <a:solidFill>
+            <a:srgbClr val="DCDCDC"/>
+          </a:solidFill>
+          <a:ln w="12700">
+            <a:solidFill>
+              <a:srgbClr val="DCDCDC"/>
+            </a:solidFill>
+            <a:prstDash val="solid"/>
+          </a:ln>
+        </p:spPr>
+      </p:sp>
+      <p:sp>
+        <p:nvSpPr>
+          <p:cNvPr id="27" name="Text 25"/>
+          <p:cNvSpPr/>
+          <p:nvPr/>
+        </p:nvSpPr>
+        <p:spPr>
+          <a:xfrm>
+            <a:off x="640080" y="6382512"/>
+            <a:ext cx="7772400" cy="237744"/>
           </a:xfrm>
           <a:prstGeom prst="rect">
             <a:avLst/>
@@ -4448,9 +5606,9 @@
               <a:buNone/>
             </a:pPr>
             <a:r>
-              <a:rPr lang="en-US" sz="900" dirty="0">
-                <a:solidFill>
-                  <a:srgbClr val="9AA0AA"/>
+              <a:rPr lang="en-US" sz="850" spc="40" kern="0" dirty="0">
+                <a:solidFill>
+                  <a:srgbClr val="9B9B9B"/>
                 </a:solidFill>
                 <a:latin typeface="Pretendard" pitchFamily="34" charset="0"/>
                 <a:ea typeface="Pretendard" pitchFamily="34" charset="-122"/>
@@ -4458,20 +5616,20 @@
               </a:rPr>
               <a:t>포트폴리오제작 · 14주차 최종 리허설 및 동료 피드백</a:t>
             </a:r>
-            <a:endParaRPr lang="en-US" sz="900" dirty="0"/>
-          </a:p>
-        </p:txBody>
-      </p:sp>
-      <p:sp>
-        <p:nvSpPr>
-          <p:cNvPr id="22" name="Text 20"/>
-          <p:cNvSpPr/>
-          <p:nvPr/>
-        </p:nvSpPr>
-        <p:spPr>
-          <a:xfrm>
-            <a:off x="10454335" y="6345936"/>
-            <a:ext cx="1097280" cy="256032"/>
+            <a:endParaRPr lang="en-US" sz="850" dirty="0"/>
+          </a:p>
+        </p:txBody>
+      </p:sp>
+      <p:sp>
+        <p:nvSpPr>
+          <p:cNvPr id="28" name="Text 26"/>
+          <p:cNvSpPr/>
+          <p:nvPr/>
+        </p:nvSpPr>
+        <p:spPr>
+          <a:xfrm>
+            <a:off x="10271455" y="6382512"/>
+            <a:ext cx="1280160" cy="237744"/>
           </a:xfrm>
           <a:prstGeom prst="rect">
             <a:avLst/>
@@ -4487,17 +5645,17 @@
               <a:buNone/>
             </a:pPr>
             <a:r>
-              <a:rPr lang="en-US" sz="900" dirty="0">
-                <a:solidFill>
-                  <a:srgbClr val="9AA0AA"/>
-                </a:solidFill>
-                <a:latin typeface="Pretendard" pitchFamily="34" charset="0"/>
-                <a:ea typeface="Pretendard" pitchFamily="34" charset="-122"/>
-                <a:cs typeface="Pretendard" pitchFamily="34" charset="-120"/>
-              </a:rPr>
-              <a:t>03</a:t>
-            </a:r>
-            <a:endParaRPr lang="en-US" sz="900" dirty="0"/>
+              <a:rPr lang="en-US" sz="850" spc="140" kern="0" dirty="0">
+                <a:solidFill>
+                  <a:srgbClr val="9B9B9B"/>
+                </a:solidFill>
+                <a:latin typeface="Pretendard" pitchFamily="34" charset="0"/>
+                <a:ea typeface="Pretendard" pitchFamily="34" charset="-122"/>
+                <a:cs typeface="Pretendard" pitchFamily="34" charset="-120"/>
+              </a:rPr>
+              <a:t>P.03</a:t>
+            </a:r>
+            <a:endParaRPr lang="en-US" sz="850" dirty="0"/>
           </a:p>
         </p:txBody>
       </p:sp>
@@ -4515,7 +5673,7 @@
     <p:bg>
       <p:bgPr>
         <a:solidFill>
-          <a:srgbClr val="14161B"/>
+          <a:srgbClr val="111111"/>
         </a:solidFill>
       </p:bgPr>
     </p:bg>
@@ -4541,8 +5699,86 @@
         </p:nvSpPr>
         <p:spPr>
           <a:xfrm>
-            <a:off x="7711135" y="914400"/>
-            <a:ext cx="3840480" cy="5029200"/>
+            <a:off x="640080" y="274320"/>
+            <a:ext cx="3657600" cy="219456"/>
+          </a:xfrm>
+          <a:prstGeom prst="rect">
+            <a:avLst/>
+          </a:prstGeom>
+          <a:noFill/>
+          <a:ln/>
+        </p:spPr>
+        <p:txBody>
+          <a:bodyPr wrap="square" lIns="0" tIns="0" rIns="0" bIns="0" rtlCol="0" anchor="ctr"/>
+          <a:lstStyle/>
+          <a:p>
+            <a:pPr indent="0" marL="0">
+              <a:buNone/>
+            </a:pPr>
+            <a:r>
+              <a:rPr lang="en-US" sz="900" spc="120" kern="0" dirty="0">
+                <a:solidFill>
+                  <a:srgbClr val="9A9A9A"/>
+                </a:solidFill>
+                <a:latin typeface="Pretendard" pitchFamily="34" charset="0"/>
+                <a:ea typeface="Pretendard" pitchFamily="34" charset="-122"/>
+                <a:cs typeface="Pretendard" pitchFamily="34" charset="-120"/>
+              </a:rPr>
+              <a:t>포트폴리오제작</a:t>
+            </a:r>
+            <a:endParaRPr lang="en-US" sz="900" dirty="0"/>
+          </a:p>
+        </p:txBody>
+      </p:sp>
+      <p:sp>
+        <p:nvSpPr>
+          <p:cNvPr id="3" name="Text 1"/>
+          <p:cNvSpPr/>
+          <p:nvPr/>
+        </p:nvSpPr>
+        <p:spPr>
+          <a:xfrm>
+            <a:off x="4480560" y="274320"/>
+            <a:ext cx="4572000" cy="219456"/>
+          </a:xfrm>
+          <a:prstGeom prst="rect">
+            <a:avLst/>
+          </a:prstGeom>
+          <a:noFill/>
+          <a:ln/>
+        </p:spPr>
+        <p:txBody>
+          <a:bodyPr wrap="square" lIns="0" tIns="0" rIns="0" bIns="0" rtlCol="0" anchor="ctr"/>
+          <a:lstStyle/>
+          <a:p>
+            <a:pPr algn="ctr" indent="0" marL="0">
+              <a:buNone/>
+            </a:pPr>
+            <a:r>
+              <a:rPr lang="en-US" sz="900" spc="120" kern="0" dirty="0">
+                <a:solidFill>
+                  <a:srgbClr val="9A9A9A"/>
+                </a:solidFill>
+                <a:latin typeface="Pretendard" pitchFamily="34" charset="0"/>
+                <a:ea typeface="Pretendard" pitchFamily="34" charset="-122"/>
+                <a:cs typeface="Pretendard" pitchFamily="34" charset="-120"/>
+              </a:rPr>
+              <a:t>PHASE 3 완성과 발표</a:t>
+            </a:r>
+            <a:endParaRPr lang="en-US" sz="900" dirty="0"/>
+          </a:p>
+        </p:txBody>
+      </p:sp>
+      <p:sp>
+        <p:nvSpPr>
+          <p:cNvPr id="4" name="Text 2"/>
+          <p:cNvSpPr/>
+          <p:nvPr/>
+        </p:nvSpPr>
+        <p:spPr>
+          <a:xfrm>
+            <a:off x="8808415" y="274320"/>
+            <a:ext cx="2743200" cy="219456"/>
           </a:xfrm>
           <a:prstGeom prst="rect">
             <a:avLst/>
@@ -4558,30 +5794,163 @@
               <a:buNone/>
             </a:pPr>
             <a:r>
-              <a:rPr lang="en-US" sz="25500" dirty="0">
-                <a:solidFill>
-                  <a:srgbClr val="262A33"/>
-                </a:solidFill>
-                <a:latin typeface="Pretendard Thin" pitchFamily="34" charset="0"/>
-                <a:ea typeface="Pretendard Thin" pitchFamily="34" charset="-122"/>
-                <a:cs typeface="Pretendard Thin" pitchFamily="34" charset="-120"/>
+              <a:rPr lang="en-US" sz="900" spc="200" kern="0" dirty="0">
+                <a:solidFill>
+                  <a:srgbClr val="9A9A9A"/>
+                </a:solidFill>
+                <a:latin typeface="Pretendard" pitchFamily="34" charset="0"/>
+                <a:ea typeface="Pretendard" pitchFamily="34" charset="-122"/>
+                <a:cs typeface="Pretendard" pitchFamily="34" charset="-120"/>
+              </a:rPr>
+              <a:t>WEEK 14</a:t>
+            </a:r>
+            <a:endParaRPr lang="en-US" sz="900" dirty="0"/>
+          </a:p>
+        </p:txBody>
+      </p:sp>
+      <p:sp>
+        <p:nvSpPr>
+          <p:cNvPr id="5" name="Shape 3"/>
+          <p:cNvSpPr/>
+          <p:nvPr/>
+        </p:nvSpPr>
+        <p:spPr>
+          <a:xfrm>
+            <a:off x="640080" y="548640"/>
+            <a:ext cx="10911535" cy="7315"/>
+          </a:xfrm>
+          <a:prstGeom prst="rect">
+            <a:avLst/>
+          </a:prstGeom>
+          <a:solidFill>
+            <a:srgbClr val="333333"/>
+          </a:solidFill>
+          <a:ln w="12700">
+            <a:solidFill>
+              <a:srgbClr val="333333"/>
+            </a:solidFill>
+            <a:prstDash val="solid"/>
+          </a:ln>
+        </p:spPr>
+      </p:sp>
+      <p:sp>
+        <p:nvSpPr>
+          <p:cNvPr id="6" name="Text 4"/>
+          <p:cNvSpPr/>
+          <p:nvPr/>
+        </p:nvSpPr>
+        <p:spPr>
+          <a:xfrm>
+            <a:off x="7345375" y="1737360"/>
+            <a:ext cx="4206240" cy="3291840"/>
+          </a:xfrm>
+          <a:prstGeom prst="rect">
+            <a:avLst/>
+          </a:prstGeom>
+          <a:noFill/>
+          <a:ln/>
+        </p:spPr>
+        <p:txBody>
+          <a:bodyPr wrap="square" lIns="0" tIns="0" rIns="0" bIns="0" rtlCol="0" anchor="ctr"/>
+          <a:lstStyle/>
+          <a:p>
+            <a:pPr algn="r" indent="0" marL="0">
+              <a:buNone/>
+            </a:pPr>
+            <a:r>
+              <a:rPr lang="en-US" sz="20000" dirty="0">
+                <a:solidFill>
+                  <a:srgbClr val="1B1B1B"/>
+                </a:solidFill>
+                <a:latin typeface="Pretendard Black" pitchFamily="34" charset="0"/>
+                <a:ea typeface="Pretendard Black" pitchFamily="34" charset="-122"/>
+                <a:cs typeface="Pretendard Black" pitchFamily="34" charset="-120"/>
               </a:rPr>
               <a:t>02</a:t>
             </a:r>
-            <a:endParaRPr lang="en-US" sz="25500" dirty="0"/>
-          </a:p>
-        </p:txBody>
-      </p:sp>
-      <p:sp>
-        <p:nvSpPr>
-          <p:cNvPr id="3" name="Text 1"/>
-          <p:cNvSpPr/>
-          <p:nvPr/>
-        </p:nvSpPr>
-        <p:spPr>
-          <a:xfrm>
-            <a:off x="640080" y="2487168"/>
-            <a:ext cx="7315200" cy="274320"/>
+            <a:endParaRPr lang="en-US" sz="20000" dirty="0"/>
+          </a:p>
+        </p:txBody>
+      </p:sp>
+      <p:sp>
+        <p:nvSpPr>
+          <p:cNvPr id="7" name="Shape 5"/>
+          <p:cNvSpPr/>
+          <p:nvPr/>
+        </p:nvSpPr>
+        <p:spPr>
+          <a:xfrm>
+            <a:off x="941832" y="1371600"/>
+            <a:ext cx="0" cy="603504"/>
+          </a:xfrm>
+          <a:prstGeom prst="line">
+            <a:avLst/>
+          </a:prstGeom>
+          <a:noFill/>
+          <a:ln w="15875">
+            <a:solidFill>
+              <a:srgbClr val="FFFFFF"/>
+            </a:solidFill>
+            <a:prstDash val="solid"/>
+          </a:ln>
+        </p:spPr>
+      </p:sp>
+      <p:sp>
+        <p:nvSpPr>
+          <p:cNvPr id="8" name="Shape 6"/>
+          <p:cNvSpPr/>
+          <p:nvPr/>
+        </p:nvSpPr>
+        <p:spPr>
+          <a:xfrm>
+            <a:off x="640080" y="1733702"/>
+            <a:ext cx="301752" cy="241402"/>
+          </a:xfrm>
+          <a:prstGeom prst="line">
+            <a:avLst/>
+          </a:prstGeom>
+          <a:noFill/>
+          <a:ln w="15875">
+            <a:solidFill>
+              <a:srgbClr val="FFFFFF"/>
+            </a:solidFill>
+            <a:prstDash val="solid"/>
+          </a:ln>
+        </p:spPr>
+      </p:sp>
+      <p:sp>
+        <p:nvSpPr>
+          <p:cNvPr id="9" name="Shape 7"/>
+          <p:cNvSpPr/>
+          <p:nvPr/>
+        </p:nvSpPr>
+        <p:spPr>
+          <a:xfrm flipV="1">
+            <a:off x="941832" y="1733702"/>
+            <a:ext cx="301752" cy="241402"/>
+          </a:xfrm>
+          <a:prstGeom prst="line">
+            <a:avLst/>
+          </a:prstGeom>
+          <a:noFill/>
+          <a:ln w="15875">
+            <a:solidFill>
+              <a:srgbClr val="FFFFFF"/>
+            </a:solidFill>
+            <a:prstDash val="solid"/>
+          </a:ln>
+        </p:spPr>
+      </p:sp>
+      <p:sp>
+        <p:nvSpPr>
+          <p:cNvPr id="10" name="Text 8"/>
+          <p:cNvSpPr/>
+          <p:nvPr/>
+        </p:nvSpPr>
+        <p:spPr>
+          <a:xfrm>
+            <a:off x="640080" y="2615184"/>
+            <a:ext cx="7863840" cy="256032"/>
           </a:xfrm>
           <a:prstGeom prst="rect">
             <a:avLst/>
@@ -4597,9 +5966,9 @@
               <a:buNone/>
             </a:pPr>
             <a:r>
-              <a:rPr lang="en-US" sz="1100" b="1" spc="200" kern="0" dirty="0">
-                <a:solidFill>
-                  <a:srgbClr val="FF4A1C"/>
+              <a:rPr lang="en-US" sz="950" spc="280" kern="0" dirty="0">
+                <a:solidFill>
+                  <a:srgbClr val="9A9A9A"/>
                 </a:solidFill>
                 <a:latin typeface="Pretendard" pitchFamily="34" charset="0"/>
                 <a:ea typeface="Pretendard" pitchFamily="34" charset="-122"/>
@@ -4607,20 +5976,20 @@
               </a:rPr>
               <a:t>PART 02</a:t>
             </a:r>
-            <a:endParaRPr lang="en-US" sz="1100" dirty="0"/>
-          </a:p>
-        </p:txBody>
-      </p:sp>
-      <p:sp>
-        <p:nvSpPr>
-          <p:cNvPr id="4" name="Text 2"/>
-          <p:cNvSpPr/>
-          <p:nvPr/>
-        </p:nvSpPr>
-        <p:spPr>
-          <a:xfrm>
-            <a:off x="640080" y="2834640"/>
-            <a:ext cx="7315200" cy="731520"/>
+            <a:endParaRPr lang="en-US" sz="950" dirty="0"/>
+          </a:p>
+        </p:txBody>
+      </p:sp>
+      <p:sp>
+        <p:nvSpPr>
+          <p:cNvPr id="11" name="Text 9"/>
+          <p:cNvSpPr/>
+          <p:nvPr/>
+        </p:nvSpPr>
+        <p:spPr>
+          <a:xfrm>
+            <a:off x="640080" y="2889504"/>
+            <a:ext cx="7863840" cy="786384"/>
           </a:xfrm>
           <a:prstGeom prst="rect">
             <a:avLst/>
@@ -4636,30 +6005,55 @@
               <a:buNone/>
             </a:pPr>
             <a:r>
-              <a:rPr lang="en-US" sz="4200" b="1" dirty="0">
+              <a:rPr lang="en-US" sz="4600" dirty="0">
                 <a:solidFill>
                   <a:srgbClr val="FFFFFF"/>
                 </a:solidFill>
-                <a:latin typeface="Pretendard" pitchFamily="34" charset="0"/>
-                <a:ea typeface="Pretendard" pitchFamily="34" charset="-122"/>
-                <a:cs typeface="Pretendard" pitchFamily="34" charset="-120"/>
+                <a:latin typeface="Pretendard Black" pitchFamily="34" charset="0"/>
+                <a:ea typeface="Pretendard Black" pitchFamily="34" charset="-122"/>
+                <a:cs typeface="Pretendard Black" pitchFamily="34" charset="-120"/>
               </a:rPr>
               <a:t>동료 평가</a:t>
             </a:r>
-            <a:endParaRPr lang="en-US" sz="4200" dirty="0"/>
-          </a:p>
-        </p:txBody>
-      </p:sp>
-      <p:sp>
-        <p:nvSpPr>
-          <p:cNvPr id="5" name="Text 3"/>
-          <p:cNvSpPr/>
-          <p:nvPr/>
-        </p:nvSpPr>
-        <p:spPr>
-          <a:xfrm>
-            <a:off x="640080" y="3657600"/>
-            <a:ext cx="6766560" cy="640080"/>
+            <a:endParaRPr lang="en-US" sz="4600" dirty="0"/>
+          </a:p>
+        </p:txBody>
+      </p:sp>
+      <p:sp>
+        <p:nvSpPr>
+          <p:cNvPr id="12" name="Shape 10"/>
+          <p:cNvSpPr/>
+          <p:nvPr/>
+        </p:nvSpPr>
+        <p:spPr>
+          <a:xfrm>
+            <a:off x="640080" y="3803904"/>
+            <a:ext cx="2194560" cy="7315"/>
+          </a:xfrm>
+          <a:prstGeom prst="rect">
+            <a:avLst/>
+          </a:prstGeom>
+          <a:solidFill>
+            <a:srgbClr val="FFFFFF"/>
+          </a:solidFill>
+          <a:ln w="12700">
+            <a:solidFill>
+              <a:srgbClr val="FFFFFF"/>
+            </a:solidFill>
+            <a:prstDash val="solid"/>
+          </a:ln>
+        </p:spPr>
+      </p:sp>
+      <p:sp>
+        <p:nvSpPr>
+          <p:cNvPr id="13" name="Text 11"/>
+          <p:cNvSpPr/>
+          <p:nvPr/>
+        </p:nvSpPr>
+        <p:spPr>
+          <a:xfrm>
+            <a:off x="640080" y="4005072"/>
+            <a:ext cx="6949440" cy="731520"/>
           </a:xfrm>
           <a:prstGeom prst="rect">
             <a:avLst/>
@@ -4673,22 +6067,61 @@
           <a:p>
             <a:pPr indent="0" marL="0">
               <a:lnSpc>
-                <a:spcPct val="130000"/>
+                <a:spcPct val="134000"/>
               </a:lnSpc>
               <a:buNone/>
             </a:pPr>
             <a:r>
               <a:rPr lang="en-US" sz="1350" dirty="0">
                 <a:solidFill>
-                  <a:srgbClr val="AEB4BF"/>
-                </a:solidFill>
-                <a:latin typeface="Pretendard" pitchFamily="34" charset="0"/>
-                <a:ea typeface="Pretendard" pitchFamily="34" charset="-122"/>
-                <a:cs typeface="Pretendard" pitchFamily="34" charset="-120"/>
+                  <a:srgbClr val="B8B8B8"/>
+                </a:solidFill>
+                <a:latin typeface="Pretendard Light" pitchFamily="34" charset="0"/>
+                <a:ea typeface="Pretendard Light" pitchFamily="34" charset="-122"/>
+                <a:cs typeface="Pretendard Light" pitchFamily="34" charset="-120"/>
               </a:rPr>
               <a:t>취향이 아니라 체크리스트로 봅니다.</a:t>
             </a:r>
             <a:endParaRPr lang="en-US" sz="1350" dirty="0"/>
+          </a:p>
+        </p:txBody>
+      </p:sp>
+      <p:sp>
+        <p:nvSpPr>
+          <p:cNvPr id="14" name="Text 12"/>
+          <p:cNvSpPr/>
+          <p:nvPr/>
+        </p:nvSpPr>
+        <p:spPr>
+          <a:xfrm rot="16200000">
+            <a:off x="10436047" y="3291840"/>
+            <a:ext cx="2743200" cy="274320"/>
+          </a:xfrm>
+          <a:prstGeom prst="rect">
+            <a:avLst/>
+          </a:prstGeom>
+          <a:noFill/>
+          <a:ln/>
+        </p:spPr>
+        <p:txBody>
+          <a:bodyPr wrap="square" lIns="0" tIns="0" rIns="0" bIns="0" rtlCol="0" anchor="ctr"/>
+          <a:lstStyle/>
+          <a:p>
+            <a:pPr algn="ctr" indent="0" marL="0">
+              <a:buNone/>
+            </a:pPr>
+            <a:r>
+              <a:rPr lang="en-US" sz="850" spc="260" kern="0" dirty="0">
+                <a:solidFill>
+                  <a:srgbClr val="7A7A7A"/>
+                </a:solidFill>
+                <a:latin typeface="Pretendard" pitchFamily="34" charset="0"/>
+                <a:ea typeface="Pretendard" pitchFamily="34" charset="-122"/>
+                <a:cs typeface="Pretendard" pitchFamily="34" charset="-120"/>
+              </a:rPr>
+              <a:t>SECTION 02</a:t>
+            </a:r>
+            <a:endParaRPr lang="en-US" sz="850" dirty="0"/>
           </a:p>
         </p:txBody>
       </p:sp>
@@ -4732,8 +6165,8 @@
         </p:nvSpPr>
         <p:spPr>
           <a:xfrm>
-            <a:off x="640080" y="566928"/>
-            <a:ext cx="10911535" cy="237744"/>
+            <a:off x="640080" y="274320"/>
+            <a:ext cx="3657600" cy="219456"/>
           </a:xfrm>
           <a:prstGeom prst="rect">
             <a:avLst/>
@@ -4749,17 +6182,17 @@
               <a:buNone/>
             </a:pPr>
             <a:r>
-              <a:rPr lang="en-US" sz="1100" b="1" spc="140" kern="0" dirty="0">
-                <a:solidFill>
-                  <a:srgbClr val="FF4A1C"/>
-                </a:solidFill>
-                <a:latin typeface="Pretendard" pitchFamily="34" charset="0"/>
-                <a:ea typeface="Pretendard" pitchFamily="34" charset="-122"/>
-                <a:cs typeface="Pretendard" pitchFamily="34" charset="-120"/>
-              </a:rPr>
-              <a:t>PEER</a:t>
-            </a:r>
-            <a:endParaRPr lang="en-US" sz="1100" dirty="0"/>
+              <a:rPr lang="en-US" sz="900" spc="120" kern="0" dirty="0">
+                <a:solidFill>
+                  <a:srgbClr val="8A8A8A"/>
+                </a:solidFill>
+                <a:latin typeface="Pretendard" pitchFamily="34" charset="0"/>
+                <a:ea typeface="Pretendard" pitchFamily="34" charset="-122"/>
+                <a:cs typeface="Pretendard" pitchFamily="34" charset="-120"/>
+              </a:rPr>
+              <a:t>포트폴리오제작</a:t>
+            </a:r>
+            <a:endParaRPr lang="en-US" sz="900" dirty="0"/>
           </a:p>
         </p:txBody>
       </p:sp>
@@ -4771,34 +6204,34 @@
         </p:nvSpPr>
         <p:spPr>
           <a:xfrm>
-            <a:off x="640080" y="859536"/>
-            <a:ext cx="10911535" cy="512064"/>
-          </a:xfrm>
-          <a:prstGeom prst="rect">
-            <a:avLst/>
-          </a:prstGeom>
-          <a:noFill/>
-          <a:ln/>
-        </p:spPr>
-        <p:txBody>
-          <a:bodyPr wrap="square" lIns="0" tIns="0" rIns="0" bIns="0" rtlCol="0" anchor="ctr"/>
-          <a:lstStyle/>
-          <a:p>
-            <a:pPr indent="0" marL="0">
-              <a:buNone/>
-            </a:pPr>
-            <a:r>
-              <a:rPr lang="en-US" sz="2800" b="1" dirty="0">
-                <a:solidFill>
-                  <a:srgbClr val="14161B"/>
-                </a:solidFill>
-                <a:latin typeface="Pretendard" pitchFamily="34" charset="0"/>
-                <a:ea typeface="Pretendard" pitchFamily="34" charset="-122"/>
-                <a:cs typeface="Pretendard" pitchFamily="34" charset="-120"/>
-              </a:rPr>
-              <a:t>동료 피드백 체크리스트</a:t>
-            </a:r>
-            <a:endParaRPr lang="en-US" sz="2800" dirty="0"/>
+            <a:off x="4480560" y="274320"/>
+            <a:ext cx="4572000" cy="219456"/>
+          </a:xfrm>
+          <a:prstGeom prst="rect">
+            <a:avLst/>
+          </a:prstGeom>
+          <a:noFill/>
+          <a:ln/>
+        </p:spPr>
+        <p:txBody>
+          <a:bodyPr wrap="square" lIns="0" tIns="0" rIns="0" bIns="0" rtlCol="0" anchor="ctr"/>
+          <a:lstStyle/>
+          <a:p>
+            <a:pPr algn="ctr" indent="0" marL="0">
+              <a:buNone/>
+            </a:pPr>
+            <a:r>
+              <a:rPr lang="en-US" sz="900" spc="120" kern="0" dirty="0">
+                <a:solidFill>
+                  <a:srgbClr val="8A8A8A"/>
+                </a:solidFill>
+                <a:latin typeface="Pretendard" pitchFamily="34" charset="0"/>
+                <a:ea typeface="Pretendard" pitchFamily="34" charset="-122"/>
+                <a:cs typeface="Pretendard" pitchFamily="34" charset="-120"/>
+              </a:rPr>
+              <a:t>PHASE 3 완성과 발표</a:t>
+            </a:r>
+            <a:endParaRPr lang="en-US" sz="900" dirty="0"/>
           </a:p>
         </p:txBody>
       </p:sp>
@@ -4810,34 +6243,34 @@
         </p:nvSpPr>
         <p:spPr>
           <a:xfrm>
-            <a:off x="640080" y="1371600"/>
-            <a:ext cx="10911535" cy="237744"/>
-          </a:xfrm>
-          <a:prstGeom prst="rect">
-            <a:avLst/>
-          </a:prstGeom>
-          <a:noFill/>
-          <a:ln/>
-        </p:spPr>
-        <p:txBody>
-          <a:bodyPr wrap="square" lIns="0" tIns="0" rIns="0" bIns="0" rtlCol="0" anchor="ctr"/>
-          <a:lstStyle/>
-          <a:p>
-            <a:pPr indent="0" marL="0">
-              <a:buNone/>
-            </a:pPr>
-            <a:r>
-              <a:rPr lang="en-US" sz="1200" dirty="0">
-                <a:solidFill>
-                  <a:srgbClr val="6B7280"/>
-                </a:solidFill>
-                <a:latin typeface="Pretendard" pitchFamily="34" charset="0"/>
-                <a:ea typeface="Pretendard" pitchFamily="34" charset="-122"/>
-                <a:cs typeface="Pretendard" pitchFamily="34" charset="-120"/>
-              </a:rPr>
-              <a:t>발표를 들으며 이 항목으로 표시하고, 끝나면 두 가지만 말해줍니다.</a:t>
-            </a:r>
-            <a:endParaRPr lang="en-US" sz="1200" dirty="0"/>
+            <a:off x="8808415" y="274320"/>
+            <a:ext cx="2743200" cy="219456"/>
+          </a:xfrm>
+          <a:prstGeom prst="rect">
+            <a:avLst/>
+          </a:prstGeom>
+          <a:noFill/>
+          <a:ln/>
+        </p:spPr>
+        <p:txBody>
+          <a:bodyPr wrap="square" lIns="0" tIns="0" rIns="0" bIns="0" rtlCol="0" anchor="ctr"/>
+          <a:lstStyle/>
+          <a:p>
+            <a:pPr algn="r" indent="0" marL="0">
+              <a:buNone/>
+            </a:pPr>
+            <a:r>
+              <a:rPr lang="en-US" sz="900" spc="200" kern="0" dirty="0">
+                <a:solidFill>
+                  <a:srgbClr val="8A8A8A"/>
+                </a:solidFill>
+                <a:latin typeface="Pretendard" pitchFamily="34" charset="0"/>
+                <a:ea typeface="Pretendard" pitchFamily="34" charset="-122"/>
+                <a:cs typeface="Pretendard" pitchFamily="34" charset="-120"/>
+              </a:rPr>
+              <a:t>WEEK 14</a:t>
+            </a:r>
+            <a:endParaRPr lang="en-US" sz="900" dirty="0"/>
           </a:p>
         </p:txBody>
       </p:sp>
@@ -4849,20 +6282,18 @@
         </p:nvSpPr>
         <p:spPr>
           <a:xfrm>
-            <a:off x="640080" y="1755648"/>
-            <a:ext cx="5254600" cy="585216"/>
-          </a:xfrm>
-          <a:prstGeom prst="roundRect">
-            <a:avLst>
-              <a:gd name="adj" fmla="val 12500"/>
-            </a:avLst>
+            <a:off x="640080" y="548640"/>
+            <a:ext cx="10911535" cy="7315"/>
+          </a:xfrm>
+          <a:prstGeom prst="rect">
+            <a:avLst/>
           </a:prstGeom>
           <a:solidFill>
-            <a:srgbClr val="F4F5F7"/>
+            <a:srgbClr val="DCDCDC"/>
           </a:solidFill>
           <a:ln w="12700">
             <a:solidFill>
-              <a:srgbClr val="F4F5F7"/>
+              <a:srgbClr val="DCDCDC"/>
             </a:solidFill>
             <a:prstDash val="solid"/>
           </a:ln>
@@ -4870,26 +6301,141 @@
       </p:sp>
       <p:sp>
         <p:nvSpPr>
-          <p:cNvPr id="6" name="Shape 4"/>
-          <p:cNvSpPr/>
-          <p:nvPr/>
-        </p:nvSpPr>
-        <p:spPr>
-          <a:xfrm>
-            <a:off x="914400" y="1892808"/>
-            <a:ext cx="310896" cy="310896"/>
-          </a:xfrm>
-          <a:prstGeom prst="roundRect">
-            <a:avLst>
-              <a:gd name="adj" fmla="val 17647"/>
-            </a:avLst>
+          <p:cNvPr id="6" name="Text 4"/>
+          <p:cNvSpPr/>
+          <p:nvPr/>
+        </p:nvSpPr>
+        <p:spPr>
+          <a:xfrm>
+            <a:off x="640080" y="640080"/>
+            <a:ext cx="10911535" cy="219456"/>
+          </a:xfrm>
+          <a:prstGeom prst="rect">
+            <a:avLst/>
+          </a:prstGeom>
+          <a:noFill/>
+          <a:ln/>
+        </p:spPr>
+        <p:txBody>
+          <a:bodyPr wrap="square" lIns="0" tIns="0" rIns="0" bIns="0" rtlCol="0" anchor="ctr"/>
+          <a:lstStyle/>
+          <a:p>
+            <a:pPr indent="0" marL="0">
+              <a:buNone/>
+            </a:pPr>
+            <a:r>
+              <a:rPr lang="en-US" sz="950" spc="260" kern="0" dirty="0">
+                <a:solidFill>
+                  <a:srgbClr val="8A8A8A"/>
+                </a:solidFill>
+                <a:latin typeface="Pretendard" pitchFamily="34" charset="0"/>
+                <a:ea typeface="Pretendard" pitchFamily="34" charset="-122"/>
+                <a:cs typeface="Pretendard" pitchFamily="34" charset="-120"/>
+              </a:rPr>
+              <a:t>PEER</a:t>
+            </a:r>
+            <a:endParaRPr lang="en-US" sz="950" dirty="0"/>
+          </a:p>
+        </p:txBody>
+      </p:sp>
+      <p:sp>
+        <p:nvSpPr>
+          <p:cNvPr id="7" name="Text 5"/>
+          <p:cNvSpPr/>
+          <p:nvPr/>
+        </p:nvSpPr>
+        <p:spPr>
+          <a:xfrm>
+            <a:off x="640080" y="859536"/>
+            <a:ext cx="10911535" cy="475488"/>
+          </a:xfrm>
+          <a:prstGeom prst="rect">
+            <a:avLst/>
+          </a:prstGeom>
+          <a:noFill/>
+          <a:ln/>
+        </p:spPr>
+        <p:txBody>
+          <a:bodyPr wrap="square" lIns="0" tIns="0" rIns="0" bIns="0" rtlCol="0" anchor="ctr"/>
+          <a:lstStyle/>
+          <a:p>
+            <a:pPr indent="0" marL="0">
+              <a:buNone/>
+            </a:pPr>
+            <a:r>
+              <a:rPr lang="en-US" sz="3000" dirty="0">
+                <a:solidFill>
+                  <a:srgbClr val="111111"/>
+                </a:solidFill>
+                <a:latin typeface="Pretendard Black" pitchFamily="34" charset="0"/>
+                <a:ea typeface="Pretendard Black" pitchFamily="34" charset="-122"/>
+                <a:cs typeface="Pretendard Black" pitchFamily="34" charset="-120"/>
+              </a:rPr>
+              <a:t>동료 피드백 체크리스트</a:t>
+            </a:r>
+            <a:endParaRPr lang="en-US" sz="3000" dirty="0"/>
+          </a:p>
+        </p:txBody>
+      </p:sp>
+      <p:sp>
+        <p:nvSpPr>
+          <p:cNvPr id="8" name="Text 6"/>
+          <p:cNvSpPr/>
+          <p:nvPr/>
+        </p:nvSpPr>
+        <p:spPr>
+          <a:xfrm>
+            <a:off x="640080" y="1371600"/>
+            <a:ext cx="10911535" cy="219456"/>
+          </a:xfrm>
+          <a:prstGeom prst="rect">
+            <a:avLst/>
+          </a:prstGeom>
+          <a:noFill/>
+          <a:ln/>
+        </p:spPr>
+        <p:txBody>
+          <a:bodyPr wrap="square" lIns="0" tIns="0" rIns="0" bIns="0" rtlCol="0" anchor="ctr"/>
+          <a:lstStyle/>
+          <a:p>
+            <a:pPr indent="0" marL="0">
+              <a:buNone/>
+            </a:pPr>
+            <a:r>
+              <a:rPr lang="en-US" sz="1150" dirty="0">
+                <a:solidFill>
+                  <a:srgbClr val="6E6E6E"/>
+                </a:solidFill>
+                <a:latin typeface="Pretendard" pitchFamily="34" charset="0"/>
+                <a:ea typeface="Pretendard" pitchFamily="34" charset="-122"/>
+                <a:cs typeface="Pretendard" pitchFamily="34" charset="-120"/>
+              </a:rPr>
+              <a:t>발표를 들으며 이 항목으로 표시하고, 끝나면 두 가지만 말해줍니다.</a:t>
+            </a:r>
+            <a:endParaRPr lang="en-US" sz="1150" dirty="0"/>
+          </a:p>
+        </p:txBody>
+      </p:sp>
+      <p:sp>
+        <p:nvSpPr>
+          <p:cNvPr id="9" name="Shape 7"/>
+          <p:cNvSpPr/>
+          <p:nvPr/>
+        </p:nvSpPr>
+        <p:spPr>
+          <a:xfrm>
+            <a:off x="640080" y="1755648"/>
+            <a:ext cx="5254600" cy="585216"/>
+          </a:xfrm>
+          <a:prstGeom prst="rect">
+            <a:avLst/>
           </a:prstGeom>
           <a:solidFill>
-            <a:srgbClr val="FF4A1C"/>
+            <a:srgbClr val="F2F2F2"/>
           </a:solidFill>
-          <a:ln w="6350">
+          <a:ln w="12700">
             <a:solidFill>
-              <a:srgbClr val="FF4A1C"/>
+              <a:srgbClr val="F2F2F2"/>
             </a:solidFill>
             <a:prstDash val="solid"/>
           </a:ln>
@@ -4897,7 +6443,7 @@
       </p:sp>
       <p:sp>
         <p:nvSpPr>
-          <p:cNvPr id="7" name="Text 5"/>
+          <p:cNvPr id="10" name="Shape 8"/>
           <p:cNvSpPr/>
           <p:nvPr/>
         </p:nvSpPr>
@@ -4906,95 +6452,15 @@
             <a:off x="914400" y="1892808"/>
             <a:ext cx="310896" cy="310896"/>
           </a:xfrm>
-          <a:prstGeom prst="rect">
-            <a:avLst/>
-          </a:prstGeom>
-          <a:noFill/>
-          <a:ln/>
-        </p:spPr>
-        <p:txBody>
-          <a:bodyPr wrap="square" lIns="0" tIns="0" rIns="0" bIns="0" rtlCol="0" anchor="ctr"/>
-          <a:lstStyle/>
-          <a:p>
-            <a:pPr algn="ctr" indent="0" marL="0">
-              <a:buNone/>
-            </a:pPr>
-            <a:r>
-              <a:rPr lang="en-US" sz="1000" b="1" dirty="0">
-                <a:solidFill>
-                  <a:srgbClr val="FFFFFF"/>
-                </a:solidFill>
-                <a:latin typeface="Pretendard" pitchFamily="34" charset="0"/>
-                <a:ea typeface="Pretendard" pitchFamily="34" charset="-122"/>
-                <a:cs typeface="Pretendard" pitchFamily="34" charset="-120"/>
-              </a:rPr>
-              <a:t>01</a:t>
-            </a:r>
-            <a:endParaRPr lang="en-US" sz="1000" dirty="0"/>
-          </a:p>
-        </p:txBody>
-      </p:sp>
-      <p:sp>
-        <p:nvSpPr>
-          <p:cNvPr id="8" name="Text 6"/>
-          <p:cNvSpPr/>
-          <p:nvPr/>
-        </p:nvSpPr>
-        <p:spPr>
-          <a:xfrm>
-            <a:off x="1353312" y="1755648"/>
-            <a:ext cx="4248760" cy="585216"/>
-          </a:xfrm>
-          <a:prstGeom prst="rect">
-            <a:avLst/>
-          </a:prstGeom>
-          <a:noFill/>
-          <a:ln/>
-        </p:spPr>
-        <p:txBody>
-          <a:bodyPr wrap="square" lIns="0" tIns="0" rIns="0" bIns="0" rtlCol="0" anchor="ctr"/>
-          <a:lstStyle/>
-          <a:p>
-            <a:pPr indent="0" marL="0">
-              <a:buNone/>
-            </a:pPr>
-            <a:r>
-              <a:rPr lang="en-US" sz="1200" dirty="0">
-                <a:solidFill>
-                  <a:srgbClr val="14161B"/>
-                </a:solidFill>
-                <a:latin typeface="Pretendard" pitchFamily="34" charset="0"/>
-                <a:ea typeface="Pretendard" pitchFamily="34" charset="-122"/>
-                <a:cs typeface="Pretendard" pitchFamily="34" charset="-120"/>
-              </a:rPr>
-              <a:t>무엇을 하는 사람인지 20초 안에 알았다</a:t>
-            </a:r>
-            <a:endParaRPr lang="en-US" sz="1200" dirty="0"/>
-          </a:p>
-        </p:txBody>
-      </p:sp>
-      <p:sp>
-        <p:nvSpPr>
-          <p:cNvPr id="9" name="Shape 7"/>
-          <p:cNvSpPr/>
-          <p:nvPr/>
-        </p:nvSpPr>
-        <p:spPr>
-          <a:xfrm>
-            <a:off x="640080" y="2487168"/>
-            <a:ext cx="5254600" cy="585216"/>
-          </a:xfrm>
-          <a:prstGeom prst="roundRect">
-            <a:avLst>
-              <a:gd name="adj" fmla="val 12500"/>
-            </a:avLst>
+          <a:prstGeom prst="ellipse">
+            <a:avLst/>
           </a:prstGeom>
           <a:solidFill>
-            <a:srgbClr val="F4F5F7"/>
+            <a:srgbClr val="F2F2F2"/>
           </a:solidFill>
           <a:ln w="12700">
             <a:solidFill>
-              <a:srgbClr val="F4F5F7"/>
+              <a:srgbClr val="111111"/>
             </a:solidFill>
             <a:prstDash val="solid"/>
           </a:ln>
@@ -5002,26 +6468,102 @@
       </p:sp>
       <p:sp>
         <p:nvSpPr>
-          <p:cNvPr id="10" name="Shape 8"/>
-          <p:cNvSpPr/>
-          <p:nvPr/>
-        </p:nvSpPr>
-        <p:spPr>
-          <a:xfrm>
-            <a:off x="914400" y="2624328"/>
+          <p:cNvPr id="11" name="Text 9"/>
+          <p:cNvSpPr/>
+          <p:nvPr/>
+        </p:nvSpPr>
+        <p:spPr>
+          <a:xfrm>
+            <a:off x="914400" y="1892808"/>
             <a:ext cx="310896" cy="310896"/>
           </a:xfrm>
-          <a:prstGeom prst="roundRect">
-            <a:avLst>
-              <a:gd name="adj" fmla="val 17647"/>
-            </a:avLst>
+          <a:prstGeom prst="rect">
+            <a:avLst/>
+          </a:prstGeom>
+          <a:noFill/>
+          <a:ln/>
+        </p:spPr>
+        <p:txBody>
+          <a:bodyPr wrap="square" lIns="0" tIns="0" rIns="0" bIns="0" rtlCol="0" anchor="ctr"/>
+          <a:lstStyle/>
+          <a:p>
+            <a:pPr algn="ctr" indent="0" marL="0">
+              <a:buNone/>
+            </a:pPr>
+            <a:r>
+              <a:rPr lang="en-US" sz="900" b="1" dirty="0">
+                <a:solidFill>
+                  <a:srgbClr val="111111"/>
+                </a:solidFill>
+                <a:latin typeface="Pretendard" pitchFamily="34" charset="0"/>
+                <a:ea typeface="Pretendard" pitchFamily="34" charset="-122"/>
+                <a:cs typeface="Pretendard" pitchFamily="34" charset="-120"/>
+              </a:rPr>
+              <a:t>01</a:t>
+            </a:r>
+            <a:endParaRPr lang="en-US" sz="900" dirty="0"/>
+          </a:p>
+        </p:txBody>
+      </p:sp>
+      <p:sp>
+        <p:nvSpPr>
+          <p:cNvPr id="12" name="Text 10"/>
+          <p:cNvSpPr/>
+          <p:nvPr/>
+        </p:nvSpPr>
+        <p:spPr>
+          <a:xfrm>
+            <a:off x="1353312" y="1755648"/>
+            <a:ext cx="4248760" cy="585216"/>
+          </a:xfrm>
+          <a:prstGeom prst="rect">
+            <a:avLst/>
+          </a:prstGeom>
+          <a:noFill/>
+          <a:ln/>
+        </p:spPr>
+        <p:txBody>
+          <a:bodyPr wrap="square" lIns="0" tIns="0" rIns="0" bIns="0" rtlCol="0" anchor="ctr"/>
+          <a:lstStyle/>
+          <a:p>
+            <a:pPr indent="0" marL="0">
+              <a:buNone/>
+            </a:pPr>
+            <a:r>
+              <a:rPr lang="en-US" sz="1200" dirty="0">
+                <a:solidFill>
+                  <a:srgbClr val="111111"/>
+                </a:solidFill>
+                <a:latin typeface="Pretendard" pitchFamily="34" charset="0"/>
+                <a:ea typeface="Pretendard" pitchFamily="34" charset="-122"/>
+                <a:cs typeface="Pretendard" pitchFamily="34" charset="-120"/>
+              </a:rPr>
+              <a:t>무엇을 하는 사람인지 20초 안에 알았다</a:t>
+            </a:r>
+            <a:endParaRPr lang="en-US" sz="1200" dirty="0"/>
+          </a:p>
+        </p:txBody>
+      </p:sp>
+      <p:sp>
+        <p:nvSpPr>
+          <p:cNvPr id="13" name="Shape 11"/>
+          <p:cNvSpPr/>
+          <p:nvPr/>
+        </p:nvSpPr>
+        <p:spPr>
+          <a:xfrm>
+            <a:off x="640080" y="2487168"/>
+            <a:ext cx="5254600" cy="585216"/>
+          </a:xfrm>
+          <a:prstGeom prst="rect">
+            <a:avLst/>
           </a:prstGeom>
           <a:solidFill>
-            <a:srgbClr val="FF4A1C"/>
+            <a:srgbClr val="F2F2F2"/>
           </a:solidFill>
-          <a:ln w="6350">
+          <a:ln w="12700">
             <a:solidFill>
-              <a:srgbClr val="FF4A1C"/>
+              <a:srgbClr val="F2F2F2"/>
             </a:solidFill>
             <a:prstDash val="solid"/>
           </a:ln>
@@ -5029,7 +6571,7 @@
       </p:sp>
       <p:sp>
         <p:nvSpPr>
-          <p:cNvPr id="11" name="Text 9"/>
+          <p:cNvPr id="14" name="Shape 12"/>
           <p:cNvSpPr/>
           <p:nvPr/>
         </p:nvSpPr>
@@ -5038,95 +6580,15 @@
             <a:off x="914400" y="2624328"/>
             <a:ext cx="310896" cy="310896"/>
           </a:xfrm>
-          <a:prstGeom prst="rect">
-            <a:avLst/>
-          </a:prstGeom>
-          <a:noFill/>
-          <a:ln/>
-        </p:spPr>
-        <p:txBody>
-          <a:bodyPr wrap="square" lIns="0" tIns="0" rIns="0" bIns="0" rtlCol="0" anchor="ctr"/>
-          <a:lstStyle/>
-          <a:p>
-            <a:pPr algn="ctr" indent="0" marL="0">
-              <a:buNone/>
-            </a:pPr>
-            <a:r>
-              <a:rPr lang="en-US" sz="1000" b="1" dirty="0">
-                <a:solidFill>
-                  <a:srgbClr val="FFFFFF"/>
-                </a:solidFill>
-                <a:latin typeface="Pretendard" pitchFamily="34" charset="0"/>
-                <a:ea typeface="Pretendard" pitchFamily="34" charset="-122"/>
-                <a:cs typeface="Pretendard" pitchFamily="34" charset="-120"/>
-              </a:rPr>
-              <a:t>02</a:t>
-            </a:r>
-            <a:endParaRPr lang="en-US" sz="1000" dirty="0"/>
-          </a:p>
-        </p:txBody>
-      </p:sp>
-      <p:sp>
-        <p:nvSpPr>
-          <p:cNvPr id="12" name="Text 10"/>
-          <p:cNvSpPr/>
-          <p:nvPr/>
-        </p:nvSpPr>
-        <p:spPr>
-          <a:xfrm>
-            <a:off x="1353312" y="2487168"/>
-            <a:ext cx="4248760" cy="585216"/>
-          </a:xfrm>
-          <a:prstGeom prst="rect">
-            <a:avLst/>
-          </a:prstGeom>
-          <a:noFill/>
-          <a:ln/>
-        </p:spPr>
-        <p:txBody>
-          <a:bodyPr wrap="square" lIns="0" tIns="0" rIns="0" bIns="0" rtlCol="0" anchor="ctr"/>
-          <a:lstStyle/>
-          <a:p>
-            <a:pPr indent="0" marL="0">
-              <a:buNone/>
-            </a:pPr>
-            <a:r>
-              <a:rPr lang="en-US" sz="1200" dirty="0">
-                <a:solidFill>
-                  <a:srgbClr val="14161B"/>
-                </a:solidFill>
-                <a:latin typeface="Pretendard" pitchFamily="34" charset="0"/>
-                <a:ea typeface="Pretendard" pitchFamily="34" charset="-122"/>
-                <a:cs typeface="Pretendard" pitchFamily="34" charset="-120"/>
-              </a:rPr>
-              <a:t>문제 문장이 한 문장으로 들렸다</a:t>
-            </a:r>
-            <a:endParaRPr lang="en-US" sz="1200" dirty="0"/>
-          </a:p>
-        </p:txBody>
-      </p:sp>
-      <p:sp>
-        <p:nvSpPr>
-          <p:cNvPr id="13" name="Shape 11"/>
-          <p:cNvSpPr/>
-          <p:nvPr/>
-        </p:nvSpPr>
-        <p:spPr>
-          <a:xfrm>
-            <a:off x="640080" y="3218688"/>
-            <a:ext cx="5254600" cy="585216"/>
-          </a:xfrm>
-          <a:prstGeom prst="roundRect">
-            <a:avLst>
-              <a:gd name="adj" fmla="val 12500"/>
-            </a:avLst>
+          <a:prstGeom prst="ellipse">
+            <a:avLst/>
           </a:prstGeom>
           <a:solidFill>
-            <a:srgbClr val="F4F5F7"/>
+            <a:srgbClr val="F2F2F2"/>
           </a:solidFill>
           <a:ln w="12700">
             <a:solidFill>
-              <a:srgbClr val="F4F5F7"/>
+              <a:srgbClr val="111111"/>
             </a:solidFill>
             <a:prstDash val="solid"/>
           </a:ln>
@@ -5134,26 +6596,102 @@
       </p:sp>
       <p:sp>
         <p:nvSpPr>
-          <p:cNvPr id="14" name="Shape 12"/>
-          <p:cNvSpPr/>
-          <p:nvPr/>
-        </p:nvSpPr>
-        <p:spPr>
-          <a:xfrm>
-            <a:off x="914400" y="3355848"/>
+          <p:cNvPr id="15" name="Text 13"/>
+          <p:cNvSpPr/>
+          <p:nvPr/>
+        </p:nvSpPr>
+        <p:spPr>
+          <a:xfrm>
+            <a:off x="914400" y="2624328"/>
             <a:ext cx="310896" cy="310896"/>
           </a:xfrm>
-          <a:prstGeom prst="roundRect">
-            <a:avLst>
-              <a:gd name="adj" fmla="val 17647"/>
-            </a:avLst>
+          <a:prstGeom prst="rect">
+            <a:avLst/>
+          </a:prstGeom>
+          <a:noFill/>
+          <a:ln/>
+        </p:spPr>
+        <p:txBody>
+          <a:bodyPr wrap="square" lIns="0" tIns="0" rIns="0" bIns="0" rtlCol="0" anchor="ctr"/>
+          <a:lstStyle/>
+          <a:p>
+            <a:pPr algn="ctr" indent="0" marL="0">
+              <a:buNone/>
+            </a:pPr>
+            <a:r>
+              <a:rPr lang="en-US" sz="900" b="1" dirty="0">
+                <a:solidFill>
+                  <a:srgbClr val="111111"/>
+                </a:solidFill>
+                <a:latin typeface="Pretendard" pitchFamily="34" charset="0"/>
+                <a:ea typeface="Pretendard" pitchFamily="34" charset="-122"/>
+                <a:cs typeface="Pretendard" pitchFamily="34" charset="-120"/>
+              </a:rPr>
+              <a:t>02</a:t>
+            </a:r>
+            <a:endParaRPr lang="en-US" sz="900" dirty="0"/>
+          </a:p>
+        </p:txBody>
+      </p:sp>
+      <p:sp>
+        <p:nvSpPr>
+          <p:cNvPr id="16" name="Text 14"/>
+          <p:cNvSpPr/>
+          <p:nvPr/>
+        </p:nvSpPr>
+        <p:spPr>
+          <a:xfrm>
+            <a:off x="1353312" y="2487168"/>
+            <a:ext cx="4248760" cy="585216"/>
+          </a:xfrm>
+          <a:prstGeom prst="rect">
+            <a:avLst/>
+          </a:prstGeom>
+          <a:noFill/>
+          <a:ln/>
+        </p:spPr>
+        <p:txBody>
+          <a:bodyPr wrap="square" lIns="0" tIns="0" rIns="0" bIns="0" rtlCol="0" anchor="ctr"/>
+          <a:lstStyle/>
+          <a:p>
+            <a:pPr indent="0" marL="0">
+              <a:buNone/>
+            </a:pPr>
+            <a:r>
+              <a:rPr lang="en-US" sz="1200" dirty="0">
+                <a:solidFill>
+                  <a:srgbClr val="111111"/>
+                </a:solidFill>
+                <a:latin typeface="Pretendard" pitchFamily="34" charset="0"/>
+                <a:ea typeface="Pretendard" pitchFamily="34" charset="-122"/>
+                <a:cs typeface="Pretendard" pitchFamily="34" charset="-120"/>
+              </a:rPr>
+              <a:t>문제 문장이 한 문장으로 들렸다</a:t>
+            </a:r>
+            <a:endParaRPr lang="en-US" sz="1200" dirty="0"/>
+          </a:p>
+        </p:txBody>
+      </p:sp>
+      <p:sp>
+        <p:nvSpPr>
+          <p:cNvPr id="17" name="Shape 15"/>
+          <p:cNvSpPr/>
+          <p:nvPr/>
+        </p:nvSpPr>
+        <p:spPr>
+          <a:xfrm>
+            <a:off x="640080" y="3218688"/>
+            <a:ext cx="5254600" cy="585216"/>
+          </a:xfrm>
+          <a:prstGeom prst="rect">
+            <a:avLst/>
           </a:prstGeom>
           <a:solidFill>
-            <a:srgbClr val="FF4A1C"/>
+            <a:srgbClr val="F2F2F2"/>
           </a:solidFill>
-          <a:ln w="6350">
+          <a:ln w="12700">
             <a:solidFill>
-              <a:srgbClr val="FF4A1C"/>
+              <a:srgbClr val="F2F2F2"/>
             </a:solidFill>
             <a:prstDash val="solid"/>
           </a:ln>
@@ -5161,7 +6699,7 @@
       </p:sp>
       <p:sp>
         <p:nvSpPr>
-          <p:cNvPr id="15" name="Text 13"/>
+          <p:cNvPr id="18" name="Shape 16"/>
           <p:cNvSpPr/>
           <p:nvPr/>
         </p:nvSpPr>
@@ -5170,95 +6708,15 @@
             <a:off x="914400" y="3355848"/>
             <a:ext cx="310896" cy="310896"/>
           </a:xfrm>
-          <a:prstGeom prst="rect">
-            <a:avLst/>
-          </a:prstGeom>
-          <a:noFill/>
-          <a:ln/>
-        </p:spPr>
-        <p:txBody>
-          <a:bodyPr wrap="square" lIns="0" tIns="0" rIns="0" bIns="0" rtlCol="0" anchor="ctr"/>
-          <a:lstStyle/>
-          <a:p>
-            <a:pPr algn="ctr" indent="0" marL="0">
-              <a:buNone/>
-            </a:pPr>
-            <a:r>
-              <a:rPr lang="en-US" sz="1000" b="1" dirty="0">
-                <a:solidFill>
-                  <a:srgbClr val="FFFFFF"/>
-                </a:solidFill>
-                <a:latin typeface="Pretendard" pitchFamily="34" charset="0"/>
-                <a:ea typeface="Pretendard" pitchFamily="34" charset="-122"/>
-                <a:cs typeface="Pretendard" pitchFamily="34" charset="-120"/>
-              </a:rPr>
-              <a:t>03</a:t>
-            </a:r>
-            <a:endParaRPr lang="en-US" sz="1000" dirty="0"/>
-          </a:p>
-        </p:txBody>
-      </p:sp>
-      <p:sp>
-        <p:nvSpPr>
-          <p:cNvPr id="16" name="Text 14"/>
-          <p:cNvSpPr/>
-          <p:nvPr/>
-        </p:nvSpPr>
-        <p:spPr>
-          <a:xfrm>
-            <a:off x="1353312" y="3218688"/>
-            <a:ext cx="4248760" cy="585216"/>
-          </a:xfrm>
-          <a:prstGeom prst="rect">
-            <a:avLst/>
-          </a:prstGeom>
-          <a:noFill/>
-          <a:ln/>
-        </p:spPr>
-        <p:txBody>
-          <a:bodyPr wrap="square" lIns="0" tIns="0" rIns="0" bIns="0" rtlCol="0" anchor="ctr"/>
-          <a:lstStyle/>
-          <a:p>
-            <a:pPr indent="0" marL="0">
-              <a:buNone/>
-            </a:pPr>
-            <a:r>
-              <a:rPr lang="en-US" sz="1200" dirty="0">
-                <a:solidFill>
-                  <a:srgbClr val="14161B"/>
-                </a:solidFill>
-                <a:latin typeface="Pretendard" pitchFamily="34" charset="0"/>
-                <a:ea typeface="Pretendard" pitchFamily="34" charset="-122"/>
-                <a:cs typeface="Pretendard" pitchFamily="34" charset="-120"/>
-              </a:rPr>
-              <a:t>왜 그렇게 판단했는지 이해됐다</a:t>
-            </a:r>
-            <a:endParaRPr lang="en-US" sz="1200" dirty="0"/>
-          </a:p>
-        </p:txBody>
-      </p:sp>
-      <p:sp>
-        <p:nvSpPr>
-          <p:cNvPr id="17" name="Shape 15"/>
-          <p:cNvSpPr/>
-          <p:nvPr/>
-        </p:nvSpPr>
-        <p:spPr>
-          <a:xfrm>
-            <a:off x="640080" y="3950208"/>
-            <a:ext cx="5254600" cy="585216"/>
-          </a:xfrm>
-          <a:prstGeom prst="roundRect">
-            <a:avLst>
-              <a:gd name="adj" fmla="val 12500"/>
-            </a:avLst>
+          <a:prstGeom prst="ellipse">
+            <a:avLst/>
           </a:prstGeom>
           <a:solidFill>
-            <a:srgbClr val="F4F5F7"/>
+            <a:srgbClr val="F2F2F2"/>
           </a:solidFill>
           <a:ln w="12700">
             <a:solidFill>
-              <a:srgbClr val="F4F5F7"/>
+              <a:srgbClr val="111111"/>
             </a:solidFill>
             <a:prstDash val="solid"/>
           </a:ln>
@@ -5266,26 +6724,102 @@
       </p:sp>
       <p:sp>
         <p:nvSpPr>
-          <p:cNvPr id="18" name="Shape 16"/>
-          <p:cNvSpPr/>
-          <p:nvPr/>
-        </p:nvSpPr>
-        <p:spPr>
-          <a:xfrm>
-            <a:off x="914400" y="4087368"/>
+          <p:cNvPr id="19" name="Text 17"/>
+          <p:cNvSpPr/>
+          <p:nvPr/>
+        </p:nvSpPr>
+        <p:spPr>
+          <a:xfrm>
+            <a:off x="914400" y="3355848"/>
             <a:ext cx="310896" cy="310896"/>
           </a:xfrm>
-          <a:prstGeom prst="roundRect">
-            <a:avLst>
-              <a:gd name="adj" fmla="val 17647"/>
-            </a:avLst>
+          <a:prstGeom prst="rect">
+            <a:avLst/>
+          </a:prstGeom>
+          <a:noFill/>
+          <a:ln/>
+        </p:spPr>
+        <p:txBody>
+          <a:bodyPr wrap="square" lIns="0" tIns="0" rIns="0" bIns="0" rtlCol="0" anchor="ctr"/>
+          <a:lstStyle/>
+          <a:p>
+            <a:pPr algn="ctr" indent="0" marL="0">
+              <a:buNone/>
+            </a:pPr>
+            <a:r>
+              <a:rPr lang="en-US" sz="900" b="1" dirty="0">
+                <a:solidFill>
+                  <a:srgbClr val="111111"/>
+                </a:solidFill>
+                <a:latin typeface="Pretendard" pitchFamily="34" charset="0"/>
+                <a:ea typeface="Pretendard" pitchFamily="34" charset="-122"/>
+                <a:cs typeface="Pretendard" pitchFamily="34" charset="-120"/>
+              </a:rPr>
+              <a:t>03</a:t>
+            </a:r>
+            <a:endParaRPr lang="en-US" sz="900" dirty="0"/>
+          </a:p>
+        </p:txBody>
+      </p:sp>
+      <p:sp>
+        <p:nvSpPr>
+          <p:cNvPr id="20" name="Text 18"/>
+          <p:cNvSpPr/>
+          <p:nvPr/>
+        </p:nvSpPr>
+        <p:spPr>
+          <a:xfrm>
+            <a:off x="1353312" y="3218688"/>
+            <a:ext cx="4248760" cy="585216"/>
+          </a:xfrm>
+          <a:prstGeom prst="rect">
+            <a:avLst/>
+          </a:prstGeom>
+          <a:noFill/>
+          <a:ln/>
+        </p:spPr>
+        <p:txBody>
+          <a:bodyPr wrap="square" lIns="0" tIns="0" rIns="0" bIns="0" rtlCol="0" anchor="ctr"/>
+          <a:lstStyle/>
+          <a:p>
+            <a:pPr indent="0" marL="0">
+              <a:buNone/>
+            </a:pPr>
+            <a:r>
+              <a:rPr lang="en-US" sz="1200" dirty="0">
+                <a:solidFill>
+                  <a:srgbClr val="111111"/>
+                </a:solidFill>
+                <a:latin typeface="Pretendard" pitchFamily="34" charset="0"/>
+                <a:ea typeface="Pretendard" pitchFamily="34" charset="-122"/>
+                <a:cs typeface="Pretendard" pitchFamily="34" charset="-120"/>
+              </a:rPr>
+              <a:t>왜 그렇게 판단했는지 이해됐다</a:t>
+            </a:r>
+            <a:endParaRPr lang="en-US" sz="1200" dirty="0"/>
+          </a:p>
+        </p:txBody>
+      </p:sp>
+      <p:sp>
+        <p:nvSpPr>
+          <p:cNvPr id="21" name="Shape 19"/>
+          <p:cNvSpPr/>
+          <p:nvPr/>
+        </p:nvSpPr>
+        <p:spPr>
+          <a:xfrm>
+            <a:off x="640080" y="3950208"/>
+            <a:ext cx="5254600" cy="585216"/>
+          </a:xfrm>
+          <a:prstGeom prst="rect">
+            <a:avLst/>
           </a:prstGeom>
           <a:solidFill>
-            <a:srgbClr val="FF4A1C"/>
+            <a:srgbClr val="F2F2F2"/>
           </a:solidFill>
-          <a:ln w="6350">
+          <a:ln w="12700">
             <a:solidFill>
-              <a:srgbClr val="FF4A1C"/>
+              <a:srgbClr val="F2F2F2"/>
             </a:solidFill>
             <a:prstDash val="solid"/>
           </a:ln>
@@ -5293,7 +6827,7 @@
       </p:sp>
       <p:sp>
         <p:nvSpPr>
-          <p:cNvPr id="19" name="Text 17"/>
+          <p:cNvPr id="22" name="Shape 20"/>
           <p:cNvSpPr/>
           <p:nvPr/>
         </p:nvSpPr>
@@ -5302,95 +6836,15 @@
             <a:off x="914400" y="4087368"/>
             <a:ext cx="310896" cy="310896"/>
           </a:xfrm>
-          <a:prstGeom prst="rect">
-            <a:avLst/>
-          </a:prstGeom>
-          <a:noFill/>
-          <a:ln/>
-        </p:spPr>
-        <p:txBody>
-          <a:bodyPr wrap="square" lIns="0" tIns="0" rIns="0" bIns="0" rtlCol="0" anchor="ctr"/>
-          <a:lstStyle/>
-          <a:p>
-            <a:pPr algn="ctr" indent="0" marL="0">
-              <a:buNone/>
-            </a:pPr>
-            <a:r>
-              <a:rPr lang="en-US" sz="1000" b="1" dirty="0">
-                <a:solidFill>
-                  <a:srgbClr val="FFFFFF"/>
-                </a:solidFill>
-                <a:latin typeface="Pretendard" pitchFamily="34" charset="0"/>
-                <a:ea typeface="Pretendard" pitchFamily="34" charset="-122"/>
-                <a:cs typeface="Pretendard" pitchFamily="34" charset="-120"/>
-              </a:rPr>
-              <a:t>04</a:t>
-            </a:r>
-            <a:endParaRPr lang="en-US" sz="1000" dirty="0"/>
-          </a:p>
-        </p:txBody>
-      </p:sp>
-      <p:sp>
-        <p:nvSpPr>
-          <p:cNvPr id="20" name="Text 18"/>
-          <p:cNvSpPr/>
-          <p:nvPr/>
-        </p:nvSpPr>
-        <p:spPr>
-          <a:xfrm>
-            <a:off x="1353312" y="3950208"/>
-            <a:ext cx="4248760" cy="585216"/>
-          </a:xfrm>
-          <a:prstGeom prst="rect">
-            <a:avLst/>
-          </a:prstGeom>
-          <a:noFill/>
-          <a:ln/>
-        </p:spPr>
-        <p:txBody>
-          <a:bodyPr wrap="square" lIns="0" tIns="0" rIns="0" bIns="0" rtlCol="0" anchor="ctr"/>
-          <a:lstStyle/>
-          <a:p>
-            <a:pPr indent="0" marL="0">
-              <a:buNone/>
-            </a:pPr>
-            <a:r>
-              <a:rPr lang="en-US" sz="1200" dirty="0">
-                <a:solidFill>
-                  <a:srgbClr val="14161B"/>
-                </a:solidFill>
-                <a:latin typeface="Pretendard" pitchFamily="34" charset="0"/>
-                <a:ea typeface="Pretendard" pitchFamily="34" charset="-122"/>
-                <a:cs typeface="Pretendard" pitchFamily="34" charset="-120"/>
-              </a:rPr>
-              <a:t>무엇이 달라졌는지 들었다</a:t>
-            </a:r>
-            <a:endParaRPr lang="en-US" sz="1200" dirty="0"/>
-          </a:p>
-        </p:txBody>
-      </p:sp>
-      <p:sp>
-        <p:nvSpPr>
-          <p:cNvPr id="21" name="Shape 19"/>
-          <p:cNvSpPr/>
-          <p:nvPr/>
-        </p:nvSpPr>
-        <p:spPr>
-          <a:xfrm>
-            <a:off x="6297016" y="1755648"/>
-            <a:ext cx="5254600" cy="585216"/>
-          </a:xfrm>
-          <a:prstGeom prst="roundRect">
-            <a:avLst>
-              <a:gd name="adj" fmla="val 12500"/>
-            </a:avLst>
+          <a:prstGeom prst="ellipse">
+            <a:avLst/>
           </a:prstGeom>
           <a:solidFill>
-            <a:srgbClr val="F4F5F7"/>
+            <a:srgbClr val="F2F2F2"/>
           </a:solidFill>
           <a:ln w="12700">
             <a:solidFill>
-              <a:srgbClr val="F4F5F7"/>
+              <a:srgbClr val="111111"/>
             </a:solidFill>
             <a:prstDash val="solid"/>
           </a:ln>
@@ -5398,26 +6852,102 @@
       </p:sp>
       <p:sp>
         <p:nvSpPr>
-          <p:cNvPr id="22" name="Shape 20"/>
-          <p:cNvSpPr/>
-          <p:nvPr/>
-        </p:nvSpPr>
-        <p:spPr>
-          <a:xfrm>
-            <a:off x="6571336" y="1892808"/>
+          <p:cNvPr id="23" name="Text 21"/>
+          <p:cNvSpPr/>
+          <p:nvPr/>
+        </p:nvSpPr>
+        <p:spPr>
+          <a:xfrm>
+            <a:off x="914400" y="4087368"/>
             <a:ext cx="310896" cy="310896"/>
           </a:xfrm>
-          <a:prstGeom prst="roundRect">
-            <a:avLst>
-              <a:gd name="adj" fmla="val 17647"/>
-            </a:avLst>
+          <a:prstGeom prst="rect">
+            <a:avLst/>
+          </a:prstGeom>
+          <a:noFill/>
+          <a:ln/>
+        </p:spPr>
+        <p:txBody>
+          <a:bodyPr wrap="square" lIns="0" tIns="0" rIns="0" bIns="0" rtlCol="0" anchor="ctr"/>
+          <a:lstStyle/>
+          <a:p>
+            <a:pPr algn="ctr" indent="0" marL="0">
+              <a:buNone/>
+            </a:pPr>
+            <a:r>
+              <a:rPr lang="en-US" sz="900" b="1" dirty="0">
+                <a:solidFill>
+                  <a:srgbClr val="111111"/>
+                </a:solidFill>
+                <a:latin typeface="Pretendard" pitchFamily="34" charset="0"/>
+                <a:ea typeface="Pretendard" pitchFamily="34" charset="-122"/>
+                <a:cs typeface="Pretendard" pitchFamily="34" charset="-120"/>
+              </a:rPr>
+              <a:t>04</a:t>
+            </a:r>
+            <a:endParaRPr lang="en-US" sz="900" dirty="0"/>
+          </a:p>
+        </p:txBody>
+      </p:sp>
+      <p:sp>
+        <p:nvSpPr>
+          <p:cNvPr id="24" name="Text 22"/>
+          <p:cNvSpPr/>
+          <p:nvPr/>
+        </p:nvSpPr>
+        <p:spPr>
+          <a:xfrm>
+            <a:off x="1353312" y="3950208"/>
+            <a:ext cx="4248760" cy="585216"/>
+          </a:xfrm>
+          <a:prstGeom prst="rect">
+            <a:avLst/>
+          </a:prstGeom>
+          <a:noFill/>
+          <a:ln/>
+        </p:spPr>
+        <p:txBody>
+          <a:bodyPr wrap="square" lIns="0" tIns="0" rIns="0" bIns="0" rtlCol="0" anchor="ctr"/>
+          <a:lstStyle/>
+          <a:p>
+            <a:pPr indent="0" marL="0">
+              <a:buNone/>
+            </a:pPr>
+            <a:r>
+              <a:rPr lang="en-US" sz="1200" dirty="0">
+                <a:solidFill>
+                  <a:srgbClr val="111111"/>
+                </a:solidFill>
+                <a:latin typeface="Pretendard" pitchFamily="34" charset="0"/>
+                <a:ea typeface="Pretendard" pitchFamily="34" charset="-122"/>
+                <a:cs typeface="Pretendard" pitchFamily="34" charset="-120"/>
+              </a:rPr>
+              <a:t>무엇이 달라졌는지 들었다</a:t>
+            </a:r>
+            <a:endParaRPr lang="en-US" sz="1200" dirty="0"/>
+          </a:p>
+        </p:txBody>
+      </p:sp>
+      <p:sp>
+        <p:nvSpPr>
+          <p:cNvPr id="25" name="Shape 23"/>
+          <p:cNvSpPr/>
+          <p:nvPr/>
+        </p:nvSpPr>
+        <p:spPr>
+          <a:xfrm>
+            <a:off x="6297016" y="1755648"/>
+            <a:ext cx="5254600" cy="585216"/>
+          </a:xfrm>
+          <a:prstGeom prst="rect">
+            <a:avLst/>
           </a:prstGeom>
           <a:solidFill>
-            <a:srgbClr val="FF4A1C"/>
+            <a:srgbClr val="F2F2F2"/>
           </a:solidFill>
-          <a:ln w="6350">
+          <a:ln w="12700">
             <a:solidFill>
-              <a:srgbClr val="FF4A1C"/>
+              <a:srgbClr val="F2F2F2"/>
             </a:solidFill>
             <a:prstDash val="solid"/>
           </a:ln>
@@ -5425,7 +6955,7 @@
       </p:sp>
       <p:sp>
         <p:nvSpPr>
-          <p:cNvPr id="23" name="Text 21"/>
+          <p:cNvPr id="26" name="Shape 24"/>
           <p:cNvSpPr/>
           <p:nvPr/>
         </p:nvSpPr>
@@ -5434,95 +6964,15 @@
             <a:off x="6571336" y="1892808"/>
             <a:ext cx="310896" cy="310896"/>
           </a:xfrm>
-          <a:prstGeom prst="rect">
-            <a:avLst/>
-          </a:prstGeom>
-          <a:noFill/>
-          <a:ln/>
-        </p:spPr>
-        <p:txBody>
-          <a:bodyPr wrap="square" lIns="0" tIns="0" rIns="0" bIns="0" rtlCol="0" anchor="ctr"/>
-          <a:lstStyle/>
-          <a:p>
-            <a:pPr algn="ctr" indent="0" marL="0">
-              <a:buNone/>
-            </a:pPr>
-            <a:r>
-              <a:rPr lang="en-US" sz="1000" b="1" dirty="0">
-                <a:solidFill>
-                  <a:srgbClr val="FFFFFF"/>
-                </a:solidFill>
-                <a:latin typeface="Pretendard" pitchFamily="34" charset="0"/>
-                <a:ea typeface="Pretendard" pitchFamily="34" charset="-122"/>
-                <a:cs typeface="Pretendard" pitchFamily="34" charset="-120"/>
-              </a:rPr>
-              <a:t>05</a:t>
-            </a:r>
-            <a:endParaRPr lang="en-US" sz="1000" dirty="0"/>
-          </a:p>
-        </p:txBody>
-      </p:sp>
-      <p:sp>
-        <p:nvSpPr>
-          <p:cNvPr id="24" name="Text 22"/>
-          <p:cNvSpPr/>
-          <p:nvPr/>
-        </p:nvSpPr>
-        <p:spPr>
-          <a:xfrm>
-            <a:off x="7010248" y="1755648"/>
-            <a:ext cx="4248760" cy="585216"/>
-          </a:xfrm>
-          <a:prstGeom prst="rect">
-            <a:avLst/>
-          </a:prstGeom>
-          <a:noFill/>
-          <a:ln/>
-        </p:spPr>
-        <p:txBody>
-          <a:bodyPr wrap="square" lIns="0" tIns="0" rIns="0" bIns="0" rtlCol="0" anchor="ctr"/>
-          <a:lstStyle/>
-          <a:p>
-            <a:pPr indent="0" marL="0">
-              <a:buNone/>
-            </a:pPr>
-            <a:r>
-              <a:rPr lang="en-US" sz="1200" dirty="0">
-                <a:solidFill>
-                  <a:srgbClr val="14161B"/>
-                </a:solidFill>
-                <a:latin typeface="Pretendard" pitchFamily="34" charset="0"/>
-                <a:ea typeface="Pretendard" pitchFamily="34" charset="-122"/>
-                <a:cs typeface="Pretendard" pitchFamily="34" charset="-120"/>
-              </a:rPr>
-              <a:t>3분 안에 끝났다</a:t>
-            </a:r>
-            <a:endParaRPr lang="en-US" sz="1200" dirty="0"/>
-          </a:p>
-        </p:txBody>
-      </p:sp>
-      <p:sp>
-        <p:nvSpPr>
-          <p:cNvPr id="25" name="Shape 23"/>
-          <p:cNvSpPr/>
-          <p:nvPr/>
-        </p:nvSpPr>
-        <p:spPr>
-          <a:xfrm>
-            <a:off x="6297016" y="2487168"/>
-            <a:ext cx="5254600" cy="585216"/>
-          </a:xfrm>
-          <a:prstGeom prst="roundRect">
-            <a:avLst>
-              <a:gd name="adj" fmla="val 12500"/>
-            </a:avLst>
+          <a:prstGeom prst="ellipse">
+            <a:avLst/>
           </a:prstGeom>
           <a:solidFill>
-            <a:srgbClr val="F4F5F7"/>
+            <a:srgbClr val="F2F2F2"/>
           </a:solidFill>
           <a:ln w="12700">
             <a:solidFill>
-              <a:srgbClr val="F4F5F7"/>
+              <a:srgbClr val="111111"/>
             </a:solidFill>
             <a:prstDash val="solid"/>
           </a:ln>
@@ -5530,26 +6980,102 @@
       </p:sp>
       <p:sp>
         <p:nvSpPr>
-          <p:cNvPr id="26" name="Shape 24"/>
-          <p:cNvSpPr/>
-          <p:nvPr/>
-        </p:nvSpPr>
-        <p:spPr>
-          <a:xfrm>
-            <a:off x="6571336" y="2624328"/>
+          <p:cNvPr id="27" name="Text 25"/>
+          <p:cNvSpPr/>
+          <p:nvPr/>
+        </p:nvSpPr>
+        <p:spPr>
+          <a:xfrm>
+            <a:off x="6571336" y="1892808"/>
             <a:ext cx="310896" cy="310896"/>
           </a:xfrm>
-          <a:prstGeom prst="roundRect">
-            <a:avLst>
-              <a:gd name="adj" fmla="val 17647"/>
-            </a:avLst>
+          <a:prstGeom prst="rect">
+            <a:avLst/>
+          </a:prstGeom>
+          <a:noFill/>
+          <a:ln/>
+        </p:spPr>
+        <p:txBody>
+          <a:bodyPr wrap="square" lIns="0" tIns="0" rIns="0" bIns="0" rtlCol="0" anchor="ctr"/>
+          <a:lstStyle/>
+          <a:p>
+            <a:pPr algn="ctr" indent="0" marL="0">
+              <a:buNone/>
+            </a:pPr>
+            <a:r>
+              <a:rPr lang="en-US" sz="900" b="1" dirty="0">
+                <a:solidFill>
+                  <a:srgbClr val="111111"/>
+                </a:solidFill>
+                <a:latin typeface="Pretendard" pitchFamily="34" charset="0"/>
+                <a:ea typeface="Pretendard" pitchFamily="34" charset="-122"/>
+                <a:cs typeface="Pretendard" pitchFamily="34" charset="-120"/>
+              </a:rPr>
+              <a:t>05</a:t>
+            </a:r>
+            <a:endParaRPr lang="en-US" sz="900" dirty="0"/>
+          </a:p>
+        </p:txBody>
+      </p:sp>
+      <p:sp>
+        <p:nvSpPr>
+          <p:cNvPr id="28" name="Text 26"/>
+          <p:cNvSpPr/>
+          <p:nvPr/>
+        </p:nvSpPr>
+        <p:spPr>
+          <a:xfrm>
+            <a:off x="7010248" y="1755648"/>
+            <a:ext cx="4248760" cy="585216"/>
+          </a:xfrm>
+          <a:prstGeom prst="rect">
+            <a:avLst/>
+          </a:prstGeom>
+          <a:noFill/>
+          <a:ln/>
+        </p:spPr>
+        <p:txBody>
+          <a:bodyPr wrap="square" lIns="0" tIns="0" rIns="0" bIns="0" rtlCol="0" anchor="ctr"/>
+          <a:lstStyle/>
+          <a:p>
+            <a:pPr indent="0" marL="0">
+              <a:buNone/>
+            </a:pPr>
+            <a:r>
+              <a:rPr lang="en-US" sz="1200" dirty="0">
+                <a:solidFill>
+                  <a:srgbClr val="111111"/>
+                </a:solidFill>
+                <a:latin typeface="Pretendard" pitchFamily="34" charset="0"/>
+                <a:ea typeface="Pretendard" pitchFamily="34" charset="-122"/>
+                <a:cs typeface="Pretendard" pitchFamily="34" charset="-120"/>
+              </a:rPr>
+              <a:t>3분 안에 끝났다</a:t>
+            </a:r>
+            <a:endParaRPr lang="en-US" sz="1200" dirty="0"/>
+          </a:p>
+        </p:txBody>
+      </p:sp>
+      <p:sp>
+        <p:nvSpPr>
+          <p:cNvPr id="29" name="Shape 27"/>
+          <p:cNvSpPr/>
+          <p:nvPr/>
+        </p:nvSpPr>
+        <p:spPr>
+          <a:xfrm>
+            <a:off x="6297016" y="2487168"/>
+            <a:ext cx="5254600" cy="585216"/>
+          </a:xfrm>
+          <a:prstGeom prst="rect">
+            <a:avLst/>
           </a:prstGeom>
           <a:solidFill>
-            <a:srgbClr val="FF4A1C"/>
+            <a:srgbClr val="F2F2F2"/>
           </a:solidFill>
-          <a:ln w="6350">
+          <a:ln w="12700">
             <a:solidFill>
-              <a:srgbClr val="FF4A1C"/>
+              <a:srgbClr val="F2F2F2"/>
             </a:solidFill>
             <a:prstDash val="solid"/>
           </a:ln>
@@ -5557,7 +7083,7 @@
       </p:sp>
       <p:sp>
         <p:nvSpPr>
-          <p:cNvPr id="27" name="Text 25"/>
+          <p:cNvPr id="30" name="Shape 28"/>
           <p:cNvSpPr/>
           <p:nvPr/>
         </p:nvSpPr>
@@ -5566,95 +7092,15 @@
             <a:off x="6571336" y="2624328"/>
             <a:ext cx="310896" cy="310896"/>
           </a:xfrm>
-          <a:prstGeom prst="rect">
-            <a:avLst/>
-          </a:prstGeom>
-          <a:noFill/>
-          <a:ln/>
-        </p:spPr>
-        <p:txBody>
-          <a:bodyPr wrap="square" lIns="0" tIns="0" rIns="0" bIns="0" rtlCol="0" anchor="ctr"/>
-          <a:lstStyle/>
-          <a:p>
-            <a:pPr algn="ctr" indent="0" marL="0">
-              <a:buNone/>
-            </a:pPr>
-            <a:r>
-              <a:rPr lang="en-US" sz="1000" b="1" dirty="0">
-                <a:solidFill>
-                  <a:srgbClr val="FFFFFF"/>
-                </a:solidFill>
-                <a:latin typeface="Pretendard" pitchFamily="34" charset="0"/>
-                <a:ea typeface="Pretendard" pitchFamily="34" charset="-122"/>
-                <a:cs typeface="Pretendard" pitchFamily="34" charset="-120"/>
-              </a:rPr>
-              <a:t>06</a:t>
-            </a:r>
-            <a:endParaRPr lang="en-US" sz="1000" dirty="0"/>
-          </a:p>
-        </p:txBody>
-      </p:sp>
-      <p:sp>
-        <p:nvSpPr>
-          <p:cNvPr id="28" name="Text 26"/>
-          <p:cNvSpPr/>
-          <p:nvPr/>
-        </p:nvSpPr>
-        <p:spPr>
-          <a:xfrm>
-            <a:off x="7010248" y="2487168"/>
-            <a:ext cx="4248760" cy="585216"/>
-          </a:xfrm>
-          <a:prstGeom prst="rect">
-            <a:avLst/>
-          </a:prstGeom>
-          <a:noFill/>
-          <a:ln/>
-        </p:spPr>
-        <p:txBody>
-          <a:bodyPr wrap="square" lIns="0" tIns="0" rIns="0" bIns="0" rtlCol="0" anchor="ctr"/>
-          <a:lstStyle/>
-          <a:p>
-            <a:pPr indent="0" marL="0">
-              <a:buNone/>
-            </a:pPr>
-            <a:r>
-              <a:rPr lang="en-US" sz="1200" dirty="0">
-                <a:solidFill>
-                  <a:srgbClr val="14161B"/>
-                </a:solidFill>
-                <a:latin typeface="Pretendard" pitchFamily="34" charset="0"/>
-                <a:ea typeface="Pretendard" pitchFamily="34" charset="-122"/>
-                <a:cs typeface="Pretendard" pitchFamily="34" charset="-120"/>
-              </a:rPr>
-              <a:t>화면과 말이 따로 놀지 않았다</a:t>
-            </a:r>
-            <a:endParaRPr lang="en-US" sz="1200" dirty="0"/>
-          </a:p>
-        </p:txBody>
-      </p:sp>
-      <p:sp>
-        <p:nvSpPr>
-          <p:cNvPr id="29" name="Shape 27"/>
-          <p:cNvSpPr/>
-          <p:nvPr/>
-        </p:nvSpPr>
-        <p:spPr>
-          <a:xfrm>
-            <a:off x="6297016" y="3218688"/>
-            <a:ext cx="5254600" cy="585216"/>
-          </a:xfrm>
-          <a:prstGeom prst="roundRect">
-            <a:avLst>
-              <a:gd name="adj" fmla="val 12500"/>
-            </a:avLst>
+          <a:prstGeom prst="ellipse">
+            <a:avLst/>
           </a:prstGeom>
           <a:solidFill>
-            <a:srgbClr val="F4F5F7"/>
+            <a:srgbClr val="F2F2F2"/>
           </a:solidFill>
           <a:ln w="12700">
             <a:solidFill>
-              <a:srgbClr val="F4F5F7"/>
+              <a:srgbClr val="111111"/>
             </a:solidFill>
             <a:prstDash val="solid"/>
           </a:ln>
@@ -5662,26 +7108,102 @@
       </p:sp>
       <p:sp>
         <p:nvSpPr>
-          <p:cNvPr id="30" name="Shape 28"/>
-          <p:cNvSpPr/>
-          <p:nvPr/>
-        </p:nvSpPr>
-        <p:spPr>
-          <a:xfrm>
-            <a:off x="6571336" y="3355848"/>
+          <p:cNvPr id="31" name="Text 29"/>
+          <p:cNvSpPr/>
+          <p:nvPr/>
+        </p:nvSpPr>
+        <p:spPr>
+          <a:xfrm>
+            <a:off x="6571336" y="2624328"/>
             <a:ext cx="310896" cy="310896"/>
           </a:xfrm>
-          <a:prstGeom prst="roundRect">
-            <a:avLst>
-              <a:gd name="adj" fmla="val 17647"/>
-            </a:avLst>
+          <a:prstGeom prst="rect">
+            <a:avLst/>
+          </a:prstGeom>
+          <a:noFill/>
+          <a:ln/>
+        </p:spPr>
+        <p:txBody>
+          <a:bodyPr wrap="square" lIns="0" tIns="0" rIns="0" bIns="0" rtlCol="0" anchor="ctr"/>
+          <a:lstStyle/>
+          <a:p>
+            <a:pPr algn="ctr" indent="0" marL="0">
+              <a:buNone/>
+            </a:pPr>
+            <a:r>
+              <a:rPr lang="en-US" sz="900" b="1" dirty="0">
+                <a:solidFill>
+                  <a:srgbClr val="111111"/>
+                </a:solidFill>
+                <a:latin typeface="Pretendard" pitchFamily="34" charset="0"/>
+                <a:ea typeface="Pretendard" pitchFamily="34" charset="-122"/>
+                <a:cs typeface="Pretendard" pitchFamily="34" charset="-120"/>
+              </a:rPr>
+              <a:t>06</a:t>
+            </a:r>
+            <a:endParaRPr lang="en-US" sz="900" dirty="0"/>
+          </a:p>
+        </p:txBody>
+      </p:sp>
+      <p:sp>
+        <p:nvSpPr>
+          <p:cNvPr id="32" name="Text 30"/>
+          <p:cNvSpPr/>
+          <p:nvPr/>
+        </p:nvSpPr>
+        <p:spPr>
+          <a:xfrm>
+            <a:off x="7010248" y="2487168"/>
+            <a:ext cx="4248760" cy="585216"/>
+          </a:xfrm>
+          <a:prstGeom prst="rect">
+            <a:avLst/>
+          </a:prstGeom>
+          <a:noFill/>
+          <a:ln/>
+        </p:spPr>
+        <p:txBody>
+          <a:bodyPr wrap="square" lIns="0" tIns="0" rIns="0" bIns="0" rtlCol="0" anchor="ctr"/>
+          <a:lstStyle/>
+          <a:p>
+            <a:pPr indent="0" marL="0">
+              <a:buNone/>
+            </a:pPr>
+            <a:r>
+              <a:rPr lang="en-US" sz="1200" dirty="0">
+                <a:solidFill>
+                  <a:srgbClr val="111111"/>
+                </a:solidFill>
+                <a:latin typeface="Pretendard" pitchFamily="34" charset="0"/>
+                <a:ea typeface="Pretendard" pitchFamily="34" charset="-122"/>
+                <a:cs typeface="Pretendard" pitchFamily="34" charset="-120"/>
+              </a:rPr>
+              <a:t>화면과 말이 따로 놀지 않았다</a:t>
+            </a:r>
+            <a:endParaRPr lang="en-US" sz="1200" dirty="0"/>
+          </a:p>
+        </p:txBody>
+      </p:sp>
+      <p:sp>
+        <p:nvSpPr>
+          <p:cNvPr id="33" name="Shape 31"/>
+          <p:cNvSpPr/>
+          <p:nvPr/>
+        </p:nvSpPr>
+        <p:spPr>
+          <a:xfrm>
+            <a:off x="6297016" y="3218688"/>
+            <a:ext cx="5254600" cy="585216"/>
+          </a:xfrm>
+          <a:prstGeom prst="rect">
+            <a:avLst/>
           </a:prstGeom>
           <a:solidFill>
-            <a:srgbClr val="FF4A1C"/>
+            <a:srgbClr val="F2F2F2"/>
           </a:solidFill>
-          <a:ln w="6350">
+          <a:ln w="12700">
             <a:solidFill>
-              <a:srgbClr val="FF4A1C"/>
+              <a:srgbClr val="F2F2F2"/>
             </a:solidFill>
             <a:prstDash val="solid"/>
           </a:ln>
@@ -5689,7 +7211,7 @@
       </p:sp>
       <p:sp>
         <p:nvSpPr>
-          <p:cNvPr id="31" name="Text 29"/>
+          <p:cNvPr id="34" name="Shape 32"/>
           <p:cNvSpPr/>
           <p:nvPr/>
         </p:nvSpPr>
@@ -5698,95 +7220,15 @@
             <a:off x="6571336" y="3355848"/>
             <a:ext cx="310896" cy="310896"/>
           </a:xfrm>
-          <a:prstGeom prst="rect">
-            <a:avLst/>
-          </a:prstGeom>
-          <a:noFill/>
-          <a:ln/>
-        </p:spPr>
-        <p:txBody>
-          <a:bodyPr wrap="square" lIns="0" tIns="0" rIns="0" bIns="0" rtlCol="0" anchor="ctr"/>
-          <a:lstStyle/>
-          <a:p>
-            <a:pPr algn="ctr" indent="0" marL="0">
-              <a:buNone/>
-            </a:pPr>
-            <a:r>
-              <a:rPr lang="en-US" sz="1000" b="1" dirty="0">
-                <a:solidFill>
-                  <a:srgbClr val="FFFFFF"/>
-                </a:solidFill>
-                <a:latin typeface="Pretendard" pitchFamily="34" charset="0"/>
-                <a:ea typeface="Pretendard" pitchFamily="34" charset="-122"/>
-                <a:cs typeface="Pretendard" pitchFamily="34" charset="-120"/>
-              </a:rPr>
-              <a:t>07</a:t>
-            </a:r>
-            <a:endParaRPr lang="en-US" sz="1000" dirty="0"/>
-          </a:p>
-        </p:txBody>
-      </p:sp>
-      <p:sp>
-        <p:nvSpPr>
-          <p:cNvPr id="32" name="Text 30"/>
-          <p:cNvSpPr/>
-          <p:nvPr/>
-        </p:nvSpPr>
-        <p:spPr>
-          <a:xfrm>
-            <a:off x="7010248" y="3218688"/>
-            <a:ext cx="4248760" cy="585216"/>
-          </a:xfrm>
-          <a:prstGeom prst="rect">
-            <a:avLst/>
-          </a:prstGeom>
-          <a:noFill/>
-          <a:ln/>
-        </p:spPr>
-        <p:txBody>
-          <a:bodyPr wrap="square" lIns="0" tIns="0" rIns="0" bIns="0" rtlCol="0" anchor="ctr"/>
-          <a:lstStyle/>
-          <a:p>
-            <a:pPr indent="0" marL="0">
-              <a:buNone/>
-            </a:pPr>
-            <a:r>
-              <a:rPr lang="en-US" sz="1200" dirty="0">
-                <a:solidFill>
-                  <a:srgbClr val="14161B"/>
-                </a:solidFill>
-                <a:latin typeface="Pretendard" pitchFamily="34" charset="0"/>
-                <a:ea typeface="Pretendard" pitchFamily="34" charset="-122"/>
-                <a:cs typeface="Pretendard" pitchFamily="34" charset="-120"/>
-              </a:rPr>
-              <a:t>포트폴리오를 더 보고 싶어졌다</a:t>
-            </a:r>
-            <a:endParaRPr lang="en-US" sz="1200" dirty="0"/>
-          </a:p>
-        </p:txBody>
-      </p:sp>
-      <p:sp>
-        <p:nvSpPr>
-          <p:cNvPr id="33" name="Shape 31"/>
-          <p:cNvSpPr/>
-          <p:nvPr/>
-        </p:nvSpPr>
-        <p:spPr>
-          <a:xfrm>
-            <a:off x="6297016" y="3950208"/>
-            <a:ext cx="5254600" cy="585216"/>
-          </a:xfrm>
-          <a:prstGeom prst="roundRect">
-            <a:avLst>
-              <a:gd name="adj" fmla="val 12500"/>
-            </a:avLst>
+          <a:prstGeom prst="ellipse">
+            <a:avLst/>
           </a:prstGeom>
           <a:solidFill>
-            <a:srgbClr val="F4F5F7"/>
+            <a:srgbClr val="F2F2F2"/>
           </a:solidFill>
           <a:ln w="12700">
             <a:solidFill>
-              <a:srgbClr val="F4F5F7"/>
+              <a:srgbClr val="111111"/>
             </a:solidFill>
             <a:prstDash val="solid"/>
           </a:ln>
@@ -5794,26 +7236,102 @@
       </p:sp>
       <p:sp>
         <p:nvSpPr>
-          <p:cNvPr id="34" name="Shape 32"/>
-          <p:cNvSpPr/>
-          <p:nvPr/>
-        </p:nvSpPr>
-        <p:spPr>
-          <a:xfrm>
-            <a:off x="6571336" y="4087368"/>
+          <p:cNvPr id="35" name="Text 33"/>
+          <p:cNvSpPr/>
+          <p:nvPr/>
+        </p:nvSpPr>
+        <p:spPr>
+          <a:xfrm>
+            <a:off x="6571336" y="3355848"/>
             <a:ext cx="310896" cy="310896"/>
           </a:xfrm>
-          <a:prstGeom prst="roundRect">
-            <a:avLst>
-              <a:gd name="adj" fmla="val 17647"/>
-            </a:avLst>
+          <a:prstGeom prst="rect">
+            <a:avLst/>
+          </a:prstGeom>
+          <a:noFill/>
+          <a:ln/>
+        </p:spPr>
+        <p:txBody>
+          <a:bodyPr wrap="square" lIns="0" tIns="0" rIns="0" bIns="0" rtlCol="0" anchor="ctr"/>
+          <a:lstStyle/>
+          <a:p>
+            <a:pPr algn="ctr" indent="0" marL="0">
+              <a:buNone/>
+            </a:pPr>
+            <a:r>
+              <a:rPr lang="en-US" sz="900" b="1" dirty="0">
+                <a:solidFill>
+                  <a:srgbClr val="111111"/>
+                </a:solidFill>
+                <a:latin typeface="Pretendard" pitchFamily="34" charset="0"/>
+                <a:ea typeface="Pretendard" pitchFamily="34" charset="-122"/>
+                <a:cs typeface="Pretendard" pitchFamily="34" charset="-120"/>
+              </a:rPr>
+              <a:t>07</a:t>
+            </a:r>
+            <a:endParaRPr lang="en-US" sz="900" dirty="0"/>
+          </a:p>
+        </p:txBody>
+      </p:sp>
+      <p:sp>
+        <p:nvSpPr>
+          <p:cNvPr id="36" name="Text 34"/>
+          <p:cNvSpPr/>
+          <p:nvPr/>
+        </p:nvSpPr>
+        <p:spPr>
+          <a:xfrm>
+            <a:off x="7010248" y="3218688"/>
+            <a:ext cx="4248760" cy="585216"/>
+          </a:xfrm>
+          <a:prstGeom prst="rect">
+            <a:avLst/>
+          </a:prstGeom>
+          <a:noFill/>
+          <a:ln/>
+        </p:spPr>
+        <p:txBody>
+          <a:bodyPr wrap="square" lIns="0" tIns="0" rIns="0" bIns="0" rtlCol="0" anchor="ctr"/>
+          <a:lstStyle/>
+          <a:p>
+            <a:pPr indent="0" marL="0">
+              <a:buNone/>
+            </a:pPr>
+            <a:r>
+              <a:rPr lang="en-US" sz="1200" dirty="0">
+                <a:solidFill>
+                  <a:srgbClr val="111111"/>
+                </a:solidFill>
+                <a:latin typeface="Pretendard" pitchFamily="34" charset="0"/>
+                <a:ea typeface="Pretendard" pitchFamily="34" charset="-122"/>
+                <a:cs typeface="Pretendard" pitchFamily="34" charset="-120"/>
+              </a:rPr>
+              <a:t>포트폴리오를 더 보고 싶어졌다</a:t>
+            </a:r>
+            <a:endParaRPr lang="en-US" sz="1200" dirty="0"/>
+          </a:p>
+        </p:txBody>
+      </p:sp>
+      <p:sp>
+        <p:nvSpPr>
+          <p:cNvPr id="37" name="Shape 35"/>
+          <p:cNvSpPr/>
+          <p:nvPr/>
+        </p:nvSpPr>
+        <p:spPr>
+          <a:xfrm>
+            <a:off x="6297016" y="3950208"/>
+            <a:ext cx="5254600" cy="585216"/>
+          </a:xfrm>
+          <a:prstGeom prst="rect">
+            <a:avLst/>
           </a:prstGeom>
           <a:solidFill>
-            <a:srgbClr val="FF4A1C"/>
+            <a:srgbClr val="F2F2F2"/>
           </a:solidFill>
-          <a:ln w="6350">
+          <a:ln w="12700">
             <a:solidFill>
-              <a:srgbClr val="FF4A1C"/>
+              <a:srgbClr val="F2F2F2"/>
             </a:solidFill>
             <a:prstDash val="solid"/>
           </a:ln>
@@ -5821,7 +7339,7 @@
       </p:sp>
       <p:sp>
         <p:nvSpPr>
-          <p:cNvPr id="35" name="Text 33"/>
+          <p:cNvPr id="38" name="Shape 36"/>
           <p:cNvSpPr/>
           <p:nvPr/>
         </p:nvSpPr>
@@ -5830,6 +7348,31 @@
             <a:off x="6571336" y="4087368"/>
             <a:ext cx="310896" cy="310896"/>
           </a:xfrm>
+          <a:prstGeom prst="ellipse">
+            <a:avLst/>
+          </a:prstGeom>
+          <a:solidFill>
+            <a:srgbClr val="F2F2F2"/>
+          </a:solidFill>
+          <a:ln w="12700">
+            <a:solidFill>
+              <a:srgbClr val="111111"/>
+            </a:solidFill>
+            <a:prstDash val="solid"/>
+          </a:ln>
+        </p:spPr>
+      </p:sp>
+      <p:sp>
+        <p:nvSpPr>
+          <p:cNvPr id="39" name="Text 37"/>
+          <p:cNvSpPr/>
+          <p:nvPr/>
+        </p:nvSpPr>
+        <p:spPr>
+          <a:xfrm>
+            <a:off x="6571336" y="4087368"/>
+            <a:ext cx="310896" cy="310896"/>
+          </a:xfrm>
           <a:prstGeom prst="rect">
             <a:avLst/>
           </a:prstGeom>
@@ -5844,9 +7387,9 @@
               <a:buNone/>
             </a:pPr>
             <a:r>
-              <a:rPr lang="en-US" sz="1000" b="1" dirty="0">
-                <a:solidFill>
-                  <a:srgbClr val="FFFFFF"/>
+              <a:rPr lang="en-US" sz="900" b="1" dirty="0">
+                <a:solidFill>
+                  <a:srgbClr val="111111"/>
                 </a:solidFill>
                 <a:latin typeface="Pretendard" pitchFamily="34" charset="0"/>
                 <a:ea typeface="Pretendard" pitchFamily="34" charset="-122"/>
@@ -5854,13 +7397,13 @@
               </a:rPr>
               <a:t>08</a:t>
             </a:r>
-            <a:endParaRPr lang="en-US" sz="1000" dirty="0"/>
-          </a:p>
-        </p:txBody>
-      </p:sp>
-      <p:sp>
-        <p:nvSpPr>
-          <p:cNvPr id="36" name="Text 34"/>
+            <a:endParaRPr lang="en-US" sz="900" dirty="0"/>
+          </a:p>
+        </p:txBody>
+      </p:sp>
+      <p:sp>
+        <p:nvSpPr>
+          <p:cNvPr id="40" name="Text 38"/>
           <p:cNvSpPr/>
           <p:nvPr/>
         </p:nvSpPr>
@@ -5885,7 +7428,7 @@
             <a:r>
               <a:rPr lang="en-US" sz="1200" dirty="0">
                 <a:solidFill>
-                  <a:srgbClr val="14161B"/>
+                  <a:srgbClr val="111111"/>
                 </a:solidFill>
                 <a:latin typeface="Pretendard" pitchFamily="34" charset="0"/>
                 <a:ea typeface="Pretendard" pitchFamily="34" charset="-122"/>
@@ -5899,7 +7442,32 @@
       </p:sp>
       <p:sp>
         <p:nvSpPr>
-          <p:cNvPr id="37" name="Text 35"/>
+          <p:cNvPr id="41" name="Shape 39"/>
+          <p:cNvSpPr/>
+          <p:nvPr/>
+        </p:nvSpPr>
+        <p:spPr>
+          <a:xfrm>
+            <a:off x="640080" y="5468112"/>
+            <a:ext cx="10911535" cy="7315"/>
+          </a:xfrm>
+          <a:prstGeom prst="rect">
+            <a:avLst/>
+          </a:prstGeom>
+          <a:solidFill>
+            <a:srgbClr val="111111"/>
+          </a:solidFill>
+          <a:ln w="12700">
+            <a:solidFill>
+              <a:srgbClr val="111111"/>
+            </a:solidFill>
+            <a:prstDash val="solid"/>
+          </a:ln>
+        </p:spPr>
+      </p:sp>
+      <p:sp>
+        <p:nvSpPr>
+          <p:cNvPr id="42" name="Text 40"/>
           <p:cNvSpPr/>
           <p:nvPr/>
         </p:nvSpPr>
@@ -5924,7 +7492,7 @@
             <a:r>
               <a:rPr lang="en-US" sz="1250" b="1" dirty="0">
                 <a:solidFill>
-                  <a:srgbClr val="14161B"/>
+                  <a:srgbClr val="111111"/>
                 </a:solidFill>
                 <a:latin typeface="Pretendard" pitchFamily="34" charset="0"/>
                 <a:ea typeface="Pretendard" pitchFamily="34" charset="-122"/>
@@ -5938,14 +7506,39 @@
       </p:sp>
       <p:sp>
         <p:nvSpPr>
-          <p:cNvPr id="38" name="Text 36"/>
-          <p:cNvSpPr/>
-          <p:nvPr/>
-        </p:nvSpPr>
-        <p:spPr>
-          <a:xfrm>
-            <a:off x="640080" y="6345936"/>
-            <a:ext cx="7772400" cy="256032"/>
+          <p:cNvPr id="43" name="Shape 41"/>
+          <p:cNvSpPr/>
+          <p:nvPr/>
+        </p:nvSpPr>
+        <p:spPr>
+          <a:xfrm>
+            <a:off x="640080" y="6291072"/>
+            <a:ext cx="10911535" cy="7315"/>
+          </a:xfrm>
+          <a:prstGeom prst="rect">
+            <a:avLst/>
+          </a:prstGeom>
+          <a:solidFill>
+            <a:srgbClr val="DCDCDC"/>
+          </a:solidFill>
+          <a:ln w="12700">
+            <a:solidFill>
+              <a:srgbClr val="DCDCDC"/>
+            </a:solidFill>
+            <a:prstDash val="solid"/>
+          </a:ln>
+        </p:spPr>
+      </p:sp>
+      <p:sp>
+        <p:nvSpPr>
+          <p:cNvPr id="44" name="Text 42"/>
+          <p:cNvSpPr/>
+          <p:nvPr/>
+        </p:nvSpPr>
+        <p:spPr>
+          <a:xfrm>
+            <a:off x="640080" y="6382512"/>
+            <a:ext cx="7772400" cy="237744"/>
           </a:xfrm>
           <a:prstGeom prst="rect">
             <a:avLst/>
@@ -5961,9 +7554,9 @@
               <a:buNone/>
             </a:pPr>
             <a:r>
-              <a:rPr lang="en-US" sz="900" dirty="0">
-                <a:solidFill>
-                  <a:srgbClr val="9AA0AA"/>
+              <a:rPr lang="en-US" sz="850" spc="40" kern="0" dirty="0">
+                <a:solidFill>
+                  <a:srgbClr val="9B9B9B"/>
                 </a:solidFill>
                 <a:latin typeface="Pretendard" pitchFamily="34" charset="0"/>
                 <a:ea typeface="Pretendard" pitchFamily="34" charset="-122"/>
@@ -5971,20 +7564,20 @@
               </a:rPr>
               <a:t>포트폴리오제작 · 14주차 최종 리허설 및 동료 피드백</a:t>
             </a:r>
-            <a:endParaRPr lang="en-US" sz="900" dirty="0"/>
-          </a:p>
-        </p:txBody>
-      </p:sp>
-      <p:sp>
-        <p:nvSpPr>
-          <p:cNvPr id="39" name="Text 37"/>
-          <p:cNvSpPr/>
-          <p:nvPr/>
-        </p:nvSpPr>
-        <p:spPr>
-          <a:xfrm>
-            <a:off x="10454335" y="6345936"/>
-            <a:ext cx="1097280" cy="256032"/>
+            <a:endParaRPr lang="en-US" sz="850" dirty="0"/>
+          </a:p>
+        </p:txBody>
+      </p:sp>
+      <p:sp>
+        <p:nvSpPr>
+          <p:cNvPr id="45" name="Text 43"/>
+          <p:cNvSpPr/>
+          <p:nvPr/>
+        </p:nvSpPr>
+        <p:spPr>
+          <a:xfrm>
+            <a:off x="10271455" y="6382512"/>
+            <a:ext cx="1280160" cy="237744"/>
           </a:xfrm>
           <a:prstGeom prst="rect">
             <a:avLst/>
@@ -6000,17 +7593,17 @@
               <a:buNone/>
             </a:pPr>
             <a:r>
-              <a:rPr lang="en-US" sz="900" dirty="0">
-                <a:solidFill>
-                  <a:srgbClr val="9AA0AA"/>
-                </a:solidFill>
-                <a:latin typeface="Pretendard" pitchFamily="34" charset="0"/>
-                <a:ea typeface="Pretendard" pitchFamily="34" charset="-122"/>
-                <a:cs typeface="Pretendard" pitchFamily="34" charset="-120"/>
-              </a:rPr>
-              <a:t>04</a:t>
-            </a:r>
-            <a:endParaRPr lang="en-US" sz="900" dirty="0"/>
+              <a:rPr lang="en-US" sz="850" spc="140" kern="0" dirty="0">
+                <a:solidFill>
+                  <a:srgbClr val="9B9B9B"/>
+                </a:solidFill>
+                <a:latin typeface="Pretendard" pitchFamily="34" charset="0"/>
+                <a:ea typeface="Pretendard" pitchFamily="34" charset="-122"/>
+                <a:cs typeface="Pretendard" pitchFamily="34" charset="-120"/>
+              </a:rPr>
+              <a:t>P.04</a:t>
+            </a:r>
+            <a:endParaRPr lang="en-US" sz="850" dirty="0"/>
           </a:p>
         </p:txBody>
       </p:sp>
@@ -6054,8 +7647,8 @@
         </p:nvSpPr>
         <p:spPr>
           <a:xfrm>
-            <a:off x="640080" y="566928"/>
-            <a:ext cx="10911535" cy="237744"/>
+            <a:off x="640080" y="274320"/>
+            <a:ext cx="3657600" cy="219456"/>
           </a:xfrm>
           <a:prstGeom prst="rect">
             <a:avLst/>
@@ -6071,17 +7664,17 @@
               <a:buNone/>
             </a:pPr>
             <a:r>
-              <a:rPr lang="en-US" sz="1100" b="1" spc="140" kern="0" dirty="0">
-                <a:solidFill>
-                  <a:srgbClr val="FF4A1C"/>
-                </a:solidFill>
-                <a:latin typeface="Pretendard" pitchFamily="34" charset="0"/>
-                <a:ea typeface="Pretendard" pitchFamily="34" charset="-122"/>
-                <a:cs typeface="Pretendard" pitchFamily="34" charset="-120"/>
-              </a:rPr>
-              <a:t>PRIORITY</a:t>
-            </a:r>
-            <a:endParaRPr lang="en-US" sz="1100" dirty="0"/>
+              <a:rPr lang="en-US" sz="900" spc="120" kern="0" dirty="0">
+                <a:solidFill>
+                  <a:srgbClr val="8A8A8A"/>
+                </a:solidFill>
+                <a:latin typeface="Pretendard" pitchFamily="34" charset="0"/>
+                <a:ea typeface="Pretendard" pitchFamily="34" charset="-122"/>
+                <a:cs typeface="Pretendard" pitchFamily="34" charset="-120"/>
+              </a:rPr>
+              <a:t>포트폴리오제작</a:t>
+            </a:r>
+            <a:endParaRPr lang="en-US" sz="900" dirty="0"/>
           </a:p>
         </p:txBody>
       </p:sp>
@@ -6093,34 +7686,34 @@
         </p:nvSpPr>
         <p:spPr>
           <a:xfrm>
-            <a:off x="640080" y="859536"/>
-            <a:ext cx="10911535" cy="512064"/>
-          </a:xfrm>
-          <a:prstGeom prst="rect">
-            <a:avLst/>
-          </a:prstGeom>
-          <a:noFill/>
-          <a:ln/>
-        </p:spPr>
-        <p:txBody>
-          <a:bodyPr wrap="square" lIns="0" tIns="0" rIns="0" bIns="0" rtlCol="0" anchor="ctr"/>
-          <a:lstStyle/>
-          <a:p>
-            <a:pPr indent="0" marL="0">
-              <a:buNone/>
-            </a:pPr>
-            <a:r>
-              <a:rPr lang="en-US" sz="2800" b="1" dirty="0">
-                <a:solidFill>
-                  <a:srgbClr val="14161B"/>
-                </a:solidFill>
-                <a:latin typeface="Pretendard" pitchFamily="34" charset="0"/>
-                <a:ea typeface="Pretendard" pitchFamily="34" charset="-122"/>
-                <a:cs typeface="Pretendard" pitchFamily="34" charset="-120"/>
-              </a:rPr>
-              <a:t>보완 우선순위 정하기</a:t>
-            </a:r>
-            <a:endParaRPr lang="en-US" sz="2800" dirty="0"/>
+            <a:off x="4480560" y="274320"/>
+            <a:ext cx="4572000" cy="219456"/>
+          </a:xfrm>
+          <a:prstGeom prst="rect">
+            <a:avLst/>
+          </a:prstGeom>
+          <a:noFill/>
+          <a:ln/>
+        </p:spPr>
+        <p:txBody>
+          <a:bodyPr wrap="square" lIns="0" tIns="0" rIns="0" bIns="0" rtlCol="0" anchor="ctr"/>
+          <a:lstStyle/>
+          <a:p>
+            <a:pPr algn="ctr" indent="0" marL="0">
+              <a:buNone/>
+            </a:pPr>
+            <a:r>
+              <a:rPr lang="en-US" sz="900" spc="120" kern="0" dirty="0">
+                <a:solidFill>
+                  <a:srgbClr val="8A8A8A"/>
+                </a:solidFill>
+                <a:latin typeface="Pretendard" pitchFamily="34" charset="0"/>
+                <a:ea typeface="Pretendard" pitchFamily="34" charset="-122"/>
+                <a:cs typeface="Pretendard" pitchFamily="34" charset="-120"/>
+              </a:rPr>
+              <a:t>PHASE 3 완성과 발표</a:t>
+            </a:r>
+            <a:endParaRPr lang="en-US" sz="900" dirty="0"/>
           </a:p>
         </p:txBody>
       </p:sp>
@@ -6132,34 +7725,34 @@
         </p:nvSpPr>
         <p:spPr>
           <a:xfrm>
-            <a:off x="640080" y="1371600"/>
-            <a:ext cx="10911535" cy="237744"/>
-          </a:xfrm>
-          <a:prstGeom prst="rect">
-            <a:avLst/>
-          </a:prstGeom>
-          <a:noFill/>
-          <a:ln/>
-        </p:spPr>
-        <p:txBody>
-          <a:bodyPr wrap="square" lIns="0" tIns="0" rIns="0" bIns="0" rtlCol="0" anchor="ctr"/>
-          <a:lstStyle/>
-          <a:p>
-            <a:pPr indent="0" marL="0">
-              <a:buNone/>
-            </a:pPr>
-            <a:r>
-              <a:rPr lang="en-US" sz="1200" dirty="0">
-                <a:solidFill>
-                  <a:srgbClr val="6B7280"/>
-                </a:solidFill>
-                <a:latin typeface="Pretendard" pitchFamily="34" charset="0"/>
-                <a:ea typeface="Pretendard" pitchFamily="34" charset="-122"/>
-                <a:cs typeface="Pretendard" pitchFamily="34" charset="-120"/>
-              </a:rPr>
-              <a:t>받은 지적을 이 순서로 처리합니다.</a:t>
-            </a:r>
-            <a:endParaRPr lang="en-US" sz="1200" dirty="0"/>
+            <a:off x="8808415" y="274320"/>
+            <a:ext cx="2743200" cy="219456"/>
+          </a:xfrm>
+          <a:prstGeom prst="rect">
+            <a:avLst/>
+          </a:prstGeom>
+          <a:noFill/>
+          <a:ln/>
+        </p:spPr>
+        <p:txBody>
+          <a:bodyPr wrap="square" lIns="0" tIns="0" rIns="0" bIns="0" rtlCol="0" anchor="ctr"/>
+          <a:lstStyle/>
+          <a:p>
+            <a:pPr algn="r" indent="0" marL="0">
+              <a:buNone/>
+            </a:pPr>
+            <a:r>
+              <a:rPr lang="en-US" sz="900" spc="200" kern="0" dirty="0">
+                <a:solidFill>
+                  <a:srgbClr val="8A8A8A"/>
+                </a:solidFill>
+                <a:latin typeface="Pretendard" pitchFamily="34" charset="0"/>
+                <a:ea typeface="Pretendard" pitchFamily="34" charset="-122"/>
+                <a:cs typeface="Pretendard" pitchFamily="34" charset="-120"/>
+              </a:rPr>
+              <a:t>WEEK 14</a:t>
+            </a:r>
+            <a:endParaRPr lang="en-US" sz="900" dirty="0"/>
           </a:p>
         </p:txBody>
       </p:sp>
@@ -6171,20 +7764,18 @@
         </p:nvSpPr>
         <p:spPr>
           <a:xfrm>
-            <a:off x="640080" y="1737360"/>
-            <a:ext cx="3393338" cy="3035808"/>
-          </a:xfrm>
-          <a:prstGeom prst="roundRect">
-            <a:avLst>
-              <a:gd name="adj" fmla="val 2410"/>
-            </a:avLst>
+            <a:off x="640080" y="548640"/>
+            <a:ext cx="10911535" cy="7315"/>
+          </a:xfrm>
+          <a:prstGeom prst="rect">
+            <a:avLst/>
           </a:prstGeom>
           <a:solidFill>
-            <a:srgbClr val="14161B"/>
+            <a:srgbClr val="DCDCDC"/>
           </a:solidFill>
           <a:ln w="12700">
             <a:solidFill>
-              <a:srgbClr val="14161B"/>
+              <a:srgbClr val="DCDCDC"/>
             </a:solidFill>
             <a:prstDash val="solid"/>
           </a:ln>
@@ -6192,26 +7783,141 @@
       </p:sp>
       <p:sp>
         <p:nvSpPr>
-          <p:cNvPr id="6" name="Shape 4"/>
-          <p:cNvSpPr/>
-          <p:nvPr/>
-        </p:nvSpPr>
-        <p:spPr>
-          <a:xfrm>
-            <a:off x="1024128" y="2011680"/>
-            <a:ext cx="365760" cy="365760"/>
-          </a:xfrm>
-          <a:prstGeom prst="roundRect">
-            <a:avLst>
-              <a:gd name="adj" fmla="val 15000"/>
-            </a:avLst>
+          <p:cNvPr id="6" name="Text 4"/>
+          <p:cNvSpPr/>
+          <p:nvPr/>
+        </p:nvSpPr>
+        <p:spPr>
+          <a:xfrm>
+            <a:off x="640080" y="640080"/>
+            <a:ext cx="10911535" cy="219456"/>
+          </a:xfrm>
+          <a:prstGeom prst="rect">
+            <a:avLst/>
+          </a:prstGeom>
+          <a:noFill/>
+          <a:ln/>
+        </p:spPr>
+        <p:txBody>
+          <a:bodyPr wrap="square" lIns="0" tIns="0" rIns="0" bIns="0" rtlCol="0" anchor="ctr"/>
+          <a:lstStyle/>
+          <a:p>
+            <a:pPr indent="0" marL="0">
+              <a:buNone/>
+            </a:pPr>
+            <a:r>
+              <a:rPr lang="en-US" sz="950" spc="260" kern="0" dirty="0">
+                <a:solidFill>
+                  <a:srgbClr val="8A8A8A"/>
+                </a:solidFill>
+                <a:latin typeface="Pretendard" pitchFamily="34" charset="0"/>
+                <a:ea typeface="Pretendard" pitchFamily="34" charset="-122"/>
+                <a:cs typeface="Pretendard" pitchFamily="34" charset="-120"/>
+              </a:rPr>
+              <a:t>PRIORITY</a:t>
+            </a:r>
+            <a:endParaRPr lang="en-US" sz="950" dirty="0"/>
+          </a:p>
+        </p:txBody>
+      </p:sp>
+      <p:sp>
+        <p:nvSpPr>
+          <p:cNvPr id="7" name="Text 5"/>
+          <p:cNvSpPr/>
+          <p:nvPr/>
+        </p:nvSpPr>
+        <p:spPr>
+          <a:xfrm>
+            <a:off x="640080" y="859536"/>
+            <a:ext cx="10911535" cy="475488"/>
+          </a:xfrm>
+          <a:prstGeom prst="rect">
+            <a:avLst/>
+          </a:prstGeom>
+          <a:noFill/>
+          <a:ln/>
+        </p:spPr>
+        <p:txBody>
+          <a:bodyPr wrap="square" lIns="0" tIns="0" rIns="0" bIns="0" rtlCol="0" anchor="ctr"/>
+          <a:lstStyle/>
+          <a:p>
+            <a:pPr indent="0" marL="0">
+              <a:buNone/>
+            </a:pPr>
+            <a:r>
+              <a:rPr lang="en-US" sz="3000" dirty="0">
+                <a:solidFill>
+                  <a:srgbClr val="111111"/>
+                </a:solidFill>
+                <a:latin typeface="Pretendard Black" pitchFamily="34" charset="0"/>
+                <a:ea typeface="Pretendard Black" pitchFamily="34" charset="-122"/>
+                <a:cs typeface="Pretendard Black" pitchFamily="34" charset="-120"/>
+              </a:rPr>
+              <a:t>보완 우선순위 정하기</a:t>
+            </a:r>
+            <a:endParaRPr lang="en-US" sz="3000" dirty="0"/>
+          </a:p>
+        </p:txBody>
+      </p:sp>
+      <p:sp>
+        <p:nvSpPr>
+          <p:cNvPr id="8" name="Text 6"/>
+          <p:cNvSpPr/>
+          <p:nvPr/>
+        </p:nvSpPr>
+        <p:spPr>
+          <a:xfrm>
+            <a:off x="640080" y="1371600"/>
+            <a:ext cx="10911535" cy="219456"/>
+          </a:xfrm>
+          <a:prstGeom prst="rect">
+            <a:avLst/>
+          </a:prstGeom>
+          <a:noFill/>
+          <a:ln/>
+        </p:spPr>
+        <p:txBody>
+          <a:bodyPr wrap="square" lIns="0" tIns="0" rIns="0" bIns="0" rtlCol="0" anchor="ctr"/>
+          <a:lstStyle/>
+          <a:p>
+            <a:pPr indent="0" marL="0">
+              <a:buNone/>
+            </a:pPr>
+            <a:r>
+              <a:rPr lang="en-US" sz="1150" dirty="0">
+                <a:solidFill>
+                  <a:srgbClr val="6E6E6E"/>
+                </a:solidFill>
+                <a:latin typeface="Pretendard" pitchFamily="34" charset="0"/>
+                <a:ea typeface="Pretendard" pitchFamily="34" charset="-122"/>
+                <a:cs typeface="Pretendard" pitchFamily="34" charset="-120"/>
+              </a:rPr>
+              <a:t>받은 지적을 이 순서로 처리합니다.</a:t>
+            </a:r>
+            <a:endParaRPr lang="en-US" sz="1150" dirty="0"/>
+          </a:p>
+        </p:txBody>
+      </p:sp>
+      <p:sp>
+        <p:nvSpPr>
+          <p:cNvPr id="9" name="Shape 7"/>
+          <p:cNvSpPr/>
+          <p:nvPr/>
+        </p:nvSpPr>
+        <p:spPr>
+          <a:xfrm>
+            <a:off x="640080" y="1737360"/>
+            <a:ext cx="3393338" cy="3035808"/>
+          </a:xfrm>
+          <a:prstGeom prst="rect">
+            <a:avLst/>
           </a:prstGeom>
           <a:solidFill>
-            <a:srgbClr val="FF4A1C"/>
+            <a:srgbClr val="111111"/>
           </a:solidFill>
-          <a:ln w="6350">
+          <a:ln w="12700">
             <a:solidFill>
-              <a:srgbClr val="FF4A1C"/>
+              <a:srgbClr val="111111"/>
             </a:solidFill>
             <a:prstDash val="solid"/>
           </a:ln>
@@ -6219,7 +7925,7 @@
       </p:sp>
       <p:sp>
         <p:nvSpPr>
-          <p:cNvPr id="7" name="Text 5"/>
+          <p:cNvPr id="10" name="Shape 8"/>
           <p:cNvSpPr/>
           <p:nvPr/>
         </p:nvSpPr>
@@ -6228,6 +7934,31 @@
             <a:off x="1024128" y="2011680"/>
             <a:ext cx="365760" cy="365760"/>
           </a:xfrm>
+          <a:prstGeom prst="ellipse">
+            <a:avLst/>
+          </a:prstGeom>
+          <a:solidFill>
+            <a:srgbClr val="111111"/>
+          </a:solidFill>
+          <a:ln w="12700">
+            <a:solidFill>
+              <a:srgbClr val="FFFFFF"/>
+            </a:solidFill>
+            <a:prstDash val="solid"/>
+          </a:ln>
+        </p:spPr>
+      </p:sp>
+      <p:sp>
+        <p:nvSpPr>
+          <p:cNvPr id="11" name="Text 9"/>
+          <p:cNvSpPr/>
+          <p:nvPr/>
+        </p:nvSpPr>
+        <p:spPr>
+          <a:xfrm>
+            <a:off x="1024128" y="2011680"/>
+            <a:ext cx="365760" cy="365760"/>
+          </a:xfrm>
           <a:prstGeom prst="rect">
             <a:avLst/>
           </a:prstGeom>
@@ -6242,7 +7973,7 @@
               <a:buNone/>
             </a:pPr>
             <a:r>
-              <a:rPr lang="en-US" sz="1200" b="1" dirty="0">
+              <a:rPr lang="en-US" sz="1150" b="1" dirty="0">
                 <a:solidFill>
                   <a:srgbClr val="FFFFFF"/>
                 </a:solidFill>
@@ -6252,13 +7983,13 @@
               </a:rPr>
               <a:t>01</a:t>
             </a:r>
-            <a:endParaRPr lang="en-US" sz="1200" dirty="0"/>
-          </a:p>
-        </p:txBody>
-      </p:sp>
-      <p:sp>
-        <p:nvSpPr>
-          <p:cNvPr id="8" name="Text 6"/>
+            <a:endParaRPr lang="en-US" sz="1150" dirty="0"/>
+          </a:p>
+        </p:txBody>
+      </p:sp>
+      <p:sp>
+        <p:nvSpPr>
+          <p:cNvPr id="12" name="Text 10"/>
           <p:cNvSpPr/>
           <p:nvPr/>
         </p:nvSpPr>
@@ -6284,13 +8015,13 @@
               <a:buNone/>
             </a:pPr>
             <a:r>
-              <a:rPr lang="en-US" sz="1700" b="1" dirty="0">
+              <a:rPr lang="en-US" sz="1700" dirty="0">
                 <a:solidFill>
                   <a:srgbClr val="FFFFFF"/>
                 </a:solidFill>
-                <a:latin typeface="Pretendard" pitchFamily="34" charset="0"/>
-                <a:ea typeface="Pretendard" pitchFamily="34" charset="-122"/>
-                <a:cs typeface="Pretendard" pitchFamily="34" charset="-120"/>
+                <a:latin typeface="Pretendard Black" pitchFamily="34" charset="0"/>
+                <a:ea typeface="Pretendard Black" pitchFamily="34" charset="-122"/>
+                <a:cs typeface="Pretendard Black" pitchFamily="34" charset="-120"/>
               </a:rPr>
               <a:t>판단에 영향을 주는 것</a:t>
             </a:r>
@@ -6300,7 +8031,7 @@
       </p:sp>
       <p:sp>
         <p:nvSpPr>
-          <p:cNvPr id="9" name="Text 7"/>
+          <p:cNvPr id="13" name="Text 11"/>
           <p:cNvSpPr/>
           <p:nvPr/>
         </p:nvSpPr>
@@ -6328,7 +8059,7 @@
             <a:r>
               <a:rPr lang="en-US" sz="1150" dirty="0">
                 <a:solidFill>
-                  <a:srgbClr val="AEB4BF"/>
+                  <a:srgbClr val="B8B8B8"/>
                 </a:solidFill>
                 <a:latin typeface="Pretendard" pitchFamily="34" charset="0"/>
                 <a:ea typeface="Pretendard" pitchFamily="34" charset="-122"/>
@@ -6342,7 +8073,7 @@
       </p:sp>
       <p:sp>
         <p:nvSpPr>
-          <p:cNvPr id="10" name="Shape 8"/>
+          <p:cNvPr id="14" name="Shape 12"/>
           <p:cNvSpPr/>
           <p:nvPr/>
         </p:nvSpPr>
@@ -6351,17 +8082,15 @@
             <a:off x="4399178" y="1737360"/>
             <a:ext cx="3393338" cy="3035808"/>
           </a:xfrm>
-          <a:prstGeom prst="roundRect">
-            <a:avLst>
-              <a:gd name="adj" fmla="val 2410"/>
-            </a:avLst>
+          <a:prstGeom prst="rect">
+            <a:avLst/>
           </a:prstGeom>
           <a:solidFill>
-            <a:srgbClr val="F4F5F7"/>
+            <a:srgbClr val="FFFFFF"/>
           </a:solidFill>
           <a:ln w="12700">
             <a:solidFill>
-              <a:srgbClr val="E4E6EB"/>
+              <a:srgbClr val="DCDCDC"/>
             </a:solidFill>
             <a:prstDash val="solid"/>
           </a:ln>
@@ -6369,7 +8098,7 @@
       </p:sp>
       <p:sp>
         <p:nvSpPr>
-          <p:cNvPr id="11" name="Shape 9"/>
+          <p:cNvPr id="15" name="Shape 13"/>
           <p:cNvSpPr/>
           <p:nvPr/>
         </p:nvSpPr>
@@ -6378,17 +8107,15 @@
             <a:off x="4783226" y="2011680"/>
             <a:ext cx="365760" cy="365760"/>
           </a:xfrm>
-          <a:prstGeom prst="roundRect">
-            <a:avLst>
-              <a:gd name="adj" fmla="val 15000"/>
-            </a:avLst>
+          <a:prstGeom prst="ellipse">
+            <a:avLst/>
           </a:prstGeom>
           <a:solidFill>
-            <a:srgbClr val="14161B"/>
+            <a:srgbClr val="FFFFFF"/>
           </a:solidFill>
-          <a:ln w="6350">
+          <a:ln w="12700">
             <a:solidFill>
-              <a:srgbClr val="14161B"/>
+              <a:srgbClr val="111111"/>
             </a:solidFill>
             <a:prstDash val="solid"/>
           </a:ln>
@@ -6396,7 +8123,7 @@
       </p:sp>
       <p:sp>
         <p:nvSpPr>
-          <p:cNvPr id="12" name="Text 10"/>
+          <p:cNvPr id="16" name="Text 14"/>
           <p:cNvSpPr/>
           <p:nvPr/>
         </p:nvSpPr>
@@ -6419,9 +8146,9 @@
               <a:buNone/>
             </a:pPr>
             <a:r>
-              <a:rPr lang="en-US" sz="1200" b="1" dirty="0">
-                <a:solidFill>
-                  <a:srgbClr val="FFFFFF"/>
+              <a:rPr lang="en-US" sz="1150" b="1" dirty="0">
+                <a:solidFill>
+                  <a:srgbClr val="111111"/>
                 </a:solidFill>
                 <a:latin typeface="Pretendard" pitchFamily="34" charset="0"/>
                 <a:ea typeface="Pretendard" pitchFamily="34" charset="-122"/>
@@ -6429,13 +8156,13 @@
               </a:rPr>
               <a:t>02</a:t>
             </a:r>
-            <a:endParaRPr lang="en-US" sz="1200" dirty="0"/>
-          </a:p>
-        </p:txBody>
-      </p:sp>
-      <p:sp>
-        <p:nvSpPr>
-          <p:cNvPr id="13" name="Text 11"/>
+            <a:endParaRPr lang="en-US" sz="1150" dirty="0"/>
+          </a:p>
+        </p:txBody>
+      </p:sp>
+      <p:sp>
+        <p:nvSpPr>
+          <p:cNvPr id="17" name="Text 15"/>
           <p:cNvSpPr/>
           <p:nvPr/>
         </p:nvSpPr>
@@ -6461,13 +8188,13 @@
               <a:buNone/>
             </a:pPr>
             <a:r>
-              <a:rPr lang="en-US" sz="1700" b="1" dirty="0">
-                <a:solidFill>
-                  <a:srgbClr val="14161B"/>
-                </a:solidFill>
-                <a:latin typeface="Pretendard" pitchFamily="34" charset="0"/>
-                <a:ea typeface="Pretendard" pitchFamily="34" charset="-122"/>
-                <a:cs typeface="Pretendard" pitchFamily="34" charset="-120"/>
+              <a:rPr lang="en-US" sz="1700" dirty="0">
+                <a:solidFill>
+                  <a:srgbClr val="111111"/>
+                </a:solidFill>
+                <a:latin typeface="Pretendard Black" pitchFamily="34" charset="0"/>
+                <a:ea typeface="Pretendard Black" pitchFamily="34" charset="-122"/>
+                <a:cs typeface="Pretendard Black" pitchFamily="34" charset="-120"/>
               </a:rPr>
               <a:t>완성도에 관한 것</a:t>
             </a:r>
@@ -6477,7 +8204,7 @@
       </p:sp>
       <p:sp>
         <p:nvSpPr>
-          <p:cNvPr id="14" name="Text 12"/>
+          <p:cNvPr id="18" name="Text 16"/>
           <p:cNvSpPr/>
           <p:nvPr/>
         </p:nvSpPr>
@@ -6505,7 +8232,7 @@
             <a:r>
               <a:rPr lang="en-US" sz="1150" dirty="0">
                 <a:solidFill>
-                  <a:srgbClr val="6B7280"/>
+                  <a:srgbClr val="6E6E6E"/>
                 </a:solidFill>
                 <a:latin typeface="Pretendard" pitchFamily="34" charset="0"/>
                 <a:ea typeface="Pretendard" pitchFamily="34" charset="-122"/>
@@ -6519,7 +8246,7 @@
       </p:sp>
       <p:sp>
         <p:nvSpPr>
-          <p:cNvPr id="15" name="Shape 13"/>
+          <p:cNvPr id="19" name="Shape 17"/>
           <p:cNvSpPr/>
           <p:nvPr/>
         </p:nvSpPr>
@@ -6528,17 +8255,15 @@
             <a:off x="8158277" y="1737360"/>
             <a:ext cx="3393338" cy="3035808"/>
           </a:xfrm>
-          <a:prstGeom prst="roundRect">
-            <a:avLst>
-              <a:gd name="adj" fmla="val 2410"/>
-            </a:avLst>
+          <a:prstGeom prst="rect">
+            <a:avLst/>
           </a:prstGeom>
           <a:solidFill>
-            <a:srgbClr val="F4F5F7"/>
+            <a:srgbClr val="FFFFFF"/>
           </a:solidFill>
           <a:ln w="12700">
             <a:solidFill>
-              <a:srgbClr val="E4E6EB"/>
+              <a:srgbClr val="DCDCDC"/>
             </a:solidFill>
             <a:prstDash val="solid"/>
           </a:ln>
@@ -6546,7 +8271,7 @@
       </p:sp>
       <p:sp>
         <p:nvSpPr>
-          <p:cNvPr id="16" name="Shape 14"/>
+          <p:cNvPr id="20" name="Shape 18"/>
           <p:cNvSpPr/>
           <p:nvPr/>
         </p:nvSpPr>
@@ -6555,17 +8280,15 @@
             <a:off x="8542325" y="2011680"/>
             <a:ext cx="365760" cy="365760"/>
           </a:xfrm>
-          <a:prstGeom prst="roundRect">
-            <a:avLst>
-              <a:gd name="adj" fmla="val 15000"/>
-            </a:avLst>
+          <a:prstGeom prst="ellipse">
+            <a:avLst/>
           </a:prstGeom>
           <a:solidFill>
-            <a:srgbClr val="14161B"/>
+            <a:srgbClr val="FFFFFF"/>
           </a:solidFill>
-          <a:ln w="6350">
+          <a:ln w="12700">
             <a:solidFill>
-              <a:srgbClr val="14161B"/>
+              <a:srgbClr val="111111"/>
             </a:solidFill>
             <a:prstDash val="solid"/>
           </a:ln>
@@ -6573,7 +8296,7 @@
       </p:sp>
       <p:sp>
         <p:nvSpPr>
-          <p:cNvPr id="17" name="Text 15"/>
+          <p:cNvPr id="21" name="Text 19"/>
           <p:cNvSpPr/>
           <p:nvPr/>
         </p:nvSpPr>
@@ -6596,9 +8319,9 @@
               <a:buNone/>
             </a:pPr>
             <a:r>
-              <a:rPr lang="en-US" sz="1200" b="1" dirty="0">
-                <a:solidFill>
-                  <a:srgbClr val="FFFFFF"/>
+              <a:rPr lang="en-US" sz="1150" b="1" dirty="0">
+                <a:solidFill>
+                  <a:srgbClr val="111111"/>
                 </a:solidFill>
                 <a:latin typeface="Pretendard" pitchFamily="34" charset="0"/>
                 <a:ea typeface="Pretendard" pitchFamily="34" charset="-122"/>
@@ -6606,13 +8329,13 @@
               </a:rPr>
               <a:t>03</a:t>
             </a:r>
-            <a:endParaRPr lang="en-US" sz="1200" dirty="0"/>
-          </a:p>
-        </p:txBody>
-      </p:sp>
-      <p:sp>
-        <p:nvSpPr>
-          <p:cNvPr id="18" name="Text 16"/>
+            <a:endParaRPr lang="en-US" sz="1150" dirty="0"/>
+          </a:p>
+        </p:txBody>
+      </p:sp>
+      <p:sp>
+        <p:nvSpPr>
+          <p:cNvPr id="22" name="Text 20"/>
           <p:cNvSpPr/>
           <p:nvPr/>
         </p:nvSpPr>
@@ -6638,13 +8361,13 @@
               <a:buNone/>
             </a:pPr>
             <a:r>
-              <a:rPr lang="en-US" sz="1700" b="1" dirty="0">
-                <a:solidFill>
-                  <a:srgbClr val="14161B"/>
-                </a:solidFill>
-                <a:latin typeface="Pretendard" pitchFamily="34" charset="0"/>
-                <a:ea typeface="Pretendard" pitchFamily="34" charset="-122"/>
-                <a:cs typeface="Pretendard" pitchFamily="34" charset="-120"/>
+              <a:rPr lang="en-US" sz="1700" dirty="0">
+                <a:solidFill>
+                  <a:srgbClr val="111111"/>
+                </a:solidFill>
+                <a:latin typeface="Pretendard Black" pitchFamily="34" charset="0"/>
+                <a:ea typeface="Pretendard Black" pitchFamily="34" charset="-122"/>
+                <a:cs typeface="Pretendard Black" pitchFamily="34" charset="-120"/>
               </a:rPr>
               <a:t>취향에 관한 것</a:t>
             </a:r>
@@ -6654,7 +8377,7 @@
       </p:sp>
       <p:sp>
         <p:nvSpPr>
-          <p:cNvPr id="19" name="Text 17"/>
+          <p:cNvPr id="23" name="Text 21"/>
           <p:cNvSpPr/>
           <p:nvPr/>
         </p:nvSpPr>
@@ -6682,7 +8405,7 @@
             <a:r>
               <a:rPr lang="en-US" sz="1150" dirty="0">
                 <a:solidFill>
-                  <a:srgbClr val="6B7280"/>
+                  <a:srgbClr val="6E6E6E"/>
                 </a:solidFill>
                 <a:latin typeface="Pretendard" pitchFamily="34" charset="0"/>
                 <a:ea typeface="Pretendard" pitchFamily="34" charset="-122"/>
@@ -6696,13 +8419,38 @@
       </p:sp>
       <p:sp>
         <p:nvSpPr>
-          <p:cNvPr id="20" name="Text 18"/>
-          <p:cNvSpPr/>
-          <p:nvPr/>
-        </p:nvSpPr>
-        <p:spPr>
-          <a:xfrm>
-            <a:off x="640080" y="5138928"/>
+          <p:cNvPr id="24" name="Shape 22"/>
+          <p:cNvSpPr/>
+          <p:nvPr/>
+        </p:nvSpPr>
+        <p:spPr>
+          <a:xfrm>
+            <a:off x="640080" y="5084064"/>
+            <a:ext cx="10911535" cy="7315"/>
+          </a:xfrm>
+          <a:prstGeom prst="rect">
+            <a:avLst/>
+          </a:prstGeom>
+          <a:solidFill>
+            <a:srgbClr val="111111"/>
+          </a:solidFill>
+          <a:ln w="12700">
+            <a:solidFill>
+              <a:srgbClr val="111111"/>
+            </a:solidFill>
+            <a:prstDash val="solid"/>
+          </a:ln>
+        </p:spPr>
+      </p:sp>
+      <p:sp>
+        <p:nvSpPr>
+          <p:cNvPr id="25" name="Text 23"/>
+          <p:cNvSpPr/>
+          <p:nvPr/>
+        </p:nvSpPr>
+        <p:spPr>
+          <a:xfrm>
+            <a:off x="640080" y="5193792"/>
             <a:ext cx="10911535" cy="438912"/>
           </a:xfrm>
           <a:prstGeom prst="rect">
@@ -6724,7 +8472,7 @@
             <a:r>
               <a:rPr lang="en-US" sz="1300" b="1" dirty="0">
                 <a:solidFill>
-                  <a:srgbClr val="FF4A1C"/>
+                  <a:srgbClr val="111111"/>
                 </a:solidFill>
                 <a:latin typeface="Pretendard" pitchFamily="34" charset="0"/>
                 <a:ea typeface="Pretendard" pitchFamily="34" charset="-122"/>
@@ -6738,14 +8486,39 @@
       </p:sp>
       <p:sp>
         <p:nvSpPr>
-          <p:cNvPr id="21" name="Text 19"/>
-          <p:cNvSpPr/>
-          <p:nvPr/>
-        </p:nvSpPr>
-        <p:spPr>
-          <a:xfrm>
-            <a:off x="640080" y="6345936"/>
-            <a:ext cx="7772400" cy="256032"/>
+          <p:cNvPr id="26" name="Shape 24"/>
+          <p:cNvSpPr/>
+          <p:nvPr/>
+        </p:nvSpPr>
+        <p:spPr>
+          <a:xfrm>
+            <a:off x="640080" y="6291072"/>
+            <a:ext cx="10911535" cy="7315"/>
+          </a:xfrm>
+          <a:prstGeom prst="rect">
+            <a:avLst/>
+          </a:prstGeom>
+          <a:solidFill>
+            <a:srgbClr val="DCDCDC"/>
+          </a:solidFill>
+          <a:ln w="12700">
+            <a:solidFill>
+              <a:srgbClr val="DCDCDC"/>
+            </a:solidFill>
+            <a:prstDash val="solid"/>
+          </a:ln>
+        </p:spPr>
+      </p:sp>
+      <p:sp>
+        <p:nvSpPr>
+          <p:cNvPr id="27" name="Text 25"/>
+          <p:cNvSpPr/>
+          <p:nvPr/>
+        </p:nvSpPr>
+        <p:spPr>
+          <a:xfrm>
+            <a:off x="640080" y="6382512"/>
+            <a:ext cx="7772400" cy="237744"/>
           </a:xfrm>
           <a:prstGeom prst="rect">
             <a:avLst/>
@@ -6761,9 +8534,9 @@
               <a:buNone/>
             </a:pPr>
             <a:r>
-              <a:rPr lang="en-US" sz="900" dirty="0">
-                <a:solidFill>
-                  <a:srgbClr val="9AA0AA"/>
+              <a:rPr lang="en-US" sz="850" spc="40" kern="0" dirty="0">
+                <a:solidFill>
+                  <a:srgbClr val="9B9B9B"/>
                 </a:solidFill>
                 <a:latin typeface="Pretendard" pitchFamily="34" charset="0"/>
                 <a:ea typeface="Pretendard" pitchFamily="34" charset="-122"/>
@@ -6771,20 +8544,20 @@
               </a:rPr>
               <a:t>포트폴리오제작 · 14주차 최종 리허설 및 동료 피드백</a:t>
             </a:r>
-            <a:endParaRPr lang="en-US" sz="900" dirty="0"/>
-          </a:p>
-        </p:txBody>
-      </p:sp>
-      <p:sp>
-        <p:nvSpPr>
-          <p:cNvPr id="22" name="Text 20"/>
-          <p:cNvSpPr/>
-          <p:nvPr/>
-        </p:nvSpPr>
-        <p:spPr>
-          <a:xfrm>
-            <a:off x="10454335" y="6345936"/>
-            <a:ext cx="1097280" cy="256032"/>
+            <a:endParaRPr lang="en-US" sz="850" dirty="0"/>
+          </a:p>
+        </p:txBody>
+      </p:sp>
+      <p:sp>
+        <p:nvSpPr>
+          <p:cNvPr id="28" name="Text 26"/>
+          <p:cNvSpPr/>
+          <p:nvPr/>
+        </p:nvSpPr>
+        <p:spPr>
+          <a:xfrm>
+            <a:off x="10271455" y="6382512"/>
+            <a:ext cx="1280160" cy="237744"/>
           </a:xfrm>
           <a:prstGeom prst="rect">
             <a:avLst/>
@@ -6800,17 +8573,17 @@
               <a:buNone/>
             </a:pPr>
             <a:r>
-              <a:rPr lang="en-US" sz="900" dirty="0">
-                <a:solidFill>
-                  <a:srgbClr val="9AA0AA"/>
-                </a:solidFill>
-                <a:latin typeface="Pretendard" pitchFamily="34" charset="0"/>
-                <a:ea typeface="Pretendard" pitchFamily="34" charset="-122"/>
-                <a:cs typeface="Pretendard" pitchFamily="34" charset="-120"/>
-              </a:rPr>
-              <a:t>05</a:t>
-            </a:r>
-            <a:endParaRPr lang="en-US" sz="900" dirty="0"/>
+              <a:rPr lang="en-US" sz="850" spc="140" kern="0" dirty="0">
+                <a:solidFill>
+                  <a:srgbClr val="9B9B9B"/>
+                </a:solidFill>
+                <a:latin typeface="Pretendard" pitchFamily="34" charset="0"/>
+                <a:ea typeface="Pretendard" pitchFamily="34" charset="-122"/>
+                <a:cs typeface="Pretendard" pitchFamily="34" charset="-120"/>
+              </a:rPr>
+              <a:t>P.05</a:t>
+            </a:r>
+            <a:endParaRPr lang="en-US" sz="850" dirty="0"/>
           </a:p>
         </p:txBody>
       </p:sp>
@@ -6854,8 +8627,8 @@
         </p:nvSpPr>
         <p:spPr>
           <a:xfrm>
-            <a:off x="640080" y="566928"/>
-            <a:ext cx="10911535" cy="237744"/>
+            <a:off x="640080" y="274320"/>
+            <a:ext cx="3657600" cy="219456"/>
           </a:xfrm>
           <a:prstGeom prst="rect">
             <a:avLst/>
@@ -6871,17 +8644,17 @@
               <a:buNone/>
             </a:pPr>
             <a:r>
-              <a:rPr lang="en-US" sz="1100" b="1" spc="140" kern="0" dirty="0">
-                <a:solidFill>
-                  <a:srgbClr val="FF4A1C"/>
-                </a:solidFill>
-                <a:latin typeface="Pretendard" pitchFamily="34" charset="0"/>
-                <a:ea typeface="Pretendard" pitchFamily="34" charset="-122"/>
-                <a:cs typeface="Pretendard" pitchFamily="34" charset="-120"/>
-              </a:rPr>
-              <a:t>HOMEWORK</a:t>
-            </a:r>
-            <a:endParaRPr lang="en-US" sz="1100" dirty="0"/>
+              <a:rPr lang="en-US" sz="900" spc="120" kern="0" dirty="0">
+                <a:solidFill>
+                  <a:srgbClr val="8A8A8A"/>
+                </a:solidFill>
+                <a:latin typeface="Pretendard" pitchFamily="34" charset="0"/>
+                <a:ea typeface="Pretendard" pitchFamily="34" charset="-122"/>
+                <a:cs typeface="Pretendard" pitchFamily="34" charset="-120"/>
+              </a:rPr>
+              <a:t>포트폴리오제작</a:t>
+            </a:r>
+            <a:endParaRPr lang="en-US" sz="900" dirty="0"/>
           </a:p>
         </p:txBody>
       </p:sp>
@@ -6893,34 +8666,34 @@
         </p:nvSpPr>
         <p:spPr>
           <a:xfrm>
-            <a:off x="640080" y="859536"/>
-            <a:ext cx="10911535" cy="512064"/>
-          </a:xfrm>
-          <a:prstGeom prst="rect">
-            <a:avLst/>
-          </a:prstGeom>
-          <a:noFill/>
-          <a:ln/>
-        </p:spPr>
-        <p:txBody>
-          <a:bodyPr wrap="square" lIns="0" tIns="0" rIns="0" bIns="0" rtlCol="0" anchor="ctr"/>
-          <a:lstStyle/>
-          <a:p>
-            <a:pPr indent="0" marL="0">
-              <a:buNone/>
-            </a:pPr>
-            <a:r>
-              <a:rPr lang="en-US" sz="2800" b="1" dirty="0">
-                <a:solidFill>
-                  <a:srgbClr val="14161B"/>
-                </a:solidFill>
-                <a:latin typeface="Pretendard" pitchFamily="34" charset="0"/>
-                <a:ea typeface="Pretendard" pitchFamily="34" charset="-122"/>
-                <a:cs typeface="Pretendard" pitchFamily="34" charset="-120"/>
-              </a:rPr>
-              <a:t>과제와 다음 주</a:t>
-            </a:r>
-            <a:endParaRPr lang="en-US" sz="2800" dirty="0"/>
+            <a:off x="4480560" y="274320"/>
+            <a:ext cx="4572000" cy="219456"/>
+          </a:xfrm>
+          <a:prstGeom prst="rect">
+            <a:avLst/>
+          </a:prstGeom>
+          <a:noFill/>
+          <a:ln/>
+        </p:spPr>
+        <p:txBody>
+          <a:bodyPr wrap="square" lIns="0" tIns="0" rIns="0" bIns="0" rtlCol="0" anchor="ctr"/>
+          <a:lstStyle/>
+          <a:p>
+            <a:pPr algn="ctr" indent="0" marL="0">
+              <a:buNone/>
+            </a:pPr>
+            <a:r>
+              <a:rPr lang="en-US" sz="900" spc="120" kern="0" dirty="0">
+                <a:solidFill>
+                  <a:srgbClr val="8A8A8A"/>
+                </a:solidFill>
+                <a:latin typeface="Pretendard" pitchFamily="34" charset="0"/>
+                <a:ea typeface="Pretendard" pitchFamily="34" charset="-122"/>
+                <a:cs typeface="Pretendard" pitchFamily="34" charset="-120"/>
+              </a:rPr>
+              <a:t>PHASE 3 완성과 발표</a:t>
+            </a:r>
+            <a:endParaRPr lang="en-US" sz="900" dirty="0"/>
           </a:p>
         </p:txBody>
       </p:sp>
@@ -6932,34 +8705,34 @@
         </p:nvSpPr>
         <p:spPr>
           <a:xfrm>
-            <a:off x="640080" y="1371600"/>
-            <a:ext cx="10911535" cy="237744"/>
-          </a:xfrm>
-          <a:prstGeom prst="rect">
-            <a:avLst/>
-          </a:prstGeom>
-          <a:noFill/>
-          <a:ln/>
-        </p:spPr>
-        <p:txBody>
-          <a:bodyPr wrap="square" lIns="0" tIns="0" rIns="0" bIns="0" rtlCol="0" anchor="ctr"/>
-          <a:lstStyle/>
-          <a:p>
-            <a:pPr indent="0" marL="0">
-              <a:buNone/>
-            </a:pPr>
-            <a:r>
-              <a:rPr lang="en-US" sz="1200" dirty="0">
-                <a:solidFill>
-                  <a:srgbClr val="6B7280"/>
-                </a:solidFill>
-                <a:latin typeface="Pretendard" pitchFamily="34" charset="0"/>
-                <a:ea typeface="Pretendard" pitchFamily="34" charset="-122"/>
-                <a:cs typeface="Pretendard" pitchFamily="34" charset="-120"/>
-              </a:rPr>
-              <a:t>다음 주가 마지막입니다.</a:t>
-            </a:r>
-            <a:endParaRPr lang="en-US" sz="1200" dirty="0"/>
+            <a:off x="8808415" y="274320"/>
+            <a:ext cx="2743200" cy="219456"/>
+          </a:xfrm>
+          <a:prstGeom prst="rect">
+            <a:avLst/>
+          </a:prstGeom>
+          <a:noFill/>
+          <a:ln/>
+        </p:spPr>
+        <p:txBody>
+          <a:bodyPr wrap="square" lIns="0" tIns="0" rIns="0" bIns="0" rtlCol="0" anchor="ctr"/>
+          <a:lstStyle/>
+          <a:p>
+            <a:pPr algn="r" indent="0" marL="0">
+              <a:buNone/>
+            </a:pPr>
+            <a:r>
+              <a:rPr lang="en-US" sz="900" spc="200" kern="0" dirty="0">
+                <a:solidFill>
+                  <a:srgbClr val="8A8A8A"/>
+                </a:solidFill>
+                <a:latin typeface="Pretendard" pitchFamily="34" charset="0"/>
+                <a:ea typeface="Pretendard" pitchFamily="34" charset="-122"/>
+                <a:cs typeface="Pretendard" pitchFamily="34" charset="-120"/>
+              </a:rPr>
+              <a:t>WEEK 14</a:t>
+            </a:r>
+            <a:endParaRPr lang="en-US" sz="900" dirty="0"/>
           </a:p>
         </p:txBody>
       </p:sp>
@@ -6971,20 +8744,18 @@
         </p:nvSpPr>
         <p:spPr>
           <a:xfrm>
-            <a:off x="640080" y="1719072"/>
-            <a:ext cx="6309360" cy="896112"/>
-          </a:xfrm>
-          <a:prstGeom prst="roundRect">
-            <a:avLst>
-              <a:gd name="adj" fmla="val 8163"/>
-            </a:avLst>
+            <a:off x="640080" y="548640"/>
+            <a:ext cx="10911535" cy="7315"/>
+          </a:xfrm>
+          <a:prstGeom prst="rect">
+            <a:avLst/>
           </a:prstGeom>
           <a:solidFill>
-            <a:srgbClr val="F4F5F7"/>
+            <a:srgbClr val="DCDCDC"/>
           </a:solidFill>
           <a:ln w="12700">
             <a:solidFill>
-              <a:srgbClr val="E4E6EB"/>
+              <a:srgbClr val="DCDCDC"/>
             </a:solidFill>
             <a:prstDash val="solid"/>
           </a:ln>
@@ -6992,26 +8763,141 @@
       </p:sp>
       <p:sp>
         <p:nvSpPr>
-          <p:cNvPr id="6" name="Shape 4"/>
-          <p:cNvSpPr/>
-          <p:nvPr/>
-        </p:nvSpPr>
-        <p:spPr>
-          <a:xfrm>
-            <a:off x="969264" y="1993392"/>
-            <a:ext cx="329184" cy="329184"/>
-          </a:xfrm>
-          <a:prstGeom prst="roundRect">
-            <a:avLst>
-              <a:gd name="adj" fmla="val 16667"/>
-            </a:avLst>
+          <p:cNvPr id="6" name="Text 4"/>
+          <p:cNvSpPr/>
+          <p:nvPr/>
+        </p:nvSpPr>
+        <p:spPr>
+          <a:xfrm>
+            <a:off x="640080" y="640080"/>
+            <a:ext cx="10911535" cy="219456"/>
+          </a:xfrm>
+          <a:prstGeom prst="rect">
+            <a:avLst/>
+          </a:prstGeom>
+          <a:noFill/>
+          <a:ln/>
+        </p:spPr>
+        <p:txBody>
+          <a:bodyPr wrap="square" lIns="0" tIns="0" rIns="0" bIns="0" rtlCol="0" anchor="ctr"/>
+          <a:lstStyle/>
+          <a:p>
+            <a:pPr indent="0" marL="0">
+              <a:buNone/>
+            </a:pPr>
+            <a:r>
+              <a:rPr lang="en-US" sz="950" spc="260" kern="0" dirty="0">
+                <a:solidFill>
+                  <a:srgbClr val="8A8A8A"/>
+                </a:solidFill>
+                <a:latin typeface="Pretendard" pitchFamily="34" charset="0"/>
+                <a:ea typeface="Pretendard" pitchFamily="34" charset="-122"/>
+                <a:cs typeface="Pretendard" pitchFamily="34" charset="-120"/>
+              </a:rPr>
+              <a:t>HOMEWORK</a:t>
+            </a:r>
+            <a:endParaRPr lang="en-US" sz="950" dirty="0"/>
+          </a:p>
+        </p:txBody>
+      </p:sp>
+      <p:sp>
+        <p:nvSpPr>
+          <p:cNvPr id="7" name="Text 5"/>
+          <p:cNvSpPr/>
+          <p:nvPr/>
+        </p:nvSpPr>
+        <p:spPr>
+          <a:xfrm>
+            <a:off x="640080" y="859536"/>
+            <a:ext cx="10911535" cy="475488"/>
+          </a:xfrm>
+          <a:prstGeom prst="rect">
+            <a:avLst/>
+          </a:prstGeom>
+          <a:noFill/>
+          <a:ln/>
+        </p:spPr>
+        <p:txBody>
+          <a:bodyPr wrap="square" lIns="0" tIns="0" rIns="0" bIns="0" rtlCol="0" anchor="ctr"/>
+          <a:lstStyle/>
+          <a:p>
+            <a:pPr indent="0" marL="0">
+              <a:buNone/>
+            </a:pPr>
+            <a:r>
+              <a:rPr lang="en-US" sz="3000" dirty="0">
+                <a:solidFill>
+                  <a:srgbClr val="111111"/>
+                </a:solidFill>
+                <a:latin typeface="Pretendard Black" pitchFamily="34" charset="0"/>
+                <a:ea typeface="Pretendard Black" pitchFamily="34" charset="-122"/>
+                <a:cs typeface="Pretendard Black" pitchFamily="34" charset="-120"/>
+              </a:rPr>
+              <a:t>과제와 다음 주</a:t>
+            </a:r>
+            <a:endParaRPr lang="en-US" sz="3000" dirty="0"/>
+          </a:p>
+        </p:txBody>
+      </p:sp>
+      <p:sp>
+        <p:nvSpPr>
+          <p:cNvPr id="8" name="Text 6"/>
+          <p:cNvSpPr/>
+          <p:nvPr/>
+        </p:nvSpPr>
+        <p:spPr>
+          <a:xfrm>
+            <a:off x="640080" y="1371600"/>
+            <a:ext cx="10911535" cy="219456"/>
+          </a:xfrm>
+          <a:prstGeom prst="rect">
+            <a:avLst/>
+          </a:prstGeom>
+          <a:noFill/>
+          <a:ln/>
+        </p:spPr>
+        <p:txBody>
+          <a:bodyPr wrap="square" lIns="0" tIns="0" rIns="0" bIns="0" rtlCol="0" anchor="ctr"/>
+          <a:lstStyle/>
+          <a:p>
+            <a:pPr indent="0" marL="0">
+              <a:buNone/>
+            </a:pPr>
+            <a:r>
+              <a:rPr lang="en-US" sz="1150" dirty="0">
+                <a:solidFill>
+                  <a:srgbClr val="6E6E6E"/>
+                </a:solidFill>
+                <a:latin typeface="Pretendard" pitchFamily="34" charset="0"/>
+                <a:ea typeface="Pretendard" pitchFamily="34" charset="-122"/>
+                <a:cs typeface="Pretendard" pitchFamily="34" charset="-120"/>
+              </a:rPr>
+              <a:t>다음 주가 마지막입니다.</a:t>
+            </a:r>
+            <a:endParaRPr lang="en-US" sz="1150" dirty="0"/>
+          </a:p>
+        </p:txBody>
+      </p:sp>
+      <p:sp>
+        <p:nvSpPr>
+          <p:cNvPr id="9" name="Shape 7"/>
+          <p:cNvSpPr/>
+          <p:nvPr/>
+        </p:nvSpPr>
+        <p:spPr>
+          <a:xfrm>
+            <a:off x="640080" y="1719072"/>
+            <a:ext cx="6309360" cy="896112"/>
+          </a:xfrm>
+          <a:prstGeom prst="rect">
+            <a:avLst/>
           </a:prstGeom>
           <a:solidFill>
-            <a:srgbClr val="FF4A1C"/>
+            <a:srgbClr val="FFFFFF"/>
           </a:solidFill>
-          <a:ln w="6350">
+          <a:ln w="12700">
             <a:solidFill>
-              <a:srgbClr val="FF4A1C"/>
+              <a:srgbClr val="DCDCDC"/>
             </a:solidFill>
             <a:prstDash val="solid"/>
           </a:ln>
@@ -7019,7 +8905,7 @@
       </p:sp>
       <p:sp>
         <p:nvSpPr>
-          <p:cNvPr id="7" name="Text 5"/>
+          <p:cNvPr id="10" name="Shape 8"/>
           <p:cNvSpPr/>
           <p:nvPr/>
         </p:nvSpPr>
@@ -7028,6 +8914,31 @@
             <a:off x="969264" y="1993392"/>
             <a:ext cx="329184" cy="329184"/>
           </a:xfrm>
+          <a:prstGeom prst="ellipse">
+            <a:avLst/>
+          </a:prstGeom>
+          <a:solidFill>
+            <a:srgbClr val="111111"/>
+          </a:solidFill>
+          <a:ln w="12700">
+            <a:solidFill>
+              <a:srgbClr val="111111"/>
+            </a:solidFill>
+            <a:prstDash val="solid"/>
+          </a:ln>
+        </p:spPr>
+      </p:sp>
+      <p:sp>
+        <p:nvSpPr>
+          <p:cNvPr id="11" name="Text 9"/>
+          <p:cNvSpPr/>
+          <p:nvPr/>
+        </p:nvSpPr>
+        <p:spPr>
+          <a:xfrm>
+            <a:off x="969264" y="1993392"/>
+            <a:ext cx="329184" cy="329184"/>
+          </a:xfrm>
           <a:prstGeom prst="rect">
             <a:avLst/>
           </a:prstGeom>
@@ -7058,7 +8969,7 @@
       </p:sp>
       <p:sp>
         <p:nvSpPr>
-          <p:cNvPr id="8" name="Text 6"/>
+          <p:cNvPr id="12" name="Text 10"/>
           <p:cNvSpPr/>
           <p:nvPr/>
         </p:nvSpPr>
@@ -7081,13 +8992,13 @@
               <a:buNone/>
             </a:pPr>
             <a:r>
-              <a:rPr lang="en-US" sz="1400" b="1" dirty="0">
-                <a:solidFill>
-                  <a:srgbClr val="14161B"/>
-                </a:solidFill>
-                <a:latin typeface="Pretendard" pitchFamily="34" charset="0"/>
-                <a:ea typeface="Pretendard" pitchFamily="34" charset="-122"/>
-                <a:cs typeface="Pretendard" pitchFamily="34" charset="-120"/>
+              <a:rPr lang="en-US" sz="1400" dirty="0">
+                <a:solidFill>
+                  <a:srgbClr val="111111"/>
+                </a:solidFill>
+                <a:latin typeface="Pretendard Black" pitchFamily="34" charset="0"/>
+                <a:ea typeface="Pretendard Black" pitchFamily="34" charset="-122"/>
+                <a:cs typeface="Pretendard Black" pitchFamily="34" charset="-120"/>
               </a:rPr>
               <a:t>리허설 보완본 제출</a:t>
             </a:r>
@@ -7097,7 +9008,7 @@
       </p:sp>
       <p:sp>
         <p:nvSpPr>
-          <p:cNvPr id="9" name="Text 7"/>
+          <p:cNvPr id="13" name="Text 11"/>
           <p:cNvSpPr/>
           <p:nvPr/>
         </p:nvSpPr>
@@ -7125,7 +9036,7 @@
             <a:r>
               <a:rPr lang="en-US" sz="1100" dirty="0">
                 <a:solidFill>
-                  <a:srgbClr val="6B7280"/>
+                  <a:srgbClr val="6E6E6E"/>
                 </a:solidFill>
                 <a:latin typeface="Pretendard" pitchFamily="34" charset="0"/>
                 <a:ea typeface="Pretendard" pitchFamily="34" charset="-122"/>
@@ -7139,7 +9050,7 @@
       </p:sp>
       <p:sp>
         <p:nvSpPr>
-          <p:cNvPr id="10" name="Shape 8"/>
+          <p:cNvPr id="14" name="Shape 12"/>
           <p:cNvSpPr/>
           <p:nvPr/>
         </p:nvSpPr>
@@ -7148,17 +9059,15 @@
             <a:off x="640080" y="2743200"/>
             <a:ext cx="6309360" cy="896112"/>
           </a:xfrm>
-          <a:prstGeom prst="roundRect">
-            <a:avLst>
-              <a:gd name="adj" fmla="val 8163"/>
-            </a:avLst>
+          <a:prstGeom prst="rect">
+            <a:avLst/>
           </a:prstGeom>
           <a:solidFill>
-            <a:srgbClr val="F4F5F7"/>
+            <a:srgbClr val="FFFFFF"/>
           </a:solidFill>
           <a:ln w="12700">
             <a:solidFill>
-              <a:srgbClr val="E4E6EB"/>
+              <a:srgbClr val="DCDCDC"/>
             </a:solidFill>
             <a:prstDash val="solid"/>
           </a:ln>
@@ -7166,7 +9075,7 @@
       </p:sp>
       <p:sp>
         <p:nvSpPr>
-          <p:cNvPr id="11" name="Shape 9"/>
+          <p:cNvPr id="15" name="Shape 13"/>
           <p:cNvSpPr/>
           <p:nvPr/>
         </p:nvSpPr>
@@ -7175,17 +9084,15 @@
             <a:off x="969264" y="3017520"/>
             <a:ext cx="329184" cy="329184"/>
           </a:xfrm>
-          <a:prstGeom prst="roundRect">
-            <a:avLst>
-              <a:gd name="adj" fmla="val 16667"/>
-            </a:avLst>
+          <a:prstGeom prst="ellipse">
+            <a:avLst/>
           </a:prstGeom>
           <a:solidFill>
-            <a:srgbClr val="FF4A1C"/>
+            <a:srgbClr val="111111"/>
           </a:solidFill>
-          <a:ln w="6350">
+          <a:ln w="12700">
             <a:solidFill>
-              <a:srgbClr val="FF4A1C"/>
+              <a:srgbClr val="111111"/>
             </a:solidFill>
             <a:prstDash val="solid"/>
           </a:ln>
@@ -7193,7 +9100,7 @@
       </p:sp>
       <p:sp>
         <p:nvSpPr>
-          <p:cNvPr id="12" name="Text 10"/>
+          <p:cNvPr id="16" name="Text 14"/>
           <p:cNvSpPr/>
           <p:nvPr/>
         </p:nvSpPr>
@@ -7232,7 +9139,7 @@
       </p:sp>
       <p:sp>
         <p:nvSpPr>
-          <p:cNvPr id="13" name="Text 11"/>
+          <p:cNvPr id="17" name="Text 15"/>
           <p:cNvSpPr/>
           <p:nvPr/>
         </p:nvSpPr>
@@ -7255,13 +9162,13 @@
               <a:buNone/>
             </a:pPr>
             <a:r>
-              <a:rPr lang="en-US" sz="1400" b="1" dirty="0">
-                <a:solidFill>
-                  <a:srgbClr val="14161B"/>
-                </a:solidFill>
-                <a:latin typeface="Pretendard" pitchFamily="34" charset="0"/>
-                <a:ea typeface="Pretendard" pitchFamily="34" charset="-122"/>
-                <a:cs typeface="Pretendard" pitchFamily="34" charset="-120"/>
+              <a:rPr lang="en-US" sz="1400" dirty="0">
+                <a:solidFill>
+                  <a:srgbClr val="111111"/>
+                </a:solidFill>
+                <a:latin typeface="Pretendard Black" pitchFamily="34" charset="0"/>
+                <a:ea typeface="Pretendard Black" pitchFamily="34" charset="-122"/>
+                <a:cs typeface="Pretendard Black" pitchFamily="34" charset="-120"/>
               </a:rPr>
               <a:t>최종 포트폴리오 완성</a:t>
             </a:r>
@@ -7271,7 +9178,7 @@
       </p:sp>
       <p:sp>
         <p:nvSpPr>
-          <p:cNvPr id="14" name="Text 12"/>
+          <p:cNvPr id="18" name="Text 16"/>
           <p:cNvSpPr/>
           <p:nvPr/>
         </p:nvSpPr>
@@ -7299,7 +9206,7 @@
             <a:r>
               <a:rPr lang="en-US" sz="1100" dirty="0">
                 <a:solidFill>
-                  <a:srgbClr val="6B7280"/>
+                  <a:srgbClr val="6E6E6E"/>
                 </a:solidFill>
                 <a:latin typeface="Pretendard" pitchFamily="34" charset="0"/>
                 <a:ea typeface="Pretendard" pitchFamily="34" charset="-122"/>
@@ -7313,65 +9220,24 @@
       </p:sp>
       <p:sp>
         <p:nvSpPr>
-          <p:cNvPr id="15" name="Text 13"/>
-          <p:cNvSpPr/>
-          <p:nvPr/>
-        </p:nvSpPr>
-        <p:spPr>
-          <a:xfrm>
-            <a:off x="640080" y="3822192"/>
-            <a:ext cx="6309360" cy="329184"/>
-          </a:xfrm>
-          <a:prstGeom prst="rect">
-            <a:avLst/>
-          </a:prstGeom>
-          <a:noFill/>
-          <a:ln/>
-        </p:spPr>
-        <p:txBody>
-          <a:bodyPr wrap="square" lIns="0" tIns="0" rIns="0" bIns="0" rtlCol="0" anchor="ctr"/>
-          <a:lstStyle/>
-          <a:p>
-            <a:pPr indent="0" marL="0">
-              <a:buNone/>
-            </a:pPr>
-            <a:r>
-              <a:rPr lang="en-US" sz="1200" b="1" dirty="0">
-                <a:solidFill>
-                  <a:srgbClr val="FF4A1C"/>
-                </a:solidFill>
-                <a:latin typeface="Pretendard" pitchFamily="34" charset="0"/>
-                <a:ea typeface="Pretendard" pitchFamily="34" charset="-122"/>
-                <a:cs typeface="Pretendard" pitchFamily="34" charset="-120"/>
-              </a:rPr>
-              <a:t>제출 — 15주차 수업 전까지 · 최종본 제출</a:t>
-            </a:r>
-            <a:endParaRPr lang="en-US" sz="1200" dirty="0"/>
-          </a:p>
-        </p:txBody>
-      </p:sp>
-      <p:sp>
-        <p:nvSpPr>
-          <p:cNvPr id="16" name="Shape 14"/>
-          <p:cNvSpPr/>
-          <p:nvPr/>
-        </p:nvSpPr>
-        <p:spPr>
-          <a:xfrm>
-            <a:off x="7351776" y="1719072"/>
-            <a:ext cx="4199839" cy="3803904"/>
-          </a:xfrm>
-          <a:prstGeom prst="roundRect">
-            <a:avLst>
-              <a:gd name="adj" fmla="val 1923"/>
-            </a:avLst>
+          <p:cNvPr id="19" name="Shape 17"/>
+          <p:cNvSpPr/>
+          <p:nvPr/>
+        </p:nvSpPr>
+        <p:spPr>
+          <a:xfrm>
+            <a:off x="640080" y="3785616"/>
+            <a:ext cx="6309360" cy="7315"/>
+          </a:xfrm>
+          <a:prstGeom prst="rect">
+            <a:avLst/>
           </a:prstGeom>
           <a:solidFill>
-            <a:srgbClr val="14161B"/>
+            <a:srgbClr val="111111"/>
           </a:solidFill>
           <a:ln w="12700">
             <a:solidFill>
-              <a:srgbClr val="14161B"/>
+              <a:srgbClr val="111111"/>
             </a:solidFill>
             <a:prstDash val="solid"/>
           </a:ln>
@@ -7379,7 +9245,71 @@
       </p:sp>
       <p:sp>
         <p:nvSpPr>
-          <p:cNvPr id="17" name="Text 15"/>
+          <p:cNvPr id="20" name="Text 18"/>
+          <p:cNvSpPr/>
+          <p:nvPr/>
+        </p:nvSpPr>
+        <p:spPr>
+          <a:xfrm>
+            <a:off x="640080" y="3877056"/>
+            <a:ext cx="6309360" cy="329184"/>
+          </a:xfrm>
+          <a:prstGeom prst="rect">
+            <a:avLst/>
+          </a:prstGeom>
+          <a:noFill/>
+          <a:ln/>
+        </p:spPr>
+        <p:txBody>
+          <a:bodyPr wrap="square" lIns="0" tIns="0" rIns="0" bIns="0" rtlCol="0" anchor="ctr"/>
+          <a:lstStyle/>
+          <a:p>
+            <a:pPr indent="0" marL="0">
+              <a:buNone/>
+            </a:pPr>
+            <a:r>
+              <a:rPr lang="en-US" sz="1200" b="1" dirty="0">
+                <a:solidFill>
+                  <a:srgbClr val="111111"/>
+                </a:solidFill>
+                <a:latin typeface="Pretendard" pitchFamily="34" charset="0"/>
+                <a:ea typeface="Pretendard" pitchFamily="34" charset="-122"/>
+                <a:cs typeface="Pretendard" pitchFamily="34" charset="-120"/>
+              </a:rPr>
+              <a:t>제출 — 15주차 수업 전까지 · 최종본 제출</a:t>
+            </a:r>
+            <a:endParaRPr lang="en-US" sz="1200" dirty="0"/>
+          </a:p>
+        </p:txBody>
+      </p:sp>
+      <p:sp>
+        <p:nvSpPr>
+          <p:cNvPr id="21" name="Shape 19"/>
+          <p:cNvSpPr/>
+          <p:nvPr/>
+        </p:nvSpPr>
+        <p:spPr>
+          <a:xfrm>
+            <a:off x="7351776" y="1719072"/>
+            <a:ext cx="4199839" cy="3803904"/>
+          </a:xfrm>
+          <a:prstGeom prst="rect">
+            <a:avLst/>
+          </a:prstGeom>
+          <a:solidFill>
+            <a:srgbClr val="111111"/>
+          </a:solidFill>
+          <a:ln w="12700">
+            <a:solidFill>
+              <a:srgbClr val="111111"/>
+            </a:solidFill>
+            <a:prstDash val="solid"/>
+          </a:ln>
+        </p:spPr>
+      </p:sp>
+      <p:sp>
+        <p:nvSpPr>
+          <p:cNvPr id="22" name="Text 20"/>
           <p:cNvSpPr/>
           <p:nvPr/>
         </p:nvSpPr>
@@ -7402,9 +9332,9 @@
               <a:buNone/>
             </a:pPr>
             <a:r>
-              <a:rPr lang="en-US" sz="1000" b="1" spc="140" kern="0" dirty="0">
-                <a:solidFill>
-                  <a:srgbClr val="FF4A1C"/>
+              <a:rPr lang="en-US" sz="950" spc="260" kern="0" dirty="0">
+                <a:solidFill>
+                  <a:srgbClr val="9A9A9A"/>
                 </a:solidFill>
                 <a:latin typeface="Pretendard" pitchFamily="34" charset="0"/>
                 <a:ea typeface="Pretendard" pitchFamily="34" charset="-122"/>
@@ -7412,13 +9342,13 @@
               </a:rPr>
               <a:t>NEXT WEEK</a:t>
             </a:r>
-            <a:endParaRPr lang="en-US" sz="1000" dirty="0"/>
-          </a:p>
-        </p:txBody>
-      </p:sp>
-      <p:sp>
-        <p:nvSpPr>
-          <p:cNvPr id="18" name="Text 16"/>
+            <a:endParaRPr lang="en-US" sz="950" dirty="0"/>
+          </a:p>
+        </p:txBody>
+      </p:sp>
+      <p:sp>
+        <p:nvSpPr>
+          <p:cNvPr id="23" name="Text 21"/>
           <p:cNvSpPr/>
           <p:nvPr/>
         </p:nvSpPr>
@@ -7457,7 +9387,7 @@
       </p:sp>
       <p:sp>
         <p:nvSpPr>
-          <p:cNvPr id="19" name="Text 17"/>
+          <p:cNvPr id="24" name="Text 22"/>
           <p:cNvSpPr/>
           <p:nvPr/>
         </p:nvSpPr>
@@ -7483,13 +9413,13 @@
               <a:buNone/>
             </a:pPr>
             <a:r>
-              <a:rPr lang="en-US" sz="1700" b="1" dirty="0">
+              <a:rPr lang="en-US" sz="1700" dirty="0">
                 <a:solidFill>
                   <a:srgbClr val="FFFFFF"/>
                 </a:solidFill>
-                <a:latin typeface="Pretendard" pitchFamily="34" charset="0"/>
-                <a:ea typeface="Pretendard" pitchFamily="34" charset="-122"/>
-                <a:cs typeface="Pretendard" pitchFamily="34" charset="-120"/>
+                <a:latin typeface="Pretendard Black" pitchFamily="34" charset="0"/>
+                <a:ea typeface="Pretendard Black" pitchFamily="34" charset="-122"/>
+                <a:cs typeface="Pretendard Black" pitchFamily="34" charset="-120"/>
               </a:rPr>
               <a:t>기말 발표 및 종합 평가</a:t>
             </a:r>
@@ -7499,24 +9429,24 @@
       </p:sp>
       <p:sp>
         <p:nvSpPr>
-          <p:cNvPr id="20" name="Shape 18"/>
+          <p:cNvPr id="25" name="Shape 23"/>
           <p:cNvSpPr/>
           <p:nvPr/>
         </p:nvSpPr>
         <p:spPr>
           <a:xfrm>
             <a:off x="7735824" y="3346704"/>
-            <a:ext cx="3431743" cy="9144"/>
+            <a:ext cx="3431743" cy="7315"/>
           </a:xfrm>
           <a:prstGeom prst="rect">
             <a:avLst/>
           </a:prstGeom>
           <a:solidFill>
-            <a:srgbClr val="3A3F4B"/>
+            <a:srgbClr val="333333"/>
           </a:solidFill>
           <a:ln w="12700">
             <a:solidFill>
-              <a:srgbClr val="3A3F4B"/>
+              <a:srgbClr val="333333"/>
             </a:solidFill>
             <a:prstDash val="solid"/>
           </a:ln>
@@ -7524,7 +9454,7 @@
       </p:sp>
       <p:sp>
         <p:nvSpPr>
-          <p:cNvPr id="21" name="Text 19"/>
+          <p:cNvPr id="26" name="Text 24"/>
           <p:cNvSpPr/>
           <p:nvPr/>
         </p:nvSpPr>
@@ -7556,7 +9486,7 @@
             <a:r>
               <a:rPr lang="en-US" sz="1150" dirty="0">
                 <a:solidFill>
-                  <a:srgbClr val="DDE0E6"/>
+                  <a:srgbClr val="DDDDDD"/>
                 </a:solidFill>
                 <a:latin typeface="Pretendard" pitchFamily="34" charset="0"/>
                 <a:ea typeface="Pretendard" pitchFamily="34" charset="-122"/>
@@ -7580,7 +9510,7 @@
             <a:r>
               <a:rPr lang="en-US" sz="1150" dirty="0">
                 <a:solidFill>
-                  <a:srgbClr val="DDE0E6"/>
+                  <a:srgbClr val="DDDDDD"/>
                 </a:solidFill>
                 <a:latin typeface="Pretendard" pitchFamily="34" charset="0"/>
                 <a:ea typeface="Pretendard" pitchFamily="34" charset="-122"/>
@@ -7604,7 +9534,7 @@
             <a:r>
               <a:rPr lang="en-US" sz="1150" dirty="0">
                 <a:solidFill>
-                  <a:srgbClr val="DDE0E6"/>
+                  <a:srgbClr val="DDDDDD"/>
                 </a:solidFill>
                 <a:latin typeface="Pretendard" pitchFamily="34" charset="0"/>
                 <a:ea typeface="Pretendard" pitchFamily="34" charset="-122"/>
@@ -7628,7 +9558,7 @@
             <a:r>
               <a:rPr lang="en-US" sz="1150" dirty="0">
                 <a:solidFill>
-                  <a:srgbClr val="DDE0E6"/>
+                  <a:srgbClr val="DDDDDD"/>
                 </a:solidFill>
                 <a:latin typeface="Pretendard" pitchFamily="34" charset="0"/>
                 <a:ea typeface="Pretendard" pitchFamily="34" charset="-122"/>
@@ -7642,24 +9572,24 @@
       </p:sp>
       <p:sp>
         <p:nvSpPr>
-          <p:cNvPr id="22" name="Shape 20"/>
+          <p:cNvPr id="27" name="Shape 25"/>
           <p:cNvSpPr/>
           <p:nvPr/>
         </p:nvSpPr>
         <p:spPr>
           <a:xfrm>
             <a:off x="7735824" y="4700016"/>
-            <a:ext cx="3431743" cy="9144"/>
+            <a:ext cx="3431743" cy="7315"/>
           </a:xfrm>
           <a:prstGeom prst="rect">
             <a:avLst/>
           </a:prstGeom>
           <a:solidFill>
-            <a:srgbClr val="3A3F4B"/>
+            <a:srgbClr val="333333"/>
           </a:solidFill>
           <a:ln w="12700">
             <a:solidFill>
-              <a:srgbClr val="3A3F4B"/>
+              <a:srgbClr val="333333"/>
             </a:solidFill>
             <a:prstDash val="solid"/>
           </a:ln>
@@ -7667,7 +9597,7 @@
       </p:sp>
       <p:sp>
         <p:nvSpPr>
-          <p:cNvPr id="23" name="Text 21"/>
+          <p:cNvPr id="28" name="Text 26"/>
           <p:cNvSpPr/>
           <p:nvPr/>
         </p:nvSpPr>
@@ -7690,9 +9620,9 @@
               <a:buNone/>
             </a:pPr>
             <a:r>
-              <a:rPr lang="en-US" sz="950" b="1" spc="100" kern="0" dirty="0">
-                <a:solidFill>
-                  <a:srgbClr val="9AA0AA"/>
+              <a:rPr lang="en-US" sz="900" spc="160" kern="0" dirty="0">
+                <a:solidFill>
+                  <a:srgbClr val="9B9B9B"/>
                 </a:solidFill>
                 <a:latin typeface="Pretendard" pitchFamily="34" charset="0"/>
                 <a:ea typeface="Pretendard" pitchFamily="34" charset="-122"/>
@@ -7700,13 +9630,13 @@
               </a:rPr>
               <a:t>미리 준비할 것</a:t>
             </a:r>
-            <a:endParaRPr lang="en-US" sz="950" dirty="0"/>
-          </a:p>
-        </p:txBody>
-      </p:sp>
-      <p:sp>
-        <p:nvSpPr>
-          <p:cNvPr id="24" name="Text 22"/>
+            <a:endParaRPr lang="en-US" sz="900" dirty="0"/>
+          </a:p>
+        </p:txBody>
+      </p:sp>
+      <p:sp>
+        <p:nvSpPr>
+          <p:cNvPr id="29" name="Text 27"/>
           <p:cNvSpPr/>
           <p:nvPr/>
         </p:nvSpPr>
@@ -7734,7 +9664,7 @@
             <a:r>
               <a:rPr lang="en-US" sz="1100" b="1" dirty="0">
                 <a:solidFill>
-                  <a:srgbClr val="FF4A1C"/>
+                  <a:srgbClr val="FFFFFF"/>
                 </a:solidFill>
                 <a:latin typeface="Pretendard" pitchFamily="34" charset="0"/>
                 <a:ea typeface="Pretendard" pitchFamily="34" charset="-122"/>
@@ -7748,14 +9678,39 @@
       </p:sp>
       <p:sp>
         <p:nvSpPr>
-          <p:cNvPr id="25" name="Text 23"/>
-          <p:cNvSpPr/>
-          <p:nvPr/>
-        </p:nvSpPr>
-        <p:spPr>
-          <a:xfrm>
-            <a:off x="640080" y="6345936"/>
-            <a:ext cx="7772400" cy="256032"/>
+          <p:cNvPr id="30" name="Shape 28"/>
+          <p:cNvSpPr/>
+          <p:nvPr/>
+        </p:nvSpPr>
+        <p:spPr>
+          <a:xfrm>
+            <a:off x="640080" y="6291072"/>
+            <a:ext cx="10911535" cy="7315"/>
+          </a:xfrm>
+          <a:prstGeom prst="rect">
+            <a:avLst/>
+          </a:prstGeom>
+          <a:solidFill>
+            <a:srgbClr val="DCDCDC"/>
+          </a:solidFill>
+          <a:ln w="12700">
+            <a:solidFill>
+              <a:srgbClr val="DCDCDC"/>
+            </a:solidFill>
+            <a:prstDash val="solid"/>
+          </a:ln>
+        </p:spPr>
+      </p:sp>
+      <p:sp>
+        <p:nvSpPr>
+          <p:cNvPr id="31" name="Text 29"/>
+          <p:cNvSpPr/>
+          <p:nvPr/>
+        </p:nvSpPr>
+        <p:spPr>
+          <a:xfrm>
+            <a:off x="640080" y="6382512"/>
+            <a:ext cx="7772400" cy="237744"/>
           </a:xfrm>
           <a:prstGeom prst="rect">
             <a:avLst/>
@@ -7771,9 +9726,9 @@
               <a:buNone/>
             </a:pPr>
             <a:r>
-              <a:rPr lang="en-US" sz="900" dirty="0">
-                <a:solidFill>
-                  <a:srgbClr val="9AA0AA"/>
+              <a:rPr lang="en-US" sz="850" spc="40" kern="0" dirty="0">
+                <a:solidFill>
+                  <a:srgbClr val="9B9B9B"/>
                 </a:solidFill>
                 <a:latin typeface="Pretendard" pitchFamily="34" charset="0"/>
                 <a:ea typeface="Pretendard" pitchFamily="34" charset="-122"/>
@@ -7781,20 +9736,20 @@
               </a:rPr>
               <a:t>포트폴리오제작 · 14주차 최종 리허설 및 동료 피드백</a:t>
             </a:r>
-            <a:endParaRPr lang="en-US" sz="900" dirty="0"/>
-          </a:p>
-        </p:txBody>
-      </p:sp>
-      <p:sp>
-        <p:nvSpPr>
-          <p:cNvPr id="26" name="Text 24"/>
-          <p:cNvSpPr/>
-          <p:nvPr/>
-        </p:nvSpPr>
-        <p:spPr>
-          <a:xfrm>
-            <a:off x="10454335" y="6345936"/>
-            <a:ext cx="1097280" cy="256032"/>
+            <a:endParaRPr lang="en-US" sz="850" dirty="0"/>
+          </a:p>
+        </p:txBody>
+      </p:sp>
+      <p:sp>
+        <p:nvSpPr>
+          <p:cNvPr id="32" name="Text 30"/>
+          <p:cNvSpPr/>
+          <p:nvPr/>
+        </p:nvSpPr>
+        <p:spPr>
+          <a:xfrm>
+            <a:off x="10271455" y="6382512"/>
+            <a:ext cx="1280160" cy="237744"/>
           </a:xfrm>
           <a:prstGeom prst="rect">
             <a:avLst/>
@@ -7810,17 +9765,17 @@
               <a:buNone/>
             </a:pPr>
             <a:r>
-              <a:rPr lang="en-US" sz="900" dirty="0">
-                <a:solidFill>
-                  <a:srgbClr val="9AA0AA"/>
-                </a:solidFill>
-                <a:latin typeface="Pretendard" pitchFamily="34" charset="0"/>
-                <a:ea typeface="Pretendard" pitchFamily="34" charset="-122"/>
-                <a:cs typeface="Pretendard" pitchFamily="34" charset="-120"/>
-              </a:rPr>
-              <a:t>06</a:t>
-            </a:r>
-            <a:endParaRPr lang="en-US" sz="900" dirty="0"/>
+              <a:rPr lang="en-US" sz="850" spc="140" kern="0" dirty="0">
+                <a:solidFill>
+                  <a:srgbClr val="9B9B9B"/>
+                </a:solidFill>
+                <a:latin typeface="Pretendard" pitchFamily="34" charset="0"/>
+                <a:ea typeface="Pretendard" pitchFamily="34" charset="-122"/>
+                <a:cs typeface="Pretendard" pitchFamily="34" charset="-120"/>
+              </a:rPr>
+              <a:t>P.06</a:t>
+            </a:r>
+            <a:endParaRPr lang="en-US" sz="850" dirty="0"/>
           </a:p>
         </p:txBody>
       </p:sp>

--- a/dist/weeks-포트폴리오제작/포트폴리오제작_14주차_리허설.pptx
+++ b/dist/weeks-포트폴리오제작/포트폴리오제작_14주차_리허설.pptx
@@ -6514,7 +6514,7 @@
         <p:spPr>
           <a:xfrm>
             <a:off x="1353312" y="1755648"/>
-            <a:ext cx="4248760" cy="585216"/>
+            <a:ext cx="4267048" cy="585216"/>
           </a:xfrm>
           <a:prstGeom prst="rect">
             <a:avLst/>
@@ -6642,7 +6642,7 @@
         <p:spPr>
           <a:xfrm>
             <a:off x="1353312" y="2487168"/>
-            <a:ext cx="4248760" cy="585216"/>
+            <a:ext cx="4267048" cy="585216"/>
           </a:xfrm>
           <a:prstGeom prst="rect">
             <a:avLst/>
@@ -6770,7 +6770,7 @@
         <p:spPr>
           <a:xfrm>
             <a:off x="1353312" y="3218688"/>
-            <a:ext cx="4248760" cy="585216"/>
+            <a:ext cx="4267048" cy="585216"/>
           </a:xfrm>
           <a:prstGeom prst="rect">
             <a:avLst/>
@@ -6898,7 +6898,7 @@
         <p:spPr>
           <a:xfrm>
             <a:off x="1353312" y="3950208"/>
-            <a:ext cx="4248760" cy="585216"/>
+            <a:ext cx="4267048" cy="585216"/>
           </a:xfrm>
           <a:prstGeom prst="rect">
             <a:avLst/>
@@ -7026,7 +7026,7 @@
         <p:spPr>
           <a:xfrm>
             <a:off x="7010248" y="1755648"/>
-            <a:ext cx="4248760" cy="585216"/>
+            <a:ext cx="4267048" cy="585216"/>
           </a:xfrm>
           <a:prstGeom prst="rect">
             <a:avLst/>
@@ -7154,7 +7154,7 @@
         <p:spPr>
           <a:xfrm>
             <a:off x="7010248" y="2487168"/>
-            <a:ext cx="4248760" cy="585216"/>
+            <a:ext cx="4267048" cy="585216"/>
           </a:xfrm>
           <a:prstGeom prst="rect">
             <a:avLst/>
@@ -7282,7 +7282,7 @@
         <p:spPr>
           <a:xfrm>
             <a:off x="7010248" y="3218688"/>
-            <a:ext cx="4248760" cy="585216"/>
+            <a:ext cx="4267048" cy="585216"/>
           </a:xfrm>
           <a:prstGeom prst="rect">
             <a:avLst/>
@@ -7410,7 +7410,7 @@
         <p:spPr>
           <a:xfrm>
             <a:off x="7010248" y="3950208"/>
-            <a:ext cx="4248760" cy="585216"/>
+            <a:ext cx="4267048" cy="585216"/>
           </a:xfrm>
           <a:prstGeom prst="rect">
             <a:avLst/>
@@ -7448,7 +7448,7 @@
         </p:nvSpPr>
         <p:spPr>
           <a:xfrm>
-            <a:off x="640080" y="5468112"/>
+            <a:off x="640080" y="4736592"/>
             <a:ext cx="10911535" cy="7315"/>
           </a:xfrm>
           <a:prstGeom prst="rect">
@@ -7473,7 +7473,7 @@
         </p:nvSpPr>
         <p:spPr>
           <a:xfrm>
-            <a:off x="640080" y="5577840"/>
+            <a:off x="640080" y="4846320"/>
             <a:ext cx="10911535" cy="402336"/>
           </a:xfrm>
           <a:prstGeom prst="rect">

--- a/dist/weeks-포트폴리오제작/포트폴리오제작_14주차_리허설.pptx
+++ b/dist/weeks-포트폴리오제작/포트폴리오제작_14주차_리허설.pptx
@@ -2155,7 +2155,7 @@
                 <a:ea typeface="Pretendard" pitchFamily="34" charset="-122"/>
                 <a:cs typeface="Pretendard" pitchFamily="34" charset="-120"/>
               </a:rPr>
-              <a:t>90분 — 조별 리허설 40분 · 동료 평가 30분 · 보완 계획 10분</a:t>
+              <a:t>120분 — 조별 리허설 50분 · 동료 평가 35분 · 보완 계획 10분</a:t>
             </a:r>
             <a:endParaRPr lang="en-US" sz="1200" dirty="0"/>
           </a:p>
@@ -2549,7 +2549,7 @@
                 <a:ea typeface="Pretendard Black" pitchFamily="34" charset="-122"/>
                 <a:cs typeface="Pretendard Black" pitchFamily="34" charset="-120"/>
               </a:rPr>
-              <a:t>오늘의 90분</a:t>
+              <a:t>오늘의 120분</a:t>
             </a:r>
             <a:endParaRPr lang="en-US" sz="3000" dirty="0"/>
           </a:p>
@@ -2588,7 +2588,7 @@
                 <a:ea typeface="Pretendard" pitchFamily="34" charset="-122"/>
                 <a:cs typeface="Pretendard" pitchFamily="34" charset="-120"/>
               </a:rPr>
-              <a:t>조별 리허설 40분 · 동료 평가 30분 · 보완 계획 10분</a:t>
+              <a:t>조별 리허설 50분 · 동료 평가 35분 · 보완 계획 10분</a:t>
             </a:r>
             <a:endParaRPr lang="en-US" sz="1150" dirty="0"/>
           </a:p>
@@ -2628,7 +2628,7 @@
         <p:spPr>
           <a:xfrm>
             <a:off x="640080" y="1719072"/>
-            <a:ext cx="1600200" cy="932688"/>
+            <a:ext cx="1600200" cy="691896"/>
           </a:xfrm>
           <a:prstGeom prst="rect">
             <a:avLst/>
@@ -2652,7 +2652,7 @@
                 <a:ea typeface="Pretendard" pitchFamily="34" charset="-122"/>
                 <a:cs typeface="Pretendard" pitchFamily="34" charset="-120"/>
               </a:rPr>
-              <a:t>00:00–00:40</a:t>
+              <a:t>00:00–00:10</a:t>
             </a:r>
             <a:endParaRPr lang="en-US" sz="1050" dirty="0"/>
           </a:p>
@@ -2667,7 +2667,7 @@
         <p:spPr>
           <a:xfrm>
             <a:off x="2377440" y="1719072"/>
-            <a:ext cx="6888175" cy="932688"/>
+            <a:ext cx="6888175" cy="691896"/>
           </a:xfrm>
           <a:prstGeom prst="rect">
             <a:avLst/>
@@ -2691,7 +2691,7 @@
                 <a:ea typeface="Pretendard" pitchFamily="34" charset="-122"/>
                 <a:cs typeface="Pretendard" pitchFamily="34" charset="-120"/>
               </a:rPr>
-              <a:t>조별 리허설</a:t>
+              <a:t>리허설 진행 방식 안내</a:t>
             </a:r>
             <a:endParaRPr lang="en-US" sz="1300" dirty="0"/>
           </a:p>
@@ -2706,7 +2706,7 @@
         <p:spPr>
           <a:xfrm>
             <a:off x="9265615" y="1719072"/>
-            <a:ext cx="2286000" cy="932688"/>
+            <a:ext cx="2286000" cy="691896"/>
           </a:xfrm>
           <a:prstGeom prst="rect">
             <a:avLst/>
@@ -2730,7 +2730,7 @@
                 <a:ea typeface="Pretendard" pitchFamily="34" charset="-122"/>
                 <a:cs typeface="Pretendard" pitchFamily="34" charset="-120"/>
               </a:rPr>
-              <a:t>4~5인 조별</a:t>
+              <a:t>안내</a:t>
             </a:r>
             <a:endParaRPr lang="en-US" sz="1050" dirty="0"/>
           </a:p>
@@ -2744,7 +2744,7 @@
         </p:nvSpPr>
         <p:spPr>
           <a:xfrm>
-            <a:off x="640080" y="2633472"/>
+            <a:off x="640080" y="2392680"/>
             <a:ext cx="10911535" cy="7315"/>
           </a:xfrm>
           <a:prstGeom prst="rect">
@@ -2769,8 +2769,8 @@
         </p:nvSpPr>
         <p:spPr>
           <a:xfrm>
-            <a:off x="640080" y="2651760"/>
-            <a:ext cx="1600200" cy="932688"/>
+            <a:off x="640080" y="2410968"/>
+            <a:ext cx="1600200" cy="691896"/>
           </a:xfrm>
           <a:prstGeom prst="rect">
             <a:avLst/>
@@ -2794,7 +2794,7 @@
                 <a:ea typeface="Pretendard" pitchFamily="34" charset="-122"/>
                 <a:cs typeface="Pretendard" pitchFamily="34" charset="-120"/>
               </a:rPr>
-              <a:t>00:40–01:10</a:t>
+              <a:t>00:10–01:00</a:t>
             </a:r>
             <a:endParaRPr lang="en-US" sz="1050" dirty="0"/>
           </a:p>
@@ -2808,8 +2808,8 @@
         </p:nvSpPr>
         <p:spPr>
           <a:xfrm>
-            <a:off x="2377440" y="2651760"/>
-            <a:ext cx="6888175" cy="932688"/>
+            <a:off x="2377440" y="2410968"/>
+            <a:ext cx="6888175" cy="691896"/>
           </a:xfrm>
           <a:prstGeom prst="rect">
             <a:avLst/>
@@ -2833,7 +2833,7 @@
                 <a:ea typeface="Pretendard" pitchFamily="34" charset="-122"/>
                 <a:cs typeface="Pretendard" pitchFamily="34" charset="-120"/>
               </a:rPr>
-              <a:t>동료 평가 및 피드백</a:t>
+              <a:t>조별 리허설</a:t>
             </a:r>
             <a:endParaRPr lang="en-US" sz="1300" dirty="0"/>
           </a:p>
@@ -2847,8 +2847,8 @@
         </p:nvSpPr>
         <p:spPr>
           <a:xfrm>
-            <a:off x="9265615" y="2651760"/>
-            <a:ext cx="2286000" cy="932688"/>
+            <a:off x="9265615" y="2410968"/>
+            <a:ext cx="2286000" cy="691896"/>
           </a:xfrm>
           <a:prstGeom prst="rect">
             <a:avLst/>
@@ -2872,7 +2872,7 @@
                 <a:ea typeface="Pretendard" pitchFamily="34" charset="-122"/>
                 <a:cs typeface="Pretendard" pitchFamily="34" charset="-120"/>
               </a:rPr>
-              <a:t>조별</a:t>
+              <a:t>4~5인 조별</a:t>
             </a:r>
             <a:endParaRPr lang="en-US" sz="1050" dirty="0"/>
           </a:p>
@@ -2886,7 +2886,7 @@
         </p:nvSpPr>
         <p:spPr>
           <a:xfrm>
-            <a:off x="640080" y="3566160"/>
+            <a:off x="640080" y="3084576"/>
             <a:ext cx="10911535" cy="7315"/>
           </a:xfrm>
           <a:prstGeom prst="rect">
@@ -2911,8 +2911,8 @@
         </p:nvSpPr>
         <p:spPr>
           <a:xfrm>
-            <a:off x="640080" y="3584448"/>
-            <a:ext cx="1600200" cy="932688"/>
+            <a:off x="640080" y="3102864"/>
+            <a:ext cx="1600200" cy="691896"/>
           </a:xfrm>
           <a:prstGeom prst="rect">
             <a:avLst/>
@@ -2928,6 +2928,109 @@
               <a:buNone/>
             </a:pPr>
             <a:r>
+              <a:rPr lang="en-US" sz="1050" spc="60" kern="0" dirty="0">
+                <a:solidFill>
+                  <a:srgbClr val="9B9B9B"/>
+                </a:solidFill>
+                <a:latin typeface="Pretendard" pitchFamily="34" charset="0"/>
+                <a:ea typeface="Pretendard" pitchFamily="34" charset="-122"/>
+                <a:cs typeface="Pretendard" pitchFamily="34" charset="-120"/>
+              </a:rPr>
+              <a:t>01:00–01:10</a:t>
+            </a:r>
+            <a:endParaRPr lang="en-US" sz="1050" dirty="0"/>
+          </a:p>
+        </p:txBody>
+      </p:sp>
+      <p:sp>
+        <p:nvSpPr>
+          <p:cNvPr id="19" name="Text 17"/>
+          <p:cNvSpPr/>
+          <p:nvPr/>
+        </p:nvSpPr>
+        <p:spPr>
+          <a:xfrm>
+            <a:off x="2377440" y="3102864"/>
+            <a:ext cx="6888175" cy="691896"/>
+          </a:xfrm>
+          <a:prstGeom prst="rect">
+            <a:avLst/>
+          </a:prstGeom>
+          <a:noFill/>
+          <a:ln/>
+        </p:spPr>
+        <p:txBody>
+          <a:bodyPr wrap="square" lIns="0" tIns="0" rIns="0" bIns="0" rtlCol="0" anchor="ctr"/>
+          <a:lstStyle/>
+          <a:p>
+            <a:pPr indent="0" marL="0">
+              <a:buNone/>
+            </a:pPr>
+            <a:r>
+              <a:rPr lang="en-US" sz="1100" dirty="0">
+                <a:solidFill>
+                  <a:srgbClr val="9B9B9B"/>
+                </a:solidFill>
+                <a:latin typeface="Pretendard" pitchFamily="34" charset="0"/>
+                <a:ea typeface="Pretendard" pitchFamily="34" charset="-122"/>
+                <a:cs typeface="Pretendard" pitchFamily="34" charset="-120"/>
+              </a:rPr>
+              <a:t>휴식</a:t>
+            </a:r>
+            <a:endParaRPr lang="en-US" sz="1100" dirty="0"/>
+          </a:p>
+        </p:txBody>
+      </p:sp>
+      <p:sp>
+        <p:nvSpPr>
+          <p:cNvPr id="20" name="Shape 18"/>
+          <p:cNvSpPr/>
+          <p:nvPr/>
+        </p:nvSpPr>
+        <p:spPr>
+          <a:xfrm>
+            <a:off x="640080" y="3776472"/>
+            <a:ext cx="10911535" cy="7315"/>
+          </a:xfrm>
+          <a:prstGeom prst="rect">
+            <a:avLst/>
+          </a:prstGeom>
+          <a:solidFill>
+            <a:srgbClr val="EFEFEF"/>
+          </a:solidFill>
+          <a:ln w="12700">
+            <a:solidFill>
+              <a:srgbClr val="EFEFEF"/>
+            </a:solidFill>
+            <a:prstDash val="solid"/>
+          </a:ln>
+        </p:spPr>
+      </p:sp>
+      <p:sp>
+        <p:nvSpPr>
+          <p:cNvPr id="21" name="Text 19"/>
+          <p:cNvSpPr/>
+          <p:nvPr/>
+        </p:nvSpPr>
+        <p:spPr>
+          <a:xfrm>
+            <a:off x="640080" y="3794760"/>
+            <a:ext cx="1600200" cy="691896"/>
+          </a:xfrm>
+          <a:prstGeom prst="rect">
+            <a:avLst/>
+          </a:prstGeom>
+          <a:noFill/>
+          <a:ln/>
+        </p:spPr>
+        <p:txBody>
+          <a:bodyPr wrap="square" lIns="0" tIns="0" rIns="0" bIns="0" rtlCol="0" anchor="ctr"/>
+          <a:lstStyle/>
+          <a:p>
+            <a:pPr indent="0" marL="0">
+              <a:buNone/>
+            </a:pPr>
+            <a:r>
               <a:rPr lang="en-US" sz="1050" b="1" spc="60" kern="0" dirty="0">
                 <a:solidFill>
                   <a:srgbClr val="111111"/>
@@ -2936,7 +3039,7 @@
                 <a:ea typeface="Pretendard" pitchFamily="34" charset="-122"/>
                 <a:cs typeface="Pretendard" pitchFamily="34" charset="-120"/>
               </a:rPr>
-              <a:t>01:10–01:20</a:t>
+              <a:t>01:10–01:45</a:t>
             </a:r>
             <a:endParaRPr lang="en-US" sz="1050" dirty="0"/>
           </a:p>
@@ -2944,14 +3047,14 @@
       </p:sp>
       <p:sp>
         <p:nvSpPr>
-          <p:cNvPr id="19" name="Text 17"/>
-          <p:cNvSpPr/>
-          <p:nvPr/>
-        </p:nvSpPr>
-        <p:spPr>
-          <a:xfrm>
-            <a:off x="2377440" y="3584448"/>
-            <a:ext cx="6888175" cy="932688"/>
+          <p:cNvPr id="22" name="Text 20"/>
+          <p:cNvSpPr/>
+          <p:nvPr/>
+        </p:nvSpPr>
+        <p:spPr>
+          <a:xfrm>
+            <a:off x="2377440" y="3794760"/>
+            <a:ext cx="6888175" cy="691896"/>
           </a:xfrm>
           <a:prstGeom prst="rect">
             <a:avLst/>
@@ -2975,7 +3078,7 @@
                 <a:ea typeface="Pretendard" pitchFamily="34" charset="-122"/>
                 <a:cs typeface="Pretendard" pitchFamily="34" charset="-120"/>
               </a:rPr>
-              <a:t>최종 보완 계획 수립</a:t>
+              <a:t>동료 평가 및 피드백</a:t>
             </a:r>
             <a:endParaRPr lang="en-US" sz="1300" dirty="0"/>
           </a:p>
@@ -2983,14 +3086,14 @@
       </p:sp>
       <p:sp>
         <p:nvSpPr>
-          <p:cNvPr id="20" name="Text 18"/>
-          <p:cNvSpPr/>
-          <p:nvPr/>
-        </p:nvSpPr>
-        <p:spPr>
-          <a:xfrm>
-            <a:off x="9265615" y="3584448"/>
-            <a:ext cx="2286000" cy="932688"/>
+          <p:cNvPr id="23" name="Text 21"/>
+          <p:cNvSpPr/>
+          <p:nvPr/>
+        </p:nvSpPr>
+        <p:spPr>
+          <a:xfrm>
+            <a:off x="9265615" y="3794760"/>
+            <a:ext cx="2286000" cy="691896"/>
           </a:xfrm>
           <a:prstGeom prst="rect">
             <a:avLst/>
@@ -3014,7 +3117,7 @@
                 <a:ea typeface="Pretendard" pitchFamily="34" charset="-122"/>
                 <a:cs typeface="Pretendard" pitchFamily="34" charset="-120"/>
               </a:rPr>
-              <a:t>개인 워크</a:t>
+              <a:t>조별</a:t>
             </a:r>
             <a:endParaRPr lang="en-US" sz="1050" dirty="0"/>
           </a:p>
@@ -3022,13 +3125,13 @@
       </p:sp>
       <p:sp>
         <p:nvSpPr>
-          <p:cNvPr id="21" name="Shape 19"/>
-          <p:cNvSpPr/>
-          <p:nvPr/>
-        </p:nvSpPr>
-        <p:spPr>
-          <a:xfrm>
-            <a:off x="640080" y="4498848"/>
+          <p:cNvPr id="24" name="Shape 22"/>
+          <p:cNvSpPr/>
+          <p:nvPr/>
+        </p:nvSpPr>
+        <p:spPr>
+          <a:xfrm>
+            <a:off x="640080" y="4468368"/>
             <a:ext cx="10911535" cy="7315"/>
           </a:xfrm>
           <a:prstGeom prst="rect">
@@ -3047,14 +3150,14 @@
       </p:sp>
       <p:sp>
         <p:nvSpPr>
-          <p:cNvPr id="22" name="Text 20"/>
-          <p:cNvSpPr/>
-          <p:nvPr/>
-        </p:nvSpPr>
-        <p:spPr>
-          <a:xfrm>
-            <a:off x="640080" y="4517136"/>
-            <a:ext cx="1600200" cy="932688"/>
+          <p:cNvPr id="25" name="Text 23"/>
+          <p:cNvSpPr/>
+          <p:nvPr/>
+        </p:nvSpPr>
+        <p:spPr>
+          <a:xfrm>
+            <a:off x="640080" y="4486656"/>
+            <a:ext cx="1600200" cy="691896"/>
           </a:xfrm>
           <a:prstGeom prst="rect">
             <a:avLst/>
@@ -3078,7 +3181,7 @@
                 <a:ea typeface="Pretendard" pitchFamily="34" charset="-122"/>
                 <a:cs typeface="Pretendard" pitchFamily="34" charset="-120"/>
               </a:rPr>
-              <a:t>01:20–01:30</a:t>
+              <a:t>01:45–01:55</a:t>
             </a:r>
             <a:endParaRPr lang="en-US" sz="1050" dirty="0"/>
           </a:p>
@@ -3086,14 +3189,14 @@
       </p:sp>
       <p:sp>
         <p:nvSpPr>
-          <p:cNvPr id="23" name="Text 21"/>
-          <p:cNvSpPr/>
-          <p:nvPr/>
-        </p:nvSpPr>
-        <p:spPr>
-          <a:xfrm>
-            <a:off x="2377440" y="4517136"/>
-            <a:ext cx="6888175" cy="932688"/>
+          <p:cNvPr id="26" name="Text 24"/>
+          <p:cNvSpPr/>
+          <p:nvPr/>
+        </p:nvSpPr>
+        <p:spPr>
+          <a:xfrm>
+            <a:off x="2377440" y="4486656"/>
+            <a:ext cx="6888175" cy="691896"/>
           </a:xfrm>
           <a:prstGeom prst="rect">
             <a:avLst/>
@@ -3117,6 +3220,148 @@
                 <a:ea typeface="Pretendard" pitchFamily="34" charset="-122"/>
                 <a:cs typeface="Pretendard" pitchFamily="34" charset="-120"/>
               </a:rPr>
+              <a:t>최종 보완 계획 수립</a:t>
+            </a:r>
+            <a:endParaRPr lang="en-US" sz="1300" dirty="0"/>
+          </a:p>
+        </p:txBody>
+      </p:sp>
+      <p:sp>
+        <p:nvSpPr>
+          <p:cNvPr id="27" name="Text 25"/>
+          <p:cNvSpPr/>
+          <p:nvPr/>
+        </p:nvSpPr>
+        <p:spPr>
+          <a:xfrm>
+            <a:off x="9265615" y="4486656"/>
+            <a:ext cx="2286000" cy="691896"/>
+          </a:xfrm>
+          <a:prstGeom prst="rect">
+            <a:avLst/>
+          </a:prstGeom>
+          <a:noFill/>
+          <a:ln/>
+        </p:spPr>
+        <p:txBody>
+          <a:bodyPr wrap="square" lIns="0" tIns="0" rIns="0" bIns="0" rtlCol="0" anchor="ctr"/>
+          <a:lstStyle/>
+          <a:p>
+            <a:pPr algn="r" indent="0" marL="0">
+              <a:buNone/>
+            </a:pPr>
+            <a:r>
+              <a:rPr lang="en-US" sz="1050" dirty="0">
+                <a:solidFill>
+                  <a:srgbClr val="6E6E6E"/>
+                </a:solidFill>
+                <a:latin typeface="Pretendard" pitchFamily="34" charset="0"/>
+                <a:ea typeface="Pretendard" pitchFamily="34" charset="-122"/>
+                <a:cs typeface="Pretendard" pitchFamily="34" charset="-120"/>
+              </a:rPr>
+              <a:t>개인 워크</a:t>
+            </a:r>
+            <a:endParaRPr lang="en-US" sz="1050" dirty="0"/>
+          </a:p>
+        </p:txBody>
+      </p:sp>
+      <p:sp>
+        <p:nvSpPr>
+          <p:cNvPr id="28" name="Shape 26"/>
+          <p:cNvSpPr/>
+          <p:nvPr/>
+        </p:nvSpPr>
+        <p:spPr>
+          <a:xfrm>
+            <a:off x="640080" y="5160264"/>
+            <a:ext cx="10911535" cy="7315"/>
+          </a:xfrm>
+          <a:prstGeom prst="rect">
+            <a:avLst/>
+          </a:prstGeom>
+          <a:solidFill>
+            <a:srgbClr val="DCDCDC"/>
+          </a:solidFill>
+          <a:ln w="12700">
+            <a:solidFill>
+              <a:srgbClr val="DCDCDC"/>
+            </a:solidFill>
+            <a:prstDash val="solid"/>
+          </a:ln>
+        </p:spPr>
+      </p:sp>
+      <p:sp>
+        <p:nvSpPr>
+          <p:cNvPr id="29" name="Text 27"/>
+          <p:cNvSpPr/>
+          <p:nvPr/>
+        </p:nvSpPr>
+        <p:spPr>
+          <a:xfrm>
+            <a:off x="640080" y="5178552"/>
+            <a:ext cx="1600200" cy="691896"/>
+          </a:xfrm>
+          <a:prstGeom prst="rect">
+            <a:avLst/>
+          </a:prstGeom>
+          <a:noFill/>
+          <a:ln/>
+        </p:spPr>
+        <p:txBody>
+          <a:bodyPr wrap="square" lIns="0" tIns="0" rIns="0" bIns="0" rtlCol="0" anchor="ctr"/>
+          <a:lstStyle/>
+          <a:p>
+            <a:pPr indent="0" marL="0">
+              <a:buNone/>
+            </a:pPr>
+            <a:r>
+              <a:rPr lang="en-US" sz="1050" b="1" spc="60" kern="0" dirty="0">
+                <a:solidFill>
+                  <a:srgbClr val="111111"/>
+                </a:solidFill>
+                <a:latin typeface="Pretendard" pitchFamily="34" charset="0"/>
+                <a:ea typeface="Pretendard" pitchFamily="34" charset="-122"/>
+                <a:cs typeface="Pretendard" pitchFamily="34" charset="-120"/>
+              </a:rPr>
+              <a:t>01:55–02:00</a:t>
+            </a:r>
+            <a:endParaRPr lang="en-US" sz="1050" dirty="0"/>
+          </a:p>
+        </p:txBody>
+      </p:sp>
+      <p:sp>
+        <p:nvSpPr>
+          <p:cNvPr id="30" name="Text 28"/>
+          <p:cNvSpPr/>
+          <p:nvPr/>
+        </p:nvSpPr>
+        <p:spPr>
+          <a:xfrm>
+            <a:off x="2377440" y="5178552"/>
+            <a:ext cx="6888175" cy="691896"/>
+          </a:xfrm>
+          <a:prstGeom prst="rect">
+            <a:avLst/>
+          </a:prstGeom>
+          <a:noFill/>
+          <a:ln/>
+        </p:spPr>
+        <p:txBody>
+          <a:bodyPr wrap="square" lIns="0" tIns="0" rIns="0" bIns="0" rtlCol="0" anchor="ctr"/>
+          <a:lstStyle/>
+          <a:p>
+            <a:pPr indent="0" marL="0">
+              <a:buNone/>
+            </a:pPr>
+            <a:r>
+              <a:rPr lang="en-US" sz="1300" b="1" dirty="0">
+                <a:solidFill>
+                  <a:srgbClr val="111111"/>
+                </a:solidFill>
+                <a:latin typeface="Pretendard" pitchFamily="34" charset="0"/>
+                <a:ea typeface="Pretendard" pitchFamily="34" charset="-122"/>
+                <a:cs typeface="Pretendard" pitchFamily="34" charset="-120"/>
+              </a:rPr>
               <a:t>기말 발표 안내</a:t>
             </a:r>
             <a:endParaRPr lang="en-US" sz="1300" dirty="0"/>
@@ -3125,14 +3370,14 @@
       </p:sp>
       <p:sp>
         <p:nvSpPr>
-          <p:cNvPr id="24" name="Text 22"/>
-          <p:cNvSpPr/>
-          <p:nvPr/>
-        </p:nvSpPr>
-        <p:spPr>
-          <a:xfrm>
-            <a:off x="9265615" y="4517136"/>
-            <a:ext cx="2286000" cy="932688"/>
+          <p:cNvPr id="31" name="Text 29"/>
+          <p:cNvSpPr/>
+          <p:nvPr/>
+        </p:nvSpPr>
+        <p:spPr>
+          <a:xfrm>
+            <a:off x="9265615" y="5178552"/>
+            <a:ext cx="2286000" cy="691896"/>
           </a:xfrm>
           <a:prstGeom prst="rect">
             <a:avLst/>
@@ -3164,13 +3409,13 @@
       </p:sp>
       <p:sp>
         <p:nvSpPr>
-          <p:cNvPr id="25" name="Shape 23"/>
-          <p:cNvSpPr/>
-          <p:nvPr/>
-        </p:nvSpPr>
-        <p:spPr>
-          <a:xfrm>
-            <a:off x="640080" y="5431536"/>
+          <p:cNvPr id="32" name="Shape 30"/>
+          <p:cNvSpPr/>
+          <p:nvPr/>
+        </p:nvSpPr>
+        <p:spPr>
+          <a:xfrm>
+            <a:off x="640080" y="5852160"/>
             <a:ext cx="10911535" cy="7315"/>
           </a:xfrm>
           <a:prstGeom prst="rect">
@@ -3189,7 +3434,7 @@
       </p:sp>
       <p:sp>
         <p:nvSpPr>
-          <p:cNvPr id="26" name="Shape 24"/>
+          <p:cNvPr id="33" name="Shape 31"/>
           <p:cNvSpPr/>
           <p:nvPr/>
         </p:nvSpPr>
@@ -3214,7 +3459,7 @@
       </p:sp>
       <p:sp>
         <p:nvSpPr>
-          <p:cNvPr id="27" name="Text 25"/>
+          <p:cNvPr id="34" name="Text 32"/>
           <p:cNvSpPr/>
           <p:nvPr/>
         </p:nvSpPr>
@@ -3253,7 +3498,7 @@
       </p:sp>
       <p:sp>
         <p:nvSpPr>
-          <p:cNvPr id="28" name="Text 26"/>
+          <p:cNvPr id="35" name="Text 33"/>
           <p:cNvSpPr/>
           <p:nvPr/>
         </p:nvSpPr>

--- a/dist/weeks-포트폴리오제작/포트폴리오제작_14주차_리허설.pptx
+++ b/dist/weeks-포트폴리오제작/포트폴리오제작_14주차_리허설.pptx
@@ -510,7 +510,8 @@
           <a:p>
             <a:r>
               <a:rPr lang="en-US" dirty="0"/>
-              <a:t>마지막 실습 주차다. 여기서 나온 지적을 일주일 안에 다 고칠 수는 없으므로, 우선순위 세 개로 좁히는 것이 오늘의 실질적 목표다.</a:t>
+              <a:t>[운영 메모]
+마지막 실습 주차다. 여기서 나온 지적을 일주일 안에 다 고칠 수는 없으므로, 우선순위 세 개로 좁히는 것이 오늘의 실질적 목표다.</a:t>
             </a:r>
             <a:endParaRPr lang="en-US" dirty="0"/>
           </a:p>
@@ -598,7 +599,8 @@
           <a:p>
             <a:r>
               <a:rPr lang="en-US" dirty="0"/>
-              <a:t>조를 4~5인으로 짜면 40분에 한 명당 8분(발표 3 + 코멘트 5)이 나온다. 조별 진행이므로 강사는 순회하며 시간 관리만 봐줄 것.</a:t>
+              <a:t>[운영 메모]
+조를 4~5인으로 짜면 40분에 한 명당 8분(발표 3 + 코멘트 5)이 나온다. 조별 진행이므로 강사는 순회하며 시간 관리만 봐줄 것.</a:t>
             </a:r>
             <a:endParaRPr lang="en-US" dirty="0"/>
           </a:p>
@@ -686,7 +688,8 @@
           <a:p>
             <a:r>
               <a:rPr lang="en-US" dirty="0"/>
-              <a:t>마지막 주에 새 프로젝트를 추가하려는 학생이 매년 있다. 오늘 못 박을 것.</a:t>
+              <a:t>[운영 메모]
+마지막 주에 새 프로젝트를 추가하려는 학생이 매년 있다. 오늘 못 박을 것.</a:t>
             </a:r>
             <a:endParaRPr lang="en-US" dirty="0"/>
           </a:p>
@@ -774,7 +777,8 @@
           <a:p>
             <a:r>
               <a:rPr lang="en-US" dirty="0"/>
-              <a:t>타이머를 조마다 하나씩 두게 할 것.</a:t>
+              <a:t>[운영 메모]
+타이머를 조마다 하나씩 두게 할 것.</a:t>
             </a:r>
             <a:endParaRPr lang="en-US" dirty="0"/>
           </a:p>
@@ -862,7 +866,8 @@
           <a:p>
             <a:r>
               <a:rPr lang="en-US" dirty="0"/>
-              <a:t>기말은 7분이지만 오늘 리허설은 3분 스크립트 기준이다. 7분 발표는 3분 코어 + 질의로 운영한다고 안내할 것.</a:t>
+              <a:t>[운영 메모]
+기말은 7분이지만 오늘 리허설은 3분 스크립트 기준이다. 7분 발표는 3분 코어 + 질의로 운영한다고 안내할 것.</a:t>
             </a:r>
             <a:endParaRPr lang="en-US" dirty="0"/>
           </a:p>
@@ -950,7 +955,8 @@
           <a:p>
             <a:r>
               <a:rPr lang="en-US" dirty="0"/>
-              <a:t>체크리스트를 인쇄해 나눠줄 것.</a:t>
+              <a:t>[운영 메모]
+체크리스트를 인쇄해 나눠줄 것.</a:t>
             </a:r>
             <a:endParaRPr lang="en-US" dirty="0"/>
           </a:p>
@@ -1038,7 +1044,8 @@
           <a:p>
             <a:r>
               <a:rPr lang="en-US" dirty="0"/>
-              <a:t>'두 개만'이 중요하다. 8개를 다 지적받으면 학생이 무너진다.</a:t>
+              <a:t>[운영 메모]
+'두 개만'이 중요하다. 8개를 다 지적받으면 학생이 무너진다.</a:t>
             </a:r>
             <a:endParaRPr lang="en-US" dirty="0"/>
           </a:p>
@@ -1126,7 +1133,8 @@
           <a:p>
             <a:r>
               <a:rPr lang="en-US" dirty="0"/>
-              <a:t>학생들이 03부터 손대는 경우가 많다. 순서를 판서해두고 계획표를 쓰게 할 것.</a:t>
+              <a:t>[운영 메모]
+학생들이 03부터 손대는 경우가 많다. 순서를 판서해두고 계획표를 쓰게 할 것.</a:t>
             </a:r>
             <a:endParaRPr lang="en-US" dirty="0"/>
           </a:p>
@@ -1214,7 +1222,8 @@
           <a:p>
             <a:r>
               <a:rPr lang="en-US" dirty="0"/>
-              <a:t>일주일에 세 개면 충분하다. 더 고치려다 완성도가 떨어지는 경우가 더 많다고 미리 말해줄 것.</a:t>
+              <a:t>[운영 메모]
+일주일에 세 개면 충분하다. 더 고치려다 완성도가 떨어지는 경우가 더 많다고 미리 말해줄 것.</a:t>
             </a:r>
             <a:endParaRPr lang="en-US" dirty="0"/>
           </a:p>
